--- a/AI_Viewers_Hackathon_Presentation_v2_symbols.pptx
+++ b/AI_Viewers_Hackathon_Presentation_v2_symbols.pptx
@@ -117,7 +117,18 @@
   </p:defaultTextStyle>
   <p:extLst>
     <p:ext uri="{EFAFB233-063F-42B5-8137-9DF3F51BA10A}">
-      <p15:sldGuideLst xmlns:p15="http://schemas.microsoft.com/office/powerpoint/2012/main" xmlns=""/>
+      <p15:sldGuideLst xmlns:p15="http://schemas.microsoft.com/office/powerpoint/2012/main">
+        <p15:guide id="1" orient="horz" pos="2160">
+          <p15:clr>
+            <a:srgbClr val="A4A3A4"/>
+          </p15:clr>
+        </p15:guide>
+        <p15:guide id="2" pos="3840">
+          <p15:clr>
+            <a:srgbClr val="A4A3A4"/>
+          </p15:clr>
+        </p15:guide>
+      </p15:sldGuideLst>
     </p:ext>
   </p:extLst>
 </p:presentation>
@@ -205,7 +216,7 @@
           <a:p>
             <a:fld id="{FD8B9730-C9F6-4FF6-8B50-FCF72AE02E3F}" type="datetimeFigureOut">
               <a:rPr lang="en-IN" smtClean="0"/>
-              <a:t>13-03-2026</a:t>
+              <a:t>15-03-2026</a:t>
             </a:fld>
             <a:endParaRPr lang="en-IN"/>
           </a:p>
@@ -495,7 +506,7 @@
           <p:cNvPr id="2" name="Title 1">
             <a:extLst>
               <a:ext uri="{FF2B5EF4-FFF2-40B4-BE49-F238E27FC236}">
-                <a16:creationId xmlns:a16="http://schemas.microsoft.com/office/drawing/2014/main" xmlns="" id="{3B7C93CC-52ED-48C6-B4FB-A900E7E71E1A}"/>
+                <a16:creationId xmlns:a16="http://schemas.microsoft.com/office/drawing/2014/main" id="{3B7C93CC-52ED-48C6-B4FB-A900E7E71E1A}"/>
               </a:ext>
             </a:extLst>
           </p:cNvPr>
@@ -533,7 +544,7 @@
           <p:cNvPr id="3" name="Subtitle 2">
             <a:extLst>
               <a:ext uri="{FF2B5EF4-FFF2-40B4-BE49-F238E27FC236}">
-                <a16:creationId xmlns:a16="http://schemas.microsoft.com/office/drawing/2014/main" xmlns="" id="{711B921D-333D-50CF-2B5F-50703EA2761C}"/>
+                <a16:creationId xmlns:a16="http://schemas.microsoft.com/office/drawing/2014/main" id="{711B921D-333D-50CF-2B5F-50703EA2761C}"/>
               </a:ext>
             </a:extLst>
           </p:cNvPr>
@@ -604,7 +615,7 @@
           <p:cNvPr id="4" name="Date Placeholder 3">
             <a:extLst>
               <a:ext uri="{FF2B5EF4-FFF2-40B4-BE49-F238E27FC236}">
-                <a16:creationId xmlns:a16="http://schemas.microsoft.com/office/drawing/2014/main" xmlns="" id="{447B6255-C732-731A-6D5D-524C8FAC2472}"/>
+                <a16:creationId xmlns:a16="http://schemas.microsoft.com/office/drawing/2014/main" id="{447B6255-C732-731A-6D5D-524C8FAC2472}"/>
               </a:ext>
             </a:extLst>
           </p:cNvPr>
@@ -622,7 +633,7 @@
           <a:p>
             <a:fld id="{B0EBE5CA-C56E-4B79-B345-6747DECA69D6}" type="datetime1">
               <a:rPr lang="en-IN" smtClean="0"/>
-              <a:t>13-03-2026</a:t>
+              <a:t>15-03-2026</a:t>
             </a:fld>
             <a:endParaRPr lang="en-IN"/>
           </a:p>
@@ -633,7 +644,7 @@
           <p:cNvPr id="5" name="Footer Placeholder 4">
             <a:extLst>
               <a:ext uri="{FF2B5EF4-FFF2-40B4-BE49-F238E27FC236}">
-                <a16:creationId xmlns:a16="http://schemas.microsoft.com/office/drawing/2014/main" xmlns="" id="{A5E70FFB-9FFF-C54D-CB92-DD7C76B1543A}"/>
+                <a16:creationId xmlns:a16="http://schemas.microsoft.com/office/drawing/2014/main" id="{A5E70FFB-9FFF-C54D-CB92-DD7C76B1543A}"/>
               </a:ext>
             </a:extLst>
           </p:cNvPr>
@@ -658,7 +669,7 @@
           <p:cNvPr id="6" name="Slide Number Placeholder 5">
             <a:extLst>
               <a:ext uri="{FF2B5EF4-FFF2-40B4-BE49-F238E27FC236}">
-                <a16:creationId xmlns:a16="http://schemas.microsoft.com/office/drawing/2014/main" xmlns="" id="{803BF83A-EEAB-290E-1520-6AC01A1D3460}"/>
+                <a16:creationId xmlns:a16="http://schemas.microsoft.com/office/drawing/2014/main" id="{803BF83A-EEAB-290E-1520-6AC01A1D3460}"/>
               </a:ext>
             </a:extLst>
           </p:cNvPr>
@@ -717,7 +728,7 @@
           <p:cNvPr id="2" name="Title 1">
             <a:extLst>
               <a:ext uri="{FF2B5EF4-FFF2-40B4-BE49-F238E27FC236}">
-                <a16:creationId xmlns:a16="http://schemas.microsoft.com/office/drawing/2014/main" xmlns="" id="{BB0E930B-7FC8-2C11-E7AC-DE70426314D7}"/>
+                <a16:creationId xmlns:a16="http://schemas.microsoft.com/office/drawing/2014/main" id="{BB0E930B-7FC8-2C11-E7AC-DE70426314D7}"/>
               </a:ext>
             </a:extLst>
           </p:cNvPr>
@@ -746,7 +757,7 @@
           <p:cNvPr id="3" name="Vertical Text Placeholder 2">
             <a:extLst>
               <a:ext uri="{FF2B5EF4-FFF2-40B4-BE49-F238E27FC236}">
-                <a16:creationId xmlns:a16="http://schemas.microsoft.com/office/drawing/2014/main" xmlns="" id="{EEFF5B1D-0F8B-9CDD-59CF-F7ADA2CE28D9}"/>
+                <a16:creationId xmlns:a16="http://schemas.microsoft.com/office/drawing/2014/main" id="{EEFF5B1D-0F8B-9CDD-59CF-F7ADA2CE28D9}"/>
               </a:ext>
             </a:extLst>
           </p:cNvPr>
@@ -804,7 +815,7 @@
           <p:cNvPr id="4" name="Date Placeholder 3">
             <a:extLst>
               <a:ext uri="{FF2B5EF4-FFF2-40B4-BE49-F238E27FC236}">
-                <a16:creationId xmlns:a16="http://schemas.microsoft.com/office/drawing/2014/main" xmlns="" id="{3AF2378D-FF98-B657-2A71-2A5ADFD303EB}"/>
+                <a16:creationId xmlns:a16="http://schemas.microsoft.com/office/drawing/2014/main" id="{3AF2378D-FF98-B657-2A71-2A5ADFD303EB}"/>
               </a:ext>
             </a:extLst>
           </p:cNvPr>
@@ -822,7 +833,7 @@
           <a:p>
             <a:fld id="{989B3E3C-862D-4834-9AEC-9FAE86CCA9D4}" type="datetime1">
               <a:rPr lang="en-IN" smtClean="0"/>
-              <a:t>13-03-2026</a:t>
+              <a:t>15-03-2026</a:t>
             </a:fld>
             <a:endParaRPr lang="en-IN"/>
           </a:p>
@@ -833,7 +844,7 @@
           <p:cNvPr id="5" name="Footer Placeholder 4">
             <a:extLst>
               <a:ext uri="{FF2B5EF4-FFF2-40B4-BE49-F238E27FC236}">
-                <a16:creationId xmlns:a16="http://schemas.microsoft.com/office/drawing/2014/main" xmlns="" id="{F3CD4ECC-19A9-49D1-E9E2-0C3CBFD76C66}"/>
+                <a16:creationId xmlns:a16="http://schemas.microsoft.com/office/drawing/2014/main" id="{F3CD4ECC-19A9-49D1-E9E2-0C3CBFD76C66}"/>
               </a:ext>
             </a:extLst>
           </p:cNvPr>
@@ -858,7 +869,7 @@
           <p:cNvPr id="6" name="Slide Number Placeholder 5">
             <a:extLst>
               <a:ext uri="{FF2B5EF4-FFF2-40B4-BE49-F238E27FC236}">
-                <a16:creationId xmlns:a16="http://schemas.microsoft.com/office/drawing/2014/main" xmlns="" id="{328E46F1-6445-82E9-D8EA-08312C82FEAD}"/>
+                <a16:creationId xmlns:a16="http://schemas.microsoft.com/office/drawing/2014/main" id="{328E46F1-6445-82E9-D8EA-08312C82FEAD}"/>
               </a:ext>
             </a:extLst>
           </p:cNvPr>
@@ -917,7 +928,7 @@
           <p:cNvPr id="2" name="Vertical Title 1">
             <a:extLst>
               <a:ext uri="{FF2B5EF4-FFF2-40B4-BE49-F238E27FC236}">
-                <a16:creationId xmlns:a16="http://schemas.microsoft.com/office/drawing/2014/main" xmlns="" id="{AEAA7C89-8CE2-5D35-3495-047CA3FC5B4A}"/>
+                <a16:creationId xmlns:a16="http://schemas.microsoft.com/office/drawing/2014/main" id="{AEAA7C89-8CE2-5D35-3495-047CA3FC5B4A}"/>
               </a:ext>
             </a:extLst>
           </p:cNvPr>
@@ -951,7 +962,7 @@
           <p:cNvPr id="3" name="Vertical Text Placeholder 2">
             <a:extLst>
               <a:ext uri="{FF2B5EF4-FFF2-40B4-BE49-F238E27FC236}">
-                <a16:creationId xmlns:a16="http://schemas.microsoft.com/office/drawing/2014/main" xmlns="" id="{89B9D066-3587-2D12-A5F5-A7C3F68C4E19}"/>
+                <a16:creationId xmlns:a16="http://schemas.microsoft.com/office/drawing/2014/main" id="{89B9D066-3587-2D12-A5F5-A7C3F68C4E19}"/>
               </a:ext>
             </a:extLst>
           </p:cNvPr>
@@ -1014,7 +1025,7 @@
           <p:cNvPr id="4" name="Date Placeholder 3">
             <a:extLst>
               <a:ext uri="{FF2B5EF4-FFF2-40B4-BE49-F238E27FC236}">
-                <a16:creationId xmlns:a16="http://schemas.microsoft.com/office/drawing/2014/main" xmlns="" id="{AB58E5C5-6769-9126-2E0F-3FB933002B34}"/>
+                <a16:creationId xmlns:a16="http://schemas.microsoft.com/office/drawing/2014/main" id="{AB58E5C5-6769-9126-2E0F-3FB933002B34}"/>
               </a:ext>
             </a:extLst>
           </p:cNvPr>
@@ -1032,7 +1043,7 @@
           <a:p>
             <a:fld id="{762A694A-4CD2-435A-9C19-498AACE9B7CE}" type="datetime1">
               <a:rPr lang="en-IN" smtClean="0"/>
-              <a:t>13-03-2026</a:t>
+              <a:t>15-03-2026</a:t>
             </a:fld>
             <a:endParaRPr lang="en-IN"/>
           </a:p>
@@ -1043,7 +1054,7 @@
           <p:cNvPr id="5" name="Footer Placeholder 4">
             <a:extLst>
               <a:ext uri="{FF2B5EF4-FFF2-40B4-BE49-F238E27FC236}">
-                <a16:creationId xmlns:a16="http://schemas.microsoft.com/office/drawing/2014/main" xmlns="" id="{F5F6B0E7-5DF9-11F1-3B40-72CF29CE2079}"/>
+                <a16:creationId xmlns:a16="http://schemas.microsoft.com/office/drawing/2014/main" id="{F5F6B0E7-5DF9-11F1-3B40-72CF29CE2079}"/>
               </a:ext>
             </a:extLst>
           </p:cNvPr>
@@ -1068,7 +1079,7 @@
           <p:cNvPr id="6" name="Slide Number Placeholder 5">
             <a:extLst>
               <a:ext uri="{FF2B5EF4-FFF2-40B4-BE49-F238E27FC236}">
-                <a16:creationId xmlns:a16="http://schemas.microsoft.com/office/drawing/2014/main" xmlns="" id="{ECBAC463-1A33-4D06-A923-EEF0DFFDA055}"/>
+                <a16:creationId xmlns:a16="http://schemas.microsoft.com/office/drawing/2014/main" id="{ECBAC463-1A33-4D06-A923-EEF0DFFDA055}"/>
               </a:ext>
             </a:extLst>
           </p:cNvPr>
@@ -1127,7 +1138,7 @@
           <p:cNvPr id="2" name="Title 1">
             <a:extLst>
               <a:ext uri="{FF2B5EF4-FFF2-40B4-BE49-F238E27FC236}">
-                <a16:creationId xmlns:a16="http://schemas.microsoft.com/office/drawing/2014/main" xmlns="" id="{6A87F3DE-B59B-D468-9D80-18B684922A3F}"/>
+                <a16:creationId xmlns:a16="http://schemas.microsoft.com/office/drawing/2014/main" id="{6A87F3DE-B59B-D468-9D80-18B684922A3F}"/>
               </a:ext>
             </a:extLst>
           </p:cNvPr>
@@ -1156,7 +1167,7 @@
           <p:cNvPr id="3" name="Content Placeholder 2">
             <a:extLst>
               <a:ext uri="{FF2B5EF4-FFF2-40B4-BE49-F238E27FC236}">
-                <a16:creationId xmlns:a16="http://schemas.microsoft.com/office/drawing/2014/main" xmlns="" id="{2536FB1B-46A5-EF58-62EF-4EE19809C55E}"/>
+                <a16:creationId xmlns:a16="http://schemas.microsoft.com/office/drawing/2014/main" id="{2536FB1B-46A5-EF58-62EF-4EE19809C55E}"/>
               </a:ext>
             </a:extLst>
           </p:cNvPr>
@@ -1214,7 +1225,7 @@
           <p:cNvPr id="4" name="Date Placeholder 3">
             <a:extLst>
               <a:ext uri="{FF2B5EF4-FFF2-40B4-BE49-F238E27FC236}">
-                <a16:creationId xmlns:a16="http://schemas.microsoft.com/office/drawing/2014/main" xmlns="" id="{781DC524-2CC0-2C3B-468E-C00BAB0B496B}"/>
+                <a16:creationId xmlns:a16="http://schemas.microsoft.com/office/drawing/2014/main" id="{781DC524-2CC0-2C3B-468E-C00BAB0B496B}"/>
               </a:ext>
             </a:extLst>
           </p:cNvPr>
@@ -1232,7 +1243,7 @@
           <a:p>
             <a:fld id="{D38B752C-4AF0-4EE9-85A1-B21DBD4BB89D}" type="datetime1">
               <a:rPr lang="en-IN" smtClean="0"/>
-              <a:t>13-03-2026</a:t>
+              <a:t>15-03-2026</a:t>
             </a:fld>
             <a:endParaRPr lang="en-IN"/>
           </a:p>
@@ -1243,7 +1254,7 @@
           <p:cNvPr id="5" name="Footer Placeholder 4">
             <a:extLst>
               <a:ext uri="{FF2B5EF4-FFF2-40B4-BE49-F238E27FC236}">
-                <a16:creationId xmlns:a16="http://schemas.microsoft.com/office/drawing/2014/main" xmlns="" id="{62948345-456C-AA05-A515-6BBBE7073043}"/>
+                <a16:creationId xmlns:a16="http://schemas.microsoft.com/office/drawing/2014/main" id="{62948345-456C-AA05-A515-6BBBE7073043}"/>
               </a:ext>
             </a:extLst>
           </p:cNvPr>
@@ -1268,7 +1279,7 @@
           <p:cNvPr id="6" name="Slide Number Placeholder 5">
             <a:extLst>
               <a:ext uri="{FF2B5EF4-FFF2-40B4-BE49-F238E27FC236}">
-                <a16:creationId xmlns:a16="http://schemas.microsoft.com/office/drawing/2014/main" xmlns="" id="{FF710BAF-1C8D-4F88-EE18-B453A45BAF14}"/>
+                <a16:creationId xmlns:a16="http://schemas.microsoft.com/office/drawing/2014/main" id="{FF710BAF-1C8D-4F88-EE18-B453A45BAF14}"/>
               </a:ext>
             </a:extLst>
           </p:cNvPr>
@@ -1327,7 +1338,7 @@
           <p:cNvPr id="2" name="Title 1">
             <a:extLst>
               <a:ext uri="{FF2B5EF4-FFF2-40B4-BE49-F238E27FC236}">
-                <a16:creationId xmlns:a16="http://schemas.microsoft.com/office/drawing/2014/main" xmlns="" id="{36575C42-DE78-53DD-136F-59150D2C653A}"/>
+                <a16:creationId xmlns:a16="http://schemas.microsoft.com/office/drawing/2014/main" id="{36575C42-DE78-53DD-136F-59150D2C653A}"/>
               </a:ext>
             </a:extLst>
           </p:cNvPr>
@@ -1365,7 +1376,7 @@
           <p:cNvPr id="3" name="Text Placeholder 2">
             <a:extLst>
               <a:ext uri="{FF2B5EF4-FFF2-40B4-BE49-F238E27FC236}">
-                <a16:creationId xmlns:a16="http://schemas.microsoft.com/office/drawing/2014/main" xmlns="" id="{2AC87743-2B36-0276-8A03-14CA76D61EEE}"/>
+                <a16:creationId xmlns:a16="http://schemas.microsoft.com/office/drawing/2014/main" id="{2AC87743-2B36-0276-8A03-14CA76D61EEE}"/>
               </a:ext>
             </a:extLst>
           </p:cNvPr>
@@ -1490,7 +1501,7 @@
           <p:cNvPr id="4" name="Date Placeholder 3">
             <a:extLst>
               <a:ext uri="{FF2B5EF4-FFF2-40B4-BE49-F238E27FC236}">
-                <a16:creationId xmlns:a16="http://schemas.microsoft.com/office/drawing/2014/main" xmlns="" id="{49A978D6-BCCB-1D2C-1000-2F87416356E2}"/>
+                <a16:creationId xmlns:a16="http://schemas.microsoft.com/office/drawing/2014/main" id="{49A978D6-BCCB-1D2C-1000-2F87416356E2}"/>
               </a:ext>
             </a:extLst>
           </p:cNvPr>
@@ -1508,7 +1519,7 @@
           <a:p>
             <a:fld id="{C154764F-6140-477F-A454-3F3D34240203}" type="datetime1">
               <a:rPr lang="en-IN" smtClean="0"/>
-              <a:t>13-03-2026</a:t>
+              <a:t>15-03-2026</a:t>
             </a:fld>
             <a:endParaRPr lang="en-IN"/>
           </a:p>
@@ -1519,7 +1530,7 @@
           <p:cNvPr id="5" name="Footer Placeholder 4">
             <a:extLst>
               <a:ext uri="{FF2B5EF4-FFF2-40B4-BE49-F238E27FC236}">
-                <a16:creationId xmlns:a16="http://schemas.microsoft.com/office/drawing/2014/main" xmlns="" id="{6543F681-E556-307C-D6ED-CAF356FC097A}"/>
+                <a16:creationId xmlns:a16="http://schemas.microsoft.com/office/drawing/2014/main" id="{6543F681-E556-307C-D6ED-CAF356FC097A}"/>
               </a:ext>
             </a:extLst>
           </p:cNvPr>
@@ -1544,7 +1555,7 @@
           <p:cNvPr id="6" name="Slide Number Placeholder 5">
             <a:extLst>
               <a:ext uri="{FF2B5EF4-FFF2-40B4-BE49-F238E27FC236}">
-                <a16:creationId xmlns:a16="http://schemas.microsoft.com/office/drawing/2014/main" xmlns="" id="{07A273AE-B717-C02D-3B1E-4E52D9152A76}"/>
+                <a16:creationId xmlns:a16="http://schemas.microsoft.com/office/drawing/2014/main" id="{07A273AE-B717-C02D-3B1E-4E52D9152A76}"/>
               </a:ext>
             </a:extLst>
           </p:cNvPr>
@@ -1603,7 +1614,7 @@
           <p:cNvPr id="2" name="Title 1">
             <a:extLst>
               <a:ext uri="{FF2B5EF4-FFF2-40B4-BE49-F238E27FC236}">
-                <a16:creationId xmlns:a16="http://schemas.microsoft.com/office/drawing/2014/main" xmlns="" id="{E6474996-C289-389A-E1BF-593A9F9A2CE3}"/>
+                <a16:creationId xmlns:a16="http://schemas.microsoft.com/office/drawing/2014/main" id="{E6474996-C289-389A-E1BF-593A9F9A2CE3}"/>
               </a:ext>
             </a:extLst>
           </p:cNvPr>
@@ -1632,7 +1643,7 @@
           <p:cNvPr id="3" name="Content Placeholder 2">
             <a:extLst>
               <a:ext uri="{FF2B5EF4-FFF2-40B4-BE49-F238E27FC236}">
-                <a16:creationId xmlns:a16="http://schemas.microsoft.com/office/drawing/2014/main" xmlns="" id="{864F42F4-E278-4791-D11E-FFDB59BAC3FD}"/>
+                <a16:creationId xmlns:a16="http://schemas.microsoft.com/office/drawing/2014/main" id="{864F42F4-E278-4791-D11E-FFDB59BAC3FD}"/>
               </a:ext>
             </a:extLst>
           </p:cNvPr>
@@ -1695,7 +1706,7 @@
           <p:cNvPr id="4" name="Content Placeholder 3">
             <a:extLst>
               <a:ext uri="{FF2B5EF4-FFF2-40B4-BE49-F238E27FC236}">
-                <a16:creationId xmlns:a16="http://schemas.microsoft.com/office/drawing/2014/main" xmlns="" id="{0C602B1C-B5A0-2501-9653-E3C494067CC0}"/>
+                <a16:creationId xmlns:a16="http://schemas.microsoft.com/office/drawing/2014/main" id="{0C602B1C-B5A0-2501-9653-E3C494067CC0}"/>
               </a:ext>
             </a:extLst>
           </p:cNvPr>
@@ -1758,7 +1769,7 @@
           <p:cNvPr id="5" name="Date Placeholder 4">
             <a:extLst>
               <a:ext uri="{FF2B5EF4-FFF2-40B4-BE49-F238E27FC236}">
-                <a16:creationId xmlns:a16="http://schemas.microsoft.com/office/drawing/2014/main" xmlns="" id="{37280B07-51FA-8E42-5C99-789AAE472F8B}"/>
+                <a16:creationId xmlns:a16="http://schemas.microsoft.com/office/drawing/2014/main" id="{37280B07-51FA-8E42-5C99-789AAE472F8B}"/>
               </a:ext>
             </a:extLst>
           </p:cNvPr>
@@ -1776,7 +1787,7 @@
           <a:p>
             <a:fld id="{F7603EA9-0FE1-428E-9BF1-E73FB25868B8}" type="datetime1">
               <a:rPr lang="en-IN" smtClean="0"/>
-              <a:t>13-03-2026</a:t>
+              <a:t>15-03-2026</a:t>
             </a:fld>
             <a:endParaRPr lang="en-IN"/>
           </a:p>
@@ -1787,7 +1798,7 @@
           <p:cNvPr id="6" name="Footer Placeholder 5">
             <a:extLst>
               <a:ext uri="{FF2B5EF4-FFF2-40B4-BE49-F238E27FC236}">
-                <a16:creationId xmlns:a16="http://schemas.microsoft.com/office/drawing/2014/main" xmlns="" id="{56160E67-BCB4-0616-FF48-767B266E384F}"/>
+                <a16:creationId xmlns:a16="http://schemas.microsoft.com/office/drawing/2014/main" id="{56160E67-BCB4-0616-FF48-767B266E384F}"/>
               </a:ext>
             </a:extLst>
           </p:cNvPr>
@@ -1812,7 +1823,7 @@
           <p:cNvPr id="7" name="Slide Number Placeholder 6">
             <a:extLst>
               <a:ext uri="{FF2B5EF4-FFF2-40B4-BE49-F238E27FC236}">
-                <a16:creationId xmlns:a16="http://schemas.microsoft.com/office/drawing/2014/main" xmlns="" id="{F1C220C6-19D8-2B09-1A2C-5F9BBEDB2474}"/>
+                <a16:creationId xmlns:a16="http://schemas.microsoft.com/office/drawing/2014/main" id="{F1C220C6-19D8-2B09-1A2C-5F9BBEDB2474}"/>
               </a:ext>
             </a:extLst>
           </p:cNvPr>
@@ -1871,7 +1882,7 @@
           <p:cNvPr id="2" name="Title 1">
             <a:extLst>
               <a:ext uri="{FF2B5EF4-FFF2-40B4-BE49-F238E27FC236}">
-                <a16:creationId xmlns:a16="http://schemas.microsoft.com/office/drawing/2014/main" xmlns="" id="{8A993533-9A0C-90D5-9AE1-7255BA0CADC7}"/>
+                <a16:creationId xmlns:a16="http://schemas.microsoft.com/office/drawing/2014/main" id="{8A993533-9A0C-90D5-9AE1-7255BA0CADC7}"/>
               </a:ext>
             </a:extLst>
           </p:cNvPr>
@@ -1905,7 +1916,7 @@
           <p:cNvPr id="3" name="Text Placeholder 2">
             <a:extLst>
               <a:ext uri="{FF2B5EF4-FFF2-40B4-BE49-F238E27FC236}">
-                <a16:creationId xmlns:a16="http://schemas.microsoft.com/office/drawing/2014/main" xmlns="" id="{28867A3E-DC49-CC48-9A4E-8117B9F7A9B9}"/>
+                <a16:creationId xmlns:a16="http://schemas.microsoft.com/office/drawing/2014/main" id="{28867A3E-DC49-CC48-9A4E-8117B9F7A9B9}"/>
               </a:ext>
             </a:extLst>
           </p:cNvPr>
@@ -1976,7 +1987,7 @@
           <p:cNvPr id="4" name="Content Placeholder 3">
             <a:extLst>
               <a:ext uri="{FF2B5EF4-FFF2-40B4-BE49-F238E27FC236}">
-                <a16:creationId xmlns:a16="http://schemas.microsoft.com/office/drawing/2014/main" xmlns="" id="{D31AB0ED-88D6-23A0-B987-115360EAB7C7}"/>
+                <a16:creationId xmlns:a16="http://schemas.microsoft.com/office/drawing/2014/main" id="{D31AB0ED-88D6-23A0-B987-115360EAB7C7}"/>
               </a:ext>
             </a:extLst>
           </p:cNvPr>
@@ -2039,7 +2050,7 @@
           <p:cNvPr id="5" name="Text Placeholder 4">
             <a:extLst>
               <a:ext uri="{FF2B5EF4-FFF2-40B4-BE49-F238E27FC236}">
-                <a16:creationId xmlns:a16="http://schemas.microsoft.com/office/drawing/2014/main" xmlns="" id="{EB3FF49D-ED16-AD66-B8C0-AFE8F7F50CB7}"/>
+                <a16:creationId xmlns:a16="http://schemas.microsoft.com/office/drawing/2014/main" id="{EB3FF49D-ED16-AD66-B8C0-AFE8F7F50CB7}"/>
               </a:ext>
             </a:extLst>
           </p:cNvPr>
@@ -2110,7 +2121,7 @@
           <p:cNvPr id="6" name="Content Placeholder 5">
             <a:extLst>
               <a:ext uri="{FF2B5EF4-FFF2-40B4-BE49-F238E27FC236}">
-                <a16:creationId xmlns:a16="http://schemas.microsoft.com/office/drawing/2014/main" xmlns="" id="{A98457AC-A7E4-0AE6-ED14-69450663685A}"/>
+                <a16:creationId xmlns:a16="http://schemas.microsoft.com/office/drawing/2014/main" id="{A98457AC-A7E4-0AE6-ED14-69450663685A}"/>
               </a:ext>
             </a:extLst>
           </p:cNvPr>
@@ -2173,7 +2184,7 @@
           <p:cNvPr id="7" name="Date Placeholder 6">
             <a:extLst>
               <a:ext uri="{FF2B5EF4-FFF2-40B4-BE49-F238E27FC236}">
-                <a16:creationId xmlns:a16="http://schemas.microsoft.com/office/drawing/2014/main" xmlns="" id="{91E65680-DD8E-F4B6-48D6-6204F84B0507}"/>
+                <a16:creationId xmlns:a16="http://schemas.microsoft.com/office/drawing/2014/main" id="{91E65680-DD8E-F4B6-48D6-6204F84B0507}"/>
               </a:ext>
             </a:extLst>
           </p:cNvPr>
@@ -2191,7 +2202,7 @@
           <a:p>
             <a:fld id="{9A7254DA-81CA-4C34-B4B9-ADBF13CF9A2F}" type="datetime1">
               <a:rPr lang="en-IN" smtClean="0"/>
-              <a:t>13-03-2026</a:t>
+              <a:t>15-03-2026</a:t>
             </a:fld>
             <a:endParaRPr lang="en-IN"/>
           </a:p>
@@ -2202,7 +2213,7 @@
           <p:cNvPr id="8" name="Footer Placeholder 7">
             <a:extLst>
               <a:ext uri="{FF2B5EF4-FFF2-40B4-BE49-F238E27FC236}">
-                <a16:creationId xmlns:a16="http://schemas.microsoft.com/office/drawing/2014/main" xmlns="" id="{8E29BC8F-3B36-BE43-ECE4-CB51B9A4ABCE}"/>
+                <a16:creationId xmlns:a16="http://schemas.microsoft.com/office/drawing/2014/main" id="{8E29BC8F-3B36-BE43-ECE4-CB51B9A4ABCE}"/>
               </a:ext>
             </a:extLst>
           </p:cNvPr>
@@ -2227,7 +2238,7 @@
           <p:cNvPr id="9" name="Slide Number Placeholder 8">
             <a:extLst>
               <a:ext uri="{FF2B5EF4-FFF2-40B4-BE49-F238E27FC236}">
-                <a16:creationId xmlns:a16="http://schemas.microsoft.com/office/drawing/2014/main" xmlns="" id="{FE0264F5-9736-4798-3017-0475404DD73C}"/>
+                <a16:creationId xmlns:a16="http://schemas.microsoft.com/office/drawing/2014/main" id="{FE0264F5-9736-4798-3017-0475404DD73C}"/>
               </a:ext>
             </a:extLst>
           </p:cNvPr>
@@ -2286,7 +2297,7 @@
           <p:cNvPr id="2" name="Title 1">
             <a:extLst>
               <a:ext uri="{FF2B5EF4-FFF2-40B4-BE49-F238E27FC236}">
-                <a16:creationId xmlns:a16="http://schemas.microsoft.com/office/drawing/2014/main" xmlns="" id="{1A36B4C6-CB9C-7951-EC6A-6DAAFA4EF98E}"/>
+                <a16:creationId xmlns:a16="http://schemas.microsoft.com/office/drawing/2014/main" id="{1A36B4C6-CB9C-7951-EC6A-6DAAFA4EF98E}"/>
               </a:ext>
             </a:extLst>
           </p:cNvPr>
@@ -2315,7 +2326,7 @@
           <p:cNvPr id="3" name="Date Placeholder 2">
             <a:extLst>
               <a:ext uri="{FF2B5EF4-FFF2-40B4-BE49-F238E27FC236}">
-                <a16:creationId xmlns:a16="http://schemas.microsoft.com/office/drawing/2014/main" xmlns="" id="{949F9303-4DB1-4B53-A9FC-C5CD38CA04F8}"/>
+                <a16:creationId xmlns:a16="http://schemas.microsoft.com/office/drawing/2014/main" id="{949F9303-4DB1-4B53-A9FC-C5CD38CA04F8}"/>
               </a:ext>
             </a:extLst>
           </p:cNvPr>
@@ -2333,7 +2344,7 @@
           <a:p>
             <a:fld id="{F89FEAE5-D506-44E3-BB60-DF7895F20BA2}" type="datetime1">
               <a:rPr lang="en-IN" smtClean="0"/>
-              <a:t>13-03-2026</a:t>
+              <a:t>15-03-2026</a:t>
             </a:fld>
             <a:endParaRPr lang="en-IN"/>
           </a:p>
@@ -2344,7 +2355,7 @@
           <p:cNvPr id="4" name="Footer Placeholder 3">
             <a:extLst>
               <a:ext uri="{FF2B5EF4-FFF2-40B4-BE49-F238E27FC236}">
-                <a16:creationId xmlns:a16="http://schemas.microsoft.com/office/drawing/2014/main" xmlns="" id="{FB5F2362-664B-0C06-E5D4-75987F639EF8}"/>
+                <a16:creationId xmlns:a16="http://schemas.microsoft.com/office/drawing/2014/main" id="{FB5F2362-664B-0C06-E5D4-75987F639EF8}"/>
               </a:ext>
             </a:extLst>
           </p:cNvPr>
@@ -2369,7 +2380,7 @@
           <p:cNvPr id="5" name="Slide Number Placeholder 4">
             <a:extLst>
               <a:ext uri="{FF2B5EF4-FFF2-40B4-BE49-F238E27FC236}">
-                <a16:creationId xmlns:a16="http://schemas.microsoft.com/office/drawing/2014/main" xmlns="" id="{E5F88BF8-5054-9233-20DB-F8BEDF491033}"/>
+                <a16:creationId xmlns:a16="http://schemas.microsoft.com/office/drawing/2014/main" id="{E5F88BF8-5054-9233-20DB-F8BEDF491033}"/>
               </a:ext>
             </a:extLst>
           </p:cNvPr>
@@ -2428,7 +2439,7 @@
           <p:cNvPr id="2" name="Date Placeholder 1">
             <a:extLst>
               <a:ext uri="{FF2B5EF4-FFF2-40B4-BE49-F238E27FC236}">
-                <a16:creationId xmlns:a16="http://schemas.microsoft.com/office/drawing/2014/main" xmlns="" id="{924FC4A0-0668-BC43-F708-FAFB42E4E30E}"/>
+                <a16:creationId xmlns:a16="http://schemas.microsoft.com/office/drawing/2014/main" id="{924FC4A0-0668-BC43-F708-FAFB42E4E30E}"/>
               </a:ext>
             </a:extLst>
           </p:cNvPr>
@@ -2446,7 +2457,7 @@
           <a:p>
             <a:fld id="{23560259-960B-47C1-AF74-DCE1C1EA7164}" type="datetime1">
               <a:rPr lang="en-IN" smtClean="0"/>
-              <a:t>13-03-2026</a:t>
+              <a:t>15-03-2026</a:t>
             </a:fld>
             <a:endParaRPr lang="en-IN"/>
           </a:p>
@@ -2457,7 +2468,7 @@
           <p:cNvPr id="3" name="Footer Placeholder 2">
             <a:extLst>
               <a:ext uri="{FF2B5EF4-FFF2-40B4-BE49-F238E27FC236}">
-                <a16:creationId xmlns:a16="http://schemas.microsoft.com/office/drawing/2014/main" xmlns="" id="{1EDA49F3-5429-910B-6CFD-64AADCD6CAE8}"/>
+                <a16:creationId xmlns:a16="http://schemas.microsoft.com/office/drawing/2014/main" id="{1EDA49F3-5429-910B-6CFD-64AADCD6CAE8}"/>
               </a:ext>
             </a:extLst>
           </p:cNvPr>
@@ -2482,7 +2493,7 @@
           <p:cNvPr id="4" name="Slide Number Placeholder 3">
             <a:extLst>
               <a:ext uri="{FF2B5EF4-FFF2-40B4-BE49-F238E27FC236}">
-                <a16:creationId xmlns:a16="http://schemas.microsoft.com/office/drawing/2014/main" xmlns="" id="{608F0B88-2976-620B-D8A7-6DE3CEB23C14}"/>
+                <a16:creationId xmlns:a16="http://schemas.microsoft.com/office/drawing/2014/main" id="{608F0B88-2976-620B-D8A7-6DE3CEB23C14}"/>
               </a:ext>
             </a:extLst>
           </p:cNvPr>
@@ -2541,7 +2552,7 @@
           <p:cNvPr id="2" name="Title 1">
             <a:extLst>
               <a:ext uri="{FF2B5EF4-FFF2-40B4-BE49-F238E27FC236}">
-                <a16:creationId xmlns:a16="http://schemas.microsoft.com/office/drawing/2014/main" xmlns="" id="{0E756615-122C-071B-9D07-CB565257AAFD}"/>
+                <a16:creationId xmlns:a16="http://schemas.microsoft.com/office/drawing/2014/main" id="{0E756615-122C-071B-9D07-CB565257AAFD}"/>
               </a:ext>
             </a:extLst>
           </p:cNvPr>
@@ -2579,7 +2590,7 @@
           <p:cNvPr id="3" name="Content Placeholder 2">
             <a:extLst>
               <a:ext uri="{FF2B5EF4-FFF2-40B4-BE49-F238E27FC236}">
-                <a16:creationId xmlns:a16="http://schemas.microsoft.com/office/drawing/2014/main" xmlns="" id="{43DD6A46-61CB-D8FA-5931-66EA08FF0624}"/>
+                <a16:creationId xmlns:a16="http://schemas.microsoft.com/office/drawing/2014/main" id="{43DD6A46-61CB-D8FA-5931-66EA08FF0624}"/>
               </a:ext>
             </a:extLst>
           </p:cNvPr>
@@ -2670,7 +2681,7 @@
           <p:cNvPr id="4" name="Text Placeholder 3">
             <a:extLst>
               <a:ext uri="{FF2B5EF4-FFF2-40B4-BE49-F238E27FC236}">
-                <a16:creationId xmlns:a16="http://schemas.microsoft.com/office/drawing/2014/main" xmlns="" id="{7014B0D0-3954-D9F2-C44D-74CEF4DD6B62}"/>
+                <a16:creationId xmlns:a16="http://schemas.microsoft.com/office/drawing/2014/main" id="{7014B0D0-3954-D9F2-C44D-74CEF4DD6B62}"/>
               </a:ext>
             </a:extLst>
           </p:cNvPr>
@@ -2741,7 +2752,7 @@
           <p:cNvPr id="5" name="Date Placeholder 4">
             <a:extLst>
               <a:ext uri="{FF2B5EF4-FFF2-40B4-BE49-F238E27FC236}">
-                <a16:creationId xmlns:a16="http://schemas.microsoft.com/office/drawing/2014/main" xmlns="" id="{FA3C5148-B824-70C1-8C2E-8D3374593BA8}"/>
+                <a16:creationId xmlns:a16="http://schemas.microsoft.com/office/drawing/2014/main" id="{FA3C5148-B824-70C1-8C2E-8D3374593BA8}"/>
               </a:ext>
             </a:extLst>
           </p:cNvPr>
@@ -2759,7 +2770,7 @@
           <a:p>
             <a:fld id="{AE49A713-0448-4F63-9C33-ED8C7BB35085}" type="datetime1">
               <a:rPr lang="en-IN" smtClean="0"/>
-              <a:t>13-03-2026</a:t>
+              <a:t>15-03-2026</a:t>
             </a:fld>
             <a:endParaRPr lang="en-IN"/>
           </a:p>
@@ -2770,7 +2781,7 @@
           <p:cNvPr id="6" name="Footer Placeholder 5">
             <a:extLst>
               <a:ext uri="{FF2B5EF4-FFF2-40B4-BE49-F238E27FC236}">
-                <a16:creationId xmlns:a16="http://schemas.microsoft.com/office/drawing/2014/main" xmlns="" id="{E9286C04-AE0C-1178-E2BF-1CB118617F1F}"/>
+                <a16:creationId xmlns:a16="http://schemas.microsoft.com/office/drawing/2014/main" id="{E9286C04-AE0C-1178-E2BF-1CB118617F1F}"/>
               </a:ext>
             </a:extLst>
           </p:cNvPr>
@@ -2795,7 +2806,7 @@
           <p:cNvPr id="7" name="Slide Number Placeholder 6">
             <a:extLst>
               <a:ext uri="{FF2B5EF4-FFF2-40B4-BE49-F238E27FC236}">
-                <a16:creationId xmlns:a16="http://schemas.microsoft.com/office/drawing/2014/main" xmlns="" id="{DBEE7EE5-815C-5D97-9429-D127432BF7EA}"/>
+                <a16:creationId xmlns:a16="http://schemas.microsoft.com/office/drawing/2014/main" id="{DBEE7EE5-815C-5D97-9429-D127432BF7EA}"/>
               </a:ext>
             </a:extLst>
           </p:cNvPr>
@@ -2854,7 +2865,7 @@
           <p:cNvPr id="2" name="Title 1">
             <a:extLst>
               <a:ext uri="{FF2B5EF4-FFF2-40B4-BE49-F238E27FC236}">
-                <a16:creationId xmlns:a16="http://schemas.microsoft.com/office/drawing/2014/main" xmlns="" id="{E8CC379A-7620-BB0F-FDFF-5F9F916F495E}"/>
+                <a16:creationId xmlns:a16="http://schemas.microsoft.com/office/drawing/2014/main" id="{E8CC379A-7620-BB0F-FDFF-5F9F916F495E}"/>
               </a:ext>
             </a:extLst>
           </p:cNvPr>
@@ -2892,7 +2903,7 @@
           <p:cNvPr id="3" name="Picture Placeholder 2">
             <a:extLst>
               <a:ext uri="{FF2B5EF4-FFF2-40B4-BE49-F238E27FC236}">
-                <a16:creationId xmlns:a16="http://schemas.microsoft.com/office/drawing/2014/main" xmlns="" id="{0A2450FC-E7A1-427A-25DD-8CFD6E6BA301}"/>
+                <a16:creationId xmlns:a16="http://schemas.microsoft.com/office/drawing/2014/main" id="{0A2450FC-E7A1-427A-25DD-8CFD6E6BA301}"/>
               </a:ext>
             </a:extLst>
           </p:cNvPr>
@@ -2959,7 +2970,7 @@
           <p:cNvPr id="4" name="Text Placeholder 3">
             <a:extLst>
               <a:ext uri="{FF2B5EF4-FFF2-40B4-BE49-F238E27FC236}">
-                <a16:creationId xmlns:a16="http://schemas.microsoft.com/office/drawing/2014/main" xmlns="" id="{555C33BA-FB99-F801-ECB9-00DD7F2F5C10}"/>
+                <a16:creationId xmlns:a16="http://schemas.microsoft.com/office/drawing/2014/main" id="{555C33BA-FB99-F801-ECB9-00DD7F2F5C10}"/>
               </a:ext>
             </a:extLst>
           </p:cNvPr>
@@ -3030,7 +3041,7 @@
           <p:cNvPr id="5" name="Date Placeholder 4">
             <a:extLst>
               <a:ext uri="{FF2B5EF4-FFF2-40B4-BE49-F238E27FC236}">
-                <a16:creationId xmlns:a16="http://schemas.microsoft.com/office/drawing/2014/main" xmlns="" id="{78179DE2-603C-C4A3-DCDE-95501EBCAB1C}"/>
+                <a16:creationId xmlns:a16="http://schemas.microsoft.com/office/drawing/2014/main" id="{78179DE2-603C-C4A3-DCDE-95501EBCAB1C}"/>
               </a:ext>
             </a:extLst>
           </p:cNvPr>
@@ -3048,7 +3059,7 @@
           <a:p>
             <a:fld id="{2B27E8E8-5B35-4CF3-A0F2-3702D3D28B0C}" type="datetime1">
               <a:rPr lang="en-IN" smtClean="0"/>
-              <a:t>13-03-2026</a:t>
+              <a:t>15-03-2026</a:t>
             </a:fld>
             <a:endParaRPr lang="en-IN"/>
           </a:p>
@@ -3059,7 +3070,7 @@
           <p:cNvPr id="6" name="Footer Placeholder 5">
             <a:extLst>
               <a:ext uri="{FF2B5EF4-FFF2-40B4-BE49-F238E27FC236}">
-                <a16:creationId xmlns:a16="http://schemas.microsoft.com/office/drawing/2014/main" xmlns="" id="{10793BAF-054D-5120-C069-204453823E54}"/>
+                <a16:creationId xmlns:a16="http://schemas.microsoft.com/office/drawing/2014/main" id="{10793BAF-054D-5120-C069-204453823E54}"/>
               </a:ext>
             </a:extLst>
           </p:cNvPr>
@@ -3084,7 +3095,7 @@
           <p:cNvPr id="7" name="Slide Number Placeholder 6">
             <a:extLst>
               <a:ext uri="{FF2B5EF4-FFF2-40B4-BE49-F238E27FC236}">
-                <a16:creationId xmlns:a16="http://schemas.microsoft.com/office/drawing/2014/main" xmlns="" id="{662A7752-D2C5-1C0F-0B4C-0B60089A91B7}"/>
+                <a16:creationId xmlns:a16="http://schemas.microsoft.com/office/drawing/2014/main" id="{662A7752-D2C5-1C0F-0B4C-0B60089A91B7}"/>
               </a:ext>
             </a:extLst>
           </p:cNvPr>
@@ -3148,7 +3159,7 @@
           <p:cNvPr id="2" name="Title Placeholder 1">
             <a:extLst>
               <a:ext uri="{FF2B5EF4-FFF2-40B4-BE49-F238E27FC236}">
-                <a16:creationId xmlns:a16="http://schemas.microsoft.com/office/drawing/2014/main" xmlns="" id="{DB9A1504-9D04-CA0B-0E4B-102DECCD9527}"/>
+                <a16:creationId xmlns:a16="http://schemas.microsoft.com/office/drawing/2014/main" id="{DB9A1504-9D04-CA0B-0E4B-102DECCD9527}"/>
               </a:ext>
             </a:extLst>
           </p:cNvPr>
@@ -3187,7 +3198,7 @@
           <p:cNvPr id="3" name="Text Placeholder 2">
             <a:extLst>
               <a:ext uri="{FF2B5EF4-FFF2-40B4-BE49-F238E27FC236}">
-                <a16:creationId xmlns:a16="http://schemas.microsoft.com/office/drawing/2014/main" xmlns="" id="{C93E0B7B-794B-93E1-8EA3-9BAD670487F1}"/>
+                <a16:creationId xmlns:a16="http://schemas.microsoft.com/office/drawing/2014/main" id="{C93E0B7B-794B-93E1-8EA3-9BAD670487F1}"/>
               </a:ext>
             </a:extLst>
           </p:cNvPr>
@@ -3255,7 +3266,7 @@
           <p:cNvPr id="4" name="Date Placeholder 3">
             <a:extLst>
               <a:ext uri="{FF2B5EF4-FFF2-40B4-BE49-F238E27FC236}">
-                <a16:creationId xmlns:a16="http://schemas.microsoft.com/office/drawing/2014/main" xmlns="" id="{FF12337F-45D4-4479-7099-024B6F16E4E9}"/>
+                <a16:creationId xmlns:a16="http://schemas.microsoft.com/office/drawing/2014/main" id="{FF12337F-45D4-4479-7099-024B6F16E4E9}"/>
               </a:ext>
             </a:extLst>
           </p:cNvPr>
@@ -3291,7 +3302,7 @@
           <a:p>
             <a:fld id="{CCDA840D-BDC6-494C-91E1-A142606BF42F}" type="datetime1">
               <a:rPr lang="en-IN" smtClean="0"/>
-              <a:t>13-03-2026</a:t>
+              <a:t>15-03-2026</a:t>
             </a:fld>
             <a:endParaRPr lang="en-IN"/>
           </a:p>
@@ -3302,7 +3313,7 @@
           <p:cNvPr id="5" name="Footer Placeholder 4">
             <a:extLst>
               <a:ext uri="{FF2B5EF4-FFF2-40B4-BE49-F238E27FC236}">
-                <a16:creationId xmlns:a16="http://schemas.microsoft.com/office/drawing/2014/main" xmlns="" id="{06DBFC6F-C109-61BA-DCDD-A4026C5E7CD5}"/>
+                <a16:creationId xmlns:a16="http://schemas.microsoft.com/office/drawing/2014/main" id="{06DBFC6F-C109-61BA-DCDD-A4026C5E7CD5}"/>
               </a:ext>
             </a:extLst>
           </p:cNvPr>
@@ -3345,7 +3356,7 @@
           <p:cNvPr id="6" name="Slide Number Placeholder 5">
             <a:extLst>
               <a:ext uri="{FF2B5EF4-FFF2-40B4-BE49-F238E27FC236}">
-                <a16:creationId xmlns:a16="http://schemas.microsoft.com/office/drawing/2014/main" xmlns="" id="{4BE14C3E-C350-8990-463F-4B808583741B}"/>
+                <a16:creationId xmlns:a16="http://schemas.microsoft.com/office/drawing/2014/main" id="{4BE14C3E-C350-8990-463F-4B808583741B}"/>
               </a:ext>
             </a:extLst>
           </p:cNvPr>
@@ -3722,10 +3733,10 @@
           <p:cNvPr id="16" name="Rectangle 15">
             <a:extLst>
               <a:ext uri="{FF2B5EF4-FFF2-40B4-BE49-F238E27FC236}">
-                <a16:creationId xmlns:a16="http://schemas.microsoft.com/office/drawing/2014/main" xmlns="" id="{D1942232-83D0-49E2-AF9B-1F97E3C1EF8E}"/>
+                <a16:creationId xmlns:a16="http://schemas.microsoft.com/office/drawing/2014/main" id="{D1942232-83D0-49E2-AF9B-1F97E3C1EF8E}"/>
               </a:ext>
               <a:ext uri="{C183D7F6-B498-43B3-948B-1728B52AA6E4}">
-                <adec:decorative xmlns:adec="http://schemas.microsoft.com/office/drawing/2017/decorative" xmlns="" val="1"/>
+                <adec:decorative xmlns:adec="http://schemas.microsoft.com/office/drawing/2017/decorative" val="1"/>
               </a:ext>
             </a:extLst>
           </p:cNvPr>
@@ -3735,7 +3746,7 @@
           <p:nvPr>
             <p:extLst>
               <p:ext uri="{386F3935-93C4-4BCD-93E2-E3B085C9AB24}">
-                <p16:designElem xmlns:p16="http://schemas.microsoft.com/office/powerpoint/2015/main" xmlns="" val="1"/>
+                <p16:designElem xmlns:p16="http://schemas.microsoft.com/office/powerpoint/2015/main" val="1"/>
               </p:ext>
             </p:extLst>
           </p:nvPr>
@@ -3782,10 +3793,10 @@
           <p:cNvPr id="18" name="Rectangle 17">
             <a:extLst>
               <a:ext uri="{FF2B5EF4-FFF2-40B4-BE49-F238E27FC236}">
-                <a16:creationId xmlns:a16="http://schemas.microsoft.com/office/drawing/2014/main" xmlns="" id="{E9E70D72-6E23-4015-A4A6-85C120C19167}"/>
+                <a16:creationId xmlns:a16="http://schemas.microsoft.com/office/drawing/2014/main" id="{E9E70D72-6E23-4015-A4A6-85C120C19167}"/>
               </a:ext>
               <a:ext uri="{C183D7F6-B498-43B3-948B-1728B52AA6E4}">
-                <adec:decorative xmlns:adec="http://schemas.microsoft.com/office/drawing/2017/decorative" xmlns="" val="1"/>
+                <adec:decorative xmlns:adec="http://schemas.microsoft.com/office/drawing/2017/decorative" val="1"/>
               </a:ext>
             </a:extLst>
           </p:cNvPr>
@@ -3795,7 +3806,7 @@
           <p:nvPr>
             <p:extLst>
               <p:ext uri="{386F3935-93C4-4BCD-93E2-E3B085C9AB24}">
-                <p16:designElem xmlns:p16="http://schemas.microsoft.com/office/powerpoint/2015/main" xmlns="" val="1"/>
+                <p16:designElem xmlns:p16="http://schemas.microsoft.com/office/powerpoint/2015/main" val="1"/>
               </p:ext>
             </p:extLst>
           </p:nvPr>
@@ -3845,7 +3856,7 @@
           <p:cNvPr id="3" name="TextBox 2">
             <a:extLst>
               <a:ext uri="{FF2B5EF4-FFF2-40B4-BE49-F238E27FC236}">
-                <a16:creationId xmlns:a16="http://schemas.microsoft.com/office/drawing/2014/main" xmlns="" id="{31AE5121-AEBF-F1E8-8A0C-1B576693E7BA}"/>
+                <a16:creationId xmlns:a16="http://schemas.microsoft.com/office/drawing/2014/main" id="{31AE5121-AEBF-F1E8-8A0C-1B576693E7BA}"/>
               </a:ext>
             </a:extLst>
           </p:cNvPr>
@@ -3897,10 +3908,10 @@
           <p:cNvPr id="20" name="Group 19">
             <a:extLst>
               <a:ext uri="{FF2B5EF4-FFF2-40B4-BE49-F238E27FC236}">
-                <a16:creationId xmlns:a16="http://schemas.microsoft.com/office/drawing/2014/main" xmlns="" id="{C28A977F-B603-4D81-B0FC-C8DE048A7931}"/>
+                <a16:creationId xmlns:a16="http://schemas.microsoft.com/office/drawing/2014/main" id="{C28A977F-B603-4D81-B0FC-C8DE048A7931}"/>
               </a:ext>
               <a:ext uri="{C183D7F6-B498-43B3-948B-1728B52AA6E4}">
-                <adec:decorative xmlns:adec="http://schemas.microsoft.com/office/drawing/2017/decorative" xmlns="" val="1"/>
+                <adec:decorative xmlns:adec="http://schemas.microsoft.com/office/drawing/2017/decorative" val="1"/>
               </a:ext>
             </a:extLst>
           </p:cNvPr>
@@ -3910,7 +3921,7 @@
           <p:nvPr>
             <p:extLst>
               <p:ext uri="{386F3935-93C4-4BCD-93E2-E3B085C9AB24}">
-                <p16:designElem xmlns:p16="http://schemas.microsoft.com/office/powerpoint/2015/main" xmlns="" val="1"/>
+                <p16:designElem xmlns:p16="http://schemas.microsoft.com/office/powerpoint/2015/main" val="1"/>
               </p:ext>
             </p:extLst>
           </p:nvPr>
@@ -3928,10 +3939,10 @@
             <p:cNvPr id="21" name="Freeform: Shape 20">
               <a:extLst>
                 <a:ext uri="{FF2B5EF4-FFF2-40B4-BE49-F238E27FC236}">
-                  <a16:creationId xmlns:a16="http://schemas.microsoft.com/office/drawing/2014/main" xmlns="" id="{0183CE8C-E039-4B2F-A36E-5FD5CD5DE190}"/>
+                  <a16:creationId xmlns:a16="http://schemas.microsoft.com/office/drawing/2014/main" id="{0183CE8C-E039-4B2F-A36E-5FD5CD5DE190}"/>
                 </a:ext>
                 <a:ext uri="{C183D7F6-B498-43B3-948B-1728B52AA6E4}">
-                  <adec:decorative xmlns:adec="http://schemas.microsoft.com/office/drawing/2017/decorative" xmlns="" val="1"/>
+                  <adec:decorative xmlns:adec="http://schemas.microsoft.com/office/drawing/2017/decorative" val="1"/>
                 </a:ext>
               </a:extLst>
             </p:cNvPr>
@@ -3939,7 +3950,7 @@
             <p:nvPr>
               <p:extLst>
                 <p:ext uri="{386F3935-93C4-4BCD-93E2-E3B085C9AB24}">
-                  <p16:designElem xmlns:p16="http://schemas.microsoft.com/office/powerpoint/2015/main" xmlns="" val="1"/>
+                  <p16:designElem xmlns:p16="http://schemas.microsoft.com/office/powerpoint/2015/main" val="1"/>
                 </p:ext>
               </p:extLst>
             </p:nvPr>
@@ -4140,10 +4151,10 @@
             <p:cNvPr id="22" name="Freeform: Shape 21">
               <a:extLst>
                 <a:ext uri="{FF2B5EF4-FFF2-40B4-BE49-F238E27FC236}">
-                  <a16:creationId xmlns:a16="http://schemas.microsoft.com/office/drawing/2014/main" xmlns="" id="{3EB77281-FAB4-40D0-B3F3-264EC4AB202F}"/>
+                  <a16:creationId xmlns:a16="http://schemas.microsoft.com/office/drawing/2014/main" id="{3EB77281-FAB4-40D0-B3F3-264EC4AB202F}"/>
                 </a:ext>
                 <a:ext uri="{C183D7F6-B498-43B3-948B-1728B52AA6E4}">
-                  <adec:decorative xmlns:adec="http://schemas.microsoft.com/office/drawing/2017/decorative" xmlns="" val="1"/>
+                  <adec:decorative xmlns:adec="http://schemas.microsoft.com/office/drawing/2017/decorative" val="1"/>
                 </a:ext>
               </a:extLst>
             </p:cNvPr>
@@ -4151,7 +4162,7 @@
             <p:nvPr>
               <p:extLst>
                 <p:ext uri="{386F3935-93C4-4BCD-93E2-E3B085C9AB24}">
-                  <p16:designElem xmlns:p16="http://schemas.microsoft.com/office/powerpoint/2015/main" xmlns="" val="1"/>
+                  <p16:designElem xmlns:p16="http://schemas.microsoft.com/office/powerpoint/2015/main" val="1"/>
                 </p:ext>
               </p:extLst>
             </p:nvPr>
@@ -4352,10 +4363,10 @@
             <p:cNvPr id="23" name="Freeform: Shape 22">
               <a:extLst>
                 <a:ext uri="{FF2B5EF4-FFF2-40B4-BE49-F238E27FC236}">
-                  <a16:creationId xmlns:a16="http://schemas.microsoft.com/office/drawing/2014/main" xmlns="" id="{815E59F3-75FC-494F-8737-5F00A4964FE1}"/>
+                  <a16:creationId xmlns:a16="http://schemas.microsoft.com/office/drawing/2014/main" id="{815E59F3-75FC-494F-8737-5F00A4964FE1}"/>
                 </a:ext>
                 <a:ext uri="{C183D7F6-B498-43B3-948B-1728B52AA6E4}">
-                  <adec:decorative xmlns:adec="http://schemas.microsoft.com/office/drawing/2017/decorative" xmlns="" val="1"/>
+                  <adec:decorative xmlns:adec="http://schemas.microsoft.com/office/drawing/2017/decorative" val="1"/>
                 </a:ext>
               </a:extLst>
             </p:cNvPr>
@@ -4363,7 +4374,7 @@
             <p:nvPr>
               <p:extLst>
                 <p:ext uri="{386F3935-93C4-4BCD-93E2-E3B085C9AB24}">
-                  <p16:designElem xmlns:p16="http://schemas.microsoft.com/office/powerpoint/2015/main" xmlns="" val="1"/>
+                  <p16:designElem xmlns:p16="http://schemas.microsoft.com/office/powerpoint/2015/main" val="1"/>
                 </p:ext>
               </p:extLst>
             </p:nvPr>
@@ -4674,10 +4685,10 @@
             <p:cNvPr id="24" name="Freeform: Shape 23">
               <a:extLst>
                 <a:ext uri="{FF2B5EF4-FFF2-40B4-BE49-F238E27FC236}">
-                  <a16:creationId xmlns:a16="http://schemas.microsoft.com/office/drawing/2014/main" xmlns="" id="{43ADDCFA-B066-4D79-AB71-062E66E58FEE}"/>
+                  <a16:creationId xmlns:a16="http://schemas.microsoft.com/office/drawing/2014/main" id="{43ADDCFA-B066-4D79-AB71-062E66E58FEE}"/>
                 </a:ext>
                 <a:ext uri="{C183D7F6-B498-43B3-948B-1728B52AA6E4}">
-                  <adec:decorative xmlns:adec="http://schemas.microsoft.com/office/drawing/2017/decorative" xmlns="" val="1"/>
+                  <adec:decorative xmlns:adec="http://schemas.microsoft.com/office/drawing/2017/decorative" val="1"/>
                 </a:ext>
               </a:extLst>
             </p:cNvPr>
@@ -4685,7 +4696,7 @@
             <p:nvPr>
               <p:extLst>
                 <p:ext uri="{386F3935-93C4-4BCD-93E2-E3B085C9AB24}">
-                  <p16:designElem xmlns:p16="http://schemas.microsoft.com/office/powerpoint/2015/main" xmlns="" val="1"/>
+                  <p16:designElem xmlns:p16="http://schemas.microsoft.com/office/powerpoint/2015/main" val="1"/>
                 </p:ext>
               </p:extLst>
             </p:nvPr>
@@ -5153,7 +5164,7 @@
           <p:cNvPr id="11" name="Picture 10" descr="A close-up of a logo&#10;&#10;AI-generated content may be incorrect.">
             <a:extLst>
               <a:ext uri="{FF2B5EF4-FFF2-40B4-BE49-F238E27FC236}">
-                <a16:creationId xmlns:a16="http://schemas.microsoft.com/office/drawing/2014/main" xmlns="" id="{02F6A545-7889-EE7D-B819-8344E089B4A1}"/>
+                <a16:creationId xmlns:a16="http://schemas.microsoft.com/office/drawing/2014/main" id="{02F6A545-7889-EE7D-B819-8344E089B4A1}"/>
               </a:ext>
             </a:extLst>
           </p:cNvPr>
@@ -5189,7 +5200,7 @@
           <p:cNvPr id="8" name="TextBox 7">
             <a:extLst>
               <a:ext uri="{FF2B5EF4-FFF2-40B4-BE49-F238E27FC236}">
-                <a16:creationId xmlns:a16="http://schemas.microsoft.com/office/drawing/2014/main" xmlns="" id="{A6B5146A-EBD6-B1B2-C76F-054DAC334AA2}"/>
+                <a16:creationId xmlns:a16="http://schemas.microsoft.com/office/drawing/2014/main" id="{A6B5146A-EBD6-B1B2-C76F-054DAC334AA2}"/>
               </a:ext>
             </a:extLst>
           </p:cNvPr>
@@ -5355,7 +5366,7 @@
           <p:cNvPr id="4" name="Slide Number Placeholder 3">
             <a:extLst>
               <a:ext uri="{FF2B5EF4-FFF2-40B4-BE49-F238E27FC236}">
-                <a16:creationId xmlns:a16="http://schemas.microsoft.com/office/drawing/2014/main" xmlns="" id="{F7AEED24-D842-C3E8-2E3F-564DB8F6E8D2}"/>
+                <a16:creationId xmlns:a16="http://schemas.microsoft.com/office/drawing/2014/main" id="{F7AEED24-D842-C3E8-2E3F-564DB8F6E8D2}"/>
               </a:ext>
             </a:extLst>
           </p:cNvPr>
@@ -5401,10 +5412,10 @@
           <p:cNvPr id="26" name="Group 25">
             <a:extLst>
               <a:ext uri="{FF2B5EF4-FFF2-40B4-BE49-F238E27FC236}">
-                <a16:creationId xmlns:a16="http://schemas.microsoft.com/office/drawing/2014/main" xmlns="" id="{C78D9229-E61D-4FEE-8321-2F8B64A8CADF}"/>
+                <a16:creationId xmlns:a16="http://schemas.microsoft.com/office/drawing/2014/main" id="{C78D9229-E61D-4FEE-8321-2F8B64A8CADF}"/>
               </a:ext>
               <a:ext uri="{C183D7F6-B498-43B3-948B-1728B52AA6E4}">
-                <adec:decorative xmlns:adec="http://schemas.microsoft.com/office/drawing/2017/decorative" xmlns="" val="1"/>
+                <adec:decorative xmlns:adec="http://schemas.microsoft.com/office/drawing/2017/decorative" val="1"/>
               </a:ext>
             </a:extLst>
           </p:cNvPr>
@@ -5414,7 +5425,7 @@
           <p:nvPr>
             <p:extLst>
               <p:ext uri="{386F3935-93C4-4BCD-93E2-E3B085C9AB24}">
-                <p16:designElem xmlns:p16="http://schemas.microsoft.com/office/powerpoint/2015/main" xmlns="" val="1"/>
+                <p16:designElem xmlns:p16="http://schemas.microsoft.com/office/powerpoint/2015/main" val="1"/>
               </p:ext>
             </p:extLst>
           </p:nvPr>
@@ -5432,10 +5443,10 @@
             <p:cNvPr id="27" name="Freeform: Shape 26">
               <a:extLst>
                 <a:ext uri="{FF2B5EF4-FFF2-40B4-BE49-F238E27FC236}">
-                  <a16:creationId xmlns:a16="http://schemas.microsoft.com/office/drawing/2014/main" xmlns="" id="{1FDD3CCB-26A3-4D79-AEB6-7A60CF980DC2}"/>
+                  <a16:creationId xmlns:a16="http://schemas.microsoft.com/office/drawing/2014/main" id="{1FDD3CCB-26A3-4D79-AEB6-7A60CF980DC2}"/>
                 </a:ext>
                 <a:ext uri="{C183D7F6-B498-43B3-948B-1728B52AA6E4}">
-                  <adec:decorative xmlns:adec="http://schemas.microsoft.com/office/drawing/2017/decorative" xmlns="" val="1"/>
+                  <adec:decorative xmlns:adec="http://schemas.microsoft.com/office/drawing/2017/decorative" val="1"/>
                 </a:ext>
               </a:extLst>
             </p:cNvPr>
@@ -5443,7 +5454,7 @@
             <p:nvPr>
               <p:extLst>
                 <p:ext uri="{386F3935-93C4-4BCD-93E2-E3B085C9AB24}">
-                  <p16:designElem xmlns:p16="http://schemas.microsoft.com/office/powerpoint/2015/main" xmlns="" val="1"/>
+                  <p16:designElem xmlns:p16="http://schemas.microsoft.com/office/powerpoint/2015/main" val="1"/>
                 </p:ext>
               </p:extLst>
             </p:nvPr>
@@ -5830,10 +5841,10 @@
             <p:cNvPr id="28" name="Freeform: Shape 27">
               <a:extLst>
                 <a:ext uri="{FF2B5EF4-FFF2-40B4-BE49-F238E27FC236}">
-                  <a16:creationId xmlns:a16="http://schemas.microsoft.com/office/drawing/2014/main" xmlns="" id="{E9AC4470-5113-4709-B29F-CDB937F2545C}"/>
+                  <a16:creationId xmlns:a16="http://schemas.microsoft.com/office/drawing/2014/main" id="{E9AC4470-5113-4709-B29F-CDB937F2545C}"/>
                 </a:ext>
                 <a:ext uri="{C183D7F6-B498-43B3-948B-1728B52AA6E4}">
-                  <adec:decorative xmlns:adec="http://schemas.microsoft.com/office/drawing/2017/decorative" xmlns="" val="1"/>
+                  <adec:decorative xmlns:adec="http://schemas.microsoft.com/office/drawing/2017/decorative" val="1"/>
                 </a:ext>
               </a:extLst>
             </p:cNvPr>
@@ -5841,7 +5852,7 @@
             <p:nvPr>
               <p:extLst>
                 <p:ext uri="{386F3935-93C4-4BCD-93E2-E3B085C9AB24}">
-                  <p16:designElem xmlns:p16="http://schemas.microsoft.com/office/powerpoint/2015/main" xmlns="" val="1"/>
+                  <p16:designElem xmlns:p16="http://schemas.microsoft.com/office/powerpoint/2015/main" val="1"/>
                 </p:ext>
               </p:extLst>
             </p:nvPr>
@@ -6022,10 +6033,10 @@
             <p:cNvPr id="29" name="Freeform: Shape 28">
               <a:extLst>
                 <a:ext uri="{FF2B5EF4-FFF2-40B4-BE49-F238E27FC236}">
-                  <a16:creationId xmlns:a16="http://schemas.microsoft.com/office/drawing/2014/main" xmlns="" id="{3E0D146C-9DAB-421E-AE88-5F854BF3F7E5}"/>
+                  <a16:creationId xmlns:a16="http://schemas.microsoft.com/office/drawing/2014/main" id="{3E0D146C-9DAB-421E-AE88-5F854BF3F7E5}"/>
                 </a:ext>
                 <a:ext uri="{C183D7F6-B498-43B3-948B-1728B52AA6E4}">
-                  <adec:decorative xmlns:adec="http://schemas.microsoft.com/office/drawing/2017/decorative" xmlns="" val="1"/>
+                  <adec:decorative xmlns:adec="http://schemas.microsoft.com/office/drawing/2017/decorative" val="1"/>
                 </a:ext>
               </a:extLst>
             </p:cNvPr>
@@ -6033,7 +6044,7 @@
             <p:nvPr>
               <p:extLst>
                 <p:ext uri="{386F3935-93C4-4BCD-93E2-E3B085C9AB24}">
-                  <p16:designElem xmlns:p16="http://schemas.microsoft.com/office/powerpoint/2015/main" xmlns="" val="1"/>
+                  <p16:designElem xmlns:p16="http://schemas.microsoft.com/office/powerpoint/2015/main" val="1"/>
                 </p:ext>
               </p:extLst>
             </p:nvPr>
@@ -6276,10 +6287,10 @@
             <p:cNvPr id="30" name="Freeform: Shape 29">
               <a:extLst>
                 <a:ext uri="{FF2B5EF4-FFF2-40B4-BE49-F238E27FC236}">
-                  <a16:creationId xmlns:a16="http://schemas.microsoft.com/office/drawing/2014/main" xmlns="" id="{12EB32A5-4408-4F6C-84B2-F9A908237A6D}"/>
+                  <a16:creationId xmlns:a16="http://schemas.microsoft.com/office/drawing/2014/main" id="{12EB32A5-4408-4F6C-84B2-F9A908237A6D}"/>
                 </a:ext>
                 <a:ext uri="{C183D7F6-B498-43B3-948B-1728B52AA6E4}">
-                  <adec:decorative xmlns:adec="http://schemas.microsoft.com/office/drawing/2017/decorative" xmlns="" val="1"/>
+                  <adec:decorative xmlns:adec="http://schemas.microsoft.com/office/drawing/2017/decorative" val="1"/>
                 </a:ext>
               </a:extLst>
             </p:cNvPr>
@@ -6287,7 +6298,7 @@
             <p:nvPr>
               <p:extLst>
                 <p:ext uri="{386F3935-93C4-4BCD-93E2-E3B085C9AB24}">
-                  <p16:designElem xmlns:p16="http://schemas.microsoft.com/office/powerpoint/2015/main" xmlns="" val="1"/>
+                  <p16:designElem xmlns:p16="http://schemas.microsoft.com/office/powerpoint/2015/main" val="1"/>
                 </p:ext>
               </p:extLst>
             </p:nvPr>
@@ -6469,7 +6480,7 @@
           <p:cNvPr id="6" name="Picture 5" descr="A hands holding a light bulb&#10;&#10;AI-generated content may be incorrect.">
             <a:extLst>
               <a:ext uri="{FF2B5EF4-FFF2-40B4-BE49-F238E27FC236}">
-                <a16:creationId xmlns:a16="http://schemas.microsoft.com/office/drawing/2014/main" xmlns="" id="{9F52A71C-44A3-2F37-D0DE-AAB637FE9CCD}"/>
+                <a16:creationId xmlns:a16="http://schemas.microsoft.com/office/drawing/2014/main" id="{9F52A71C-44A3-2F37-D0DE-AAB637FE9CCD}"/>
               </a:ext>
             </a:extLst>
           </p:cNvPr>
@@ -6529,7 +6540,7 @@
         <p:cNvPr id="1" name="">
           <a:extLst>
             <a:ext uri="{FF2B5EF4-FFF2-40B4-BE49-F238E27FC236}">
-              <a16:creationId xmlns:a16="http://schemas.microsoft.com/office/drawing/2014/main" xmlns="" id="{A80BB20B-F698-9029-3C89-1809ECA981B4}"/>
+              <a16:creationId xmlns:a16="http://schemas.microsoft.com/office/drawing/2014/main" id="{A80BB20B-F698-9029-3C89-1809ECA981B4}"/>
             </a:ext>
           </a:extLst>
         </p:cNvPr>
@@ -6549,10 +6560,10 @@
           <p:cNvPr id="16" name="Rectangle 15">
             <a:extLst>
               <a:ext uri="{FF2B5EF4-FFF2-40B4-BE49-F238E27FC236}">
-                <a16:creationId xmlns:a16="http://schemas.microsoft.com/office/drawing/2014/main" xmlns="" id="{3C78AD1F-4F7B-81CC-FEBE-4670D5A43ACE}"/>
+                <a16:creationId xmlns:a16="http://schemas.microsoft.com/office/drawing/2014/main" id="{3C78AD1F-4F7B-81CC-FEBE-4670D5A43ACE}"/>
               </a:ext>
               <a:ext uri="{C183D7F6-B498-43B3-948B-1728B52AA6E4}">
-                <adec:decorative xmlns:adec="http://schemas.microsoft.com/office/drawing/2017/decorative" xmlns="" val="1"/>
+                <adec:decorative xmlns:adec="http://schemas.microsoft.com/office/drawing/2017/decorative" val="1"/>
               </a:ext>
             </a:extLst>
           </p:cNvPr>
@@ -6562,7 +6573,7 @@
           <p:nvPr>
             <p:extLst>
               <p:ext uri="{386F3935-93C4-4BCD-93E2-E3B085C9AB24}">
-                <p16:designElem xmlns:p16="http://schemas.microsoft.com/office/powerpoint/2015/main" xmlns="" val="1"/>
+                <p16:designElem xmlns:p16="http://schemas.microsoft.com/office/powerpoint/2015/main" val="1"/>
               </p:ext>
             </p:extLst>
           </p:nvPr>
@@ -6609,10 +6620,10 @@
           <p:cNvPr id="18" name="Rectangle 17">
             <a:extLst>
               <a:ext uri="{FF2B5EF4-FFF2-40B4-BE49-F238E27FC236}">
-                <a16:creationId xmlns:a16="http://schemas.microsoft.com/office/drawing/2014/main" xmlns="" id="{D6C05ADC-EBCA-9F88-FC1E-077C36C3E6BA}"/>
+                <a16:creationId xmlns:a16="http://schemas.microsoft.com/office/drawing/2014/main" id="{D6C05ADC-EBCA-9F88-FC1E-077C36C3E6BA}"/>
               </a:ext>
               <a:ext uri="{C183D7F6-B498-43B3-948B-1728B52AA6E4}">
-                <adec:decorative xmlns:adec="http://schemas.microsoft.com/office/drawing/2017/decorative" xmlns="" val="1"/>
+                <adec:decorative xmlns:adec="http://schemas.microsoft.com/office/drawing/2017/decorative" val="1"/>
               </a:ext>
             </a:extLst>
           </p:cNvPr>
@@ -6622,7 +6633,7 @@
           <p:nvPr>
             <p:extLst>
               <p:ext uri="{386F3935-93C4-4BCD-93E2-E3B085C9AB24}">
-                <p16:designElem xmlns:p16="http://schemas.microsoft.com/office/powerpoint/2015/main" xmlns="" val="1"/>
+                <p16:designElem xmlns:p16="http://schemas.microsoft.com/office/powerpoint/2015/main" val="1"/>
               </p:ext>
             </p:extLst>
           </p:nvPr>
@@ -6672,7 +6683,7 @@
           <p:cNvPr id="3" name="TextBox 2">
             <a:extLst>
               <a:ext uri="{FF2B5EF4-FFF2-40B4-BE49-F238E27FC236}">
-                <a16:creationId xmlns:a16="http://schemas.microsoft.com/office/drawing/2014/main" xmlns="" id="{7F2E365C-4DAD-96E1-BD5C-0EE3EAD6BF1B}"/>
+                <a16:creationId xmlns:a16="http://schemas.microsoft.com/office/drawing/2014/main" id="{7F2E365C-4DAD-96E1-BD5C-0EE3EAD6BF1B}"/>
               </a:ext>
             </a:extLst>
           </p:cNvPr>
@@ -6681,8 +6692,8 @@
         </p:nvSpPr>
         <p:spPr>
           <a:xfrm>
-            <a:off x="1179576" y="1163848"/>
-            <a:ext cx="9829800" cy="1325880"/>
+            <a:off x="4329874" y="1071744"/>
+            <a:ext cx="3530076" cy="631431"/>
           </a:xfrm>
           <a:prstGeom prst="rect">
             <a:avLst/>
@@ -6695,6 +6706,7 @@
           <a:lstStyle/>
           <a:p>
             <a:r>
+              <a:rPr sz="2800" b="1" dirty="0"/>
               <a:t>AI Interview Platform</a:t>
             </a:r>
           </a:p>
@@ -6705,10 +6717,10 @@
           <p:cNvPr id="20" name="Group 19">
             <a:extLst>
               <a:ext uri="{FF2B5EF4-FFF2-40B4-BE49-F238E27FC236}">
-                <a16:creationId xmlns:a16="http://schemas.microsoft.com/office/drawing/2014/main" xmlns="" id="{CCB70DC0-DEF5-82D2-84D3-5090BDF0D29A}"/>
+                <a16:creationId xmlns:a16="http://schemas.microsoft.com/office/drawing/2014/main" id="{CCB70DC0-DEF5-82D2-84D3-5090BDF0D29A}"/>
               </a:ext>
               <a:ext uri="{C183D7F6-B498-43B3-948B-1728B52AA6E4}">
-                <adec:decorative xmlns:adec="http://schemas.microsoft.com/office/drawing/2017/decorative" xmlns="" val="1"/>
+                <adec:decorative xmlns:adec="http://schemas.microsoft.com/office/drawing/2017/decorative" val="1"/>
               </a:ext>
             </a:extLst>
           </p:cNvPr>
@@ -6718,7 +6730,7 @@
           <p:nvPr>
             <p:extLst>
               <p:ext uri="{386F3935-93C4-4BCD-93E2-E3B085C9AB24}">
-                <p16:designElem xmlns:p16="http://schemas.microsoft.com/office/powerpoint/2015/main" xmlns="" val="1"/>
+                <p16:designElem xmlns:p16="http://schemas.microsoft.com/office/powerpoint/2015/main" val="1"/>
               </p:ext>
             </p:extLst>
           </p:nvPr>
@@ -6736,10 +6748,10 @@
             <p:cNvPr id="21" name="Freeform: Shape 20">
               <a:extLst>
                 <a:ext uri="{FF2B5EF4-FFF2-40B4-BE49-F238E27FC236}">
-                  <a16:creationId xmlns:a16="http://schemas.microsoft.com/office/drawing/2014/main" xmlns="" id="{70B99616-C896-F10A-6A37-6619B94F8B55}"/>
+                  <a16:creationId xmlns:a16="http://schemas.microsoft.com/office/drawing/2014/main" id="{70B99616-C896-F10A-6A37-6619B94F8B55}"/>
                 </a:ext>
                 <a:ext uri="{C183D7F6-B498-43B3-948B-1728B52AA6E4}">
-                  <adec:decorative xmlns:adec="http://schemas.microsoft.com/office/drawing/2017/decorative" xmlns="" val="1"/>
+                  <adec:decorative xmlns:adec="http://schemas.microsoft.com/office/drawing/2017/decorative" val="1"/>
                 </a:ext>
               </a:extLst>
             </p:cNvPr>
@@ -6747,7 +6759,7 @@
             <p:nvPr>
               <p:extLst>
                 <p:ext uri="{386F3935-93C4-4BCD-93E2-E3B085C9AB24}">
-                  <p16:designElem xmlns:p16="http://schemas.microsoft.com/office/powerpoint/2015/main" xmlns="" val="1"/>
+                  <p16:designElem xmlns:p16="http://schemas.microsoft.com/office/powerpoint/2015/main" val="1"/>
                 </p:ext>
               </p:extLst>
             </p:nvPr>
@@ -6948,10 +6960,10 @@
             <p:cNvPr id="22" name="Freeform: Shape 21">
               <a:extLst>
                 <a:ext uri="{FF2B5EF4-FFF2-40B4-BE49-F238E27FC236}">
-                  <a16:creationId xmlns:a16="http://schemas.microsoft.com/office/drawing/2014/main" xmlns="" id="{91DB4322-2DFB-A6A7-E968-ECB11ECE405E}"/>
+                  <a16:creationId xmlns:a16="http://schemas.microsoft.com/office/drawing/2014/main" id="{91DB4322-2DFB-A6A7-E968-ECB11ECE405E}"/>
                 </a:ext>
                 <a:ext uri="{C183D7F6-B498-43B3-948B-1728B52AA6E4}">
-                  <adec:decorative xmlns:adec="http://schemas.microsoft.com/office/drawing/2017/decorative" xmlns="" val="1"/>
+                  <adec:decorative xmlns:adec="http://schemas.microsoft.com/office/drawing/2017/decorative" val="1"/>
                 </a:ext>
               </a:extLst>
             </p:cNvPr>
@@ -6959,7 +6971,7 @@
             <p:nvPr>
               <p:extLst>
                 <p:ext uri="{386F3935-93C4-4BCD-93E2-E3B085C9AB24}">
-                  <p16:designElem xmlns:p16="http://schemas.microsoft.com/office/powerpoint/2015/main" xmlns="" val="1"/>
+                  <p16:designElem xmlns:p16="http://schemas.microsoft.com/office/powerpoint/2015/main" val="1"/>
                 </p:ext>
               </p:extLst>
             </p:nvPr>
@@ -7160,10 +7172,10 @@
             <p:cNvPr id="23" name="Freeform: Shape 22">
               <a:extLst>
                 <a:ext uri="{FF2B5EF4-FFF2-40B4-BE49-F238E27FC236}">
-                  <a16:creationId xmlns:a16="http://schemas.microsoft.com/office/drawing/2014/main" xmlns="" id="{BB5A62EA-7B6B-AB02-6DA3-10823E7C5C6E}"/>
+                  <a16:creationId xmlns:a16="http://schemas.microsoft.com/office/drawing/2014/main" id="{BB5A62EA-7B6B-AB02-6DA3-10823E7C5C6E}"/>
                 </a:ext>
                 <a:ext uri="{C183D7F6-B498-43B3-948B-1728B52AA6E4}">
-                  <adec:decorative xmlns:adec="http://schemas.microsoft.com/office/drawing/2017/decorative" xmlns="" val="1"/>
+                  <adec:decorative xmlns:adec="http://schemas.microsoft.com/office/drawing/2017/decorative" val="1"/>
                 </a:ext>
               </a:extLst>
             </p:cNvPr>
@@ -7171,7 +7183,7 @@
             <p:nvPr>
               <p:extLst>
                 <p:ext uri="{386F3935-93C4-4BCD-93E2-E3B085C9AB24}">
-                  <p16:designElem xmlns:p16="http://schemas.microsoft.com/office/powerpoint/2015/main" xmlns="" val="1"/>
+                  <p16:designElem xmlns:p16="http://schemas.microsoft.com/office/powerpoint/2015/main" val="1"/>
                 </p:ext>
               </p:extLst>
             </p:nvPr>
@@ -7482,10 +7494,10 @@
             <p:cNvPr id="24" name="Freeform: Shape 23">
               <a:extLst>
                 <a:ext uri="{FF2B5EF4-FFF2-40B4-BE49-F238E27FC236}">
-                  <a16:creationId xmlns:a16="http://schemas.microsoft.com/office/drawing/2014/main" xmlns="" id="{29BCEA99-BAB3-D646-3C26-C6E0E5428185}"/>
+                  <a16:creationId xmlns:a16="http://schemas.microsoft.com/office/drawing/2014/main" id="{29BCEA99-BAB3-D646-3C26-C6E0E5428185}"/>
                 </a:ext>
                 <a:ext uri="{C183D7F6-B498-43B3-948B-1728B52AA6E4}">
-                  <adec:decorative xmlns:adec="http://schemas.microsoft.com/office/drawing/2017/decorative" xmlns="" val="1"/>
+                  <adec:decorative xmlns:adec="http://schemas.microsoft.com/office/drawing/2017/decorative" val="1"/>
                 </a:ext>
               </a:extLst>
             </p:cNvPr>
@@ -7493,7 +7505,7 @@
             <p:nvPr>
               <p:extLst>
                 <p:ext uri="{386F3935-93C4-4BCD-93E2-E3B085C9AB24}">
-                  <p16:designElem xmlns:p16="http://schemas.microsoft.com/office/powerpoint/2015/main" xmlns="" val="1"/>
+                  <p16:designElem xmlns:p16="http://schemas.microsoft.com/office/powerpoint/2015/main" val="1"/>
                 </p:ext>
               </p:extLst>
             </p:nvPr>
@@ -7961,7 +7973,7 @@
           <p:cNvPr id="11" name="Picture 10" descr="A close-up of a logo&#10;&#10;AI-generated content may be incorrect.">
             <a:extLst>
               <a:ext uri="{FF2B5EF4-FFF2-40B4-BE49-F238E27FC236}">
-                <a16:creationId xmlns:a16="http://schemas.microsoft.com/office/drawing/2014/main" xmlns="" id="{472C507D-9272-1AE0-5DF9-F12A9CB20E88}"/>
+                <a16:creationId xmlns:a16="http://schemas.microsoft.com/office/drawing/2014/main" id="{472C507D-9272-1AE0-5DF9-F12A9CB20E88}"/>
               </a:ext>
             </a:extLst>
           </p:cNvPr>
@@ -7997,7 +8009,7 @@
           <p:cNvPr id="8" name="TextBox 7">
             <a:extLst>
               <a:ext uri="{FF2B5EF4-FFF2-40B4-BE49-F238E27FC236}">
-                <a16:creationId xmlns:a16="http://schemas.microsoft.com/office/drawing/2014/main" xmlns="" id="{00C8108A-C924-47FE-071A-B6C1E0E3B382}"/>
+                <a16:creationId xmlns:a16="http://schemas.microsoft.com/office/drawing/2014/main" id="{00C8108A-C924-47FE-071A-B6C1E0E3B382}"/>
               </a:ext>
             </a:extLst>
           </p:cNvPr>
@@ -8006,8 +8018,8 @@
         </p:nvSpPr>
         <p:spPr>
           <a:xfrm>
-            <a:off x="4329874" y="2597660"/>
-            <a:ext cx="3529204" cy="831340"/>
+            <a:off x="1222881" y="2276110"/>
+            <a:ext cx="6446280" cy="831340"/>
           </a:xfrm>
           <a:prstGeom prst="rect">
             <a:avLst/>
@@ -8020,7 +8032,24 @@
           <a:lstStyle/>
           <a:p>
             <a:r>
-              <a:t>Team Name:  | Team ID: </a:t>
+              <a:rPr sz="2400" dirty="0"/>
+              <a:t>Team Name:</a:t>
+            </a:r>
+            <a:r>
+              <a:rPr lang="en-IN" sz="2400" dirty="0" err="1"/>
+              <a:t>AI_Viewers</a:t>
+            </a:r>
+            <a:r>
+              <a:rPr sz="2400" dirty="0"/>
+              <a:t> | Team ID:</a:t>
+            </a:r>
+            <a:r>
+              <a:rPr lang="en-IN" sz="2400" dirty="0"/>
+              <a:t>WASI121</a:t>
+            </a:r>
+            <a:r>
+              <a:rPr dirty="0"/>
+              <a:t> </a:t>
             </a:r>
           </a:p>
         </p:txBody>
@@ -8030,7 +8059,7 @@
           <p:cNvPr id="4" name="Slide Number Placeholder 3">
             <a:extLst>
               <a:ext uri="{FF2B5EF4-FFF2-40B4-BE49-F238E27FC236}">
-                <a16:creationId xmlns:a16="http://schemas.microsoft.com/office/drawing/2014/main" xmlns="" id="{23857BA8-6A88-2C40-6D15-F60E248A9E5A}"/>
+                <a16:creationId xmlns:a16="http://schemas.microsoft.com/office/drawing/2014/main" id="{23857BA8-6A88-2C40-6D15-F60E248A9E5A}"/>
               </a:ext>
             </a:extLst>
           </p:cNvPr>
@@ -8076,10 +8105,10 @@
           <p:cNvPr id="26" name="Group 25">
             <a:extLst>
               <a:ext uri="{FF2B5EF4-FFF2-40B4-BE49-F238E27FC236}">
-                <a16:creationId xmlns:a16="http://schemas.microsoft.com/office/drawing/2014/main" xmlns="" id="{F0173917-5C1C-82AB-6142-EB886DC6EEA0}"/>
+                <a16:creationId xmlns:a16="http://schemas.microsoft.com/office/drawing/2014/main" id="{F0173917-5C1C-82AB-6142-EB886DC6EEA0}"/>
               </a:ext>
               <a:ext uri="{C183D7F6-B498-43B3-948B-1728B52AA6E4}">
-                <adec:decorative xmlns:adec="http://schemas.microsoft.com/office/drawing/2017/decorative" xmlns="" val="1"/>
+                <adec:decorative xmlns:adec="http://schemas.microsoft.com/office/drawing/2017/decorative" val="1"/>
               </a:ext>
             </a:extLst>
           </p:cNvPr>
@@ -8089,7 +8118,7 @@
           <p:nvPr>
             <p:extLst>
               <p:ext uri="{386F3935-93C4-4BCD-93E2-E3B085C9AB24}">
-                <p16:designElem xmlns:p16="http://schemas.microsoft.com/office/powerpoint/2015/main" xmlns="" val="1"/>
+                <p16:designElem xmlns:p16="http://schemas.microsoft.com/office/powerpoint/2015/main" val="1"/>
               </p:ext>
             </p:extLst>
           </p:nvPr>
@@ -8107,10 +8136,10 @@
             <p:cNvPr id="27" name="Freeform: Shape 26">
               <a:extLst>
                 <a:ext uri="{FF2B5EF4-FFF2-40B4-BE49-F238E27FC236}">
-                  <a16:creationId xmlns:a16="http://schemas.microsoft.com/office/drawing/2014/main" xmlns="" id="{EC858B04-B12F-1D0A-121A-346F95B99B63}"/>
+                  <a16:creationId xmlns:a16="http://schemas.microsoft.com/office/drawing/2014/main" id="{EC858B04-B12F-1D0A-121A-346F95B99B63}"/>
                 </a:ext>
                 <a:ext uri="{C183D7F6-B498-43B3-948B-1728B52AA6E4}">
-                  <adec:decorative xmlns:adec="http://schemas.microsoft.com/office/drawing/2017/decorative" xmlns="" val="1"/>
+                  <adec:decorative xmlns:adec="http://schemas.microsoft.com/office/drawing/2017/decorative" val="1"/>
                 </a:ext>
               </a:extLst>
             </p:cNvPr>
@@ -8118,7 +8147,7 @@
             <p:nvPr>
               <p:extLst>
                 <p:ext uri="{386F3935-93C4-4BCD-93E2-E3B085C9AB24}">
-                  <p16:designElem xmlns:p16="http://schemas.microsoft.com/office/powerpoint/2015/main" xmlns="" val="1"/>
+                  <p16:designElem xmlns:p16="http://schemas.microsoft.com/office/powerpoint/2015/main" val="1"/>
                 </p:ext>
               </p:extLst>
             </p:nvPr>
@@ -8505,10 +8534,10 @@
             <p:cNvPr id="28" name="Freeform: Shape 27">
               <a:extLst>
                 <a:ext uri="{FF2B5EF4-FFF2-40B4-BE49-F238E27FC236}">
-                  <a16:creationId xmlns:a16="http://schemas.microsoft.com/office/drawing/2014/main" xmlns="" id="{B504C547-3367-766C-837A-A78935C9AF07}"/>
+                  <a16:creationId xmlns:a16="http://schemas.microsoft.com/office/drawing/2014/main" id="{B504C547-3367-766C-837A-A78935C9AF07}"/>
                 </a:ext>
                 <a:ext uri="{C183D7F6-B498-43B3-948B-1728B52AA6E4}">
-                  <adec:decorative xmlns:adec="http://schemas.microsoft.com/office/drawing/2017/decorative" xmlns="" val="1"/>
+                  <adec:decorative xmlns:adec="http://schemas.microsoft.com/office/drawing/2017/decorative" val="1"/>
                 </a:ext>
               </a:extLst>
             </p:cNvPr>
@@ -8516,7 +8545,7 @@
             <p:nvPr>
               <p:extLst>
                 <p:ext uri="{386F3935-93C4-4BCD-93E2-E3B085C9AB24}">
-                  <p16:designElem xmlns:p16="http://schemas.microsoft.com/office/powerpoint/2015/main" xmlns="" val="1"/>
+                  <p16:designElem xmlns:p16="http://schemas.microsoft.com/office/powerpoint/2015/main" val="1"/>
                 </p:ext>
               </p:extLst>
             </p:nvPr>
@@ -8697,10 +8726,10 @@
             <p:cNvPr id="29" name="Freeform: Shape 28">
               <a:extLst>
                 <a:ext uri="{FF2B5EF4-FFF2-40B4-BE49-F238E27FC236}">
-                  <a16:creationId xmlns:a16="http://schemas.microsoft.com/office/drawing/2014/main" xmlns="" id="{F5FD4B83-38EE-F5C8-A96F-D32BF29FD0EC}"/>
+                  <a16:creationId xmlns:a16="http://schemas.microsoft.com/office/drawing/2014/main" id="{F5FD4B83-38EE-F5C8-A96F-D32BF29FD0EC}"/>
                 </a:ext>
                 <a:ext uri="{C183D7F6-B498-43B3-948B-1728B52AA6E4}">
-                  <adec:decorative xmlns:adec="http://schemas.microsoft.com/office/drawing/2017/decorative" xmlns="" val="1"/>
+                  <adec:decorative xmlns:adec="http://schemas.microsoft.com/office/drawing/2017/decorative" val="1"/>
                 </a:ext>
               </a:extLst>
             </p:cNvPr>
@@ -8708,7 +8737,7 @@
             <p:nvPr>
               <p:extLst>
                 <p:ext uri="{386F3935-93C4-4BCD-93E2-E3B085C9AB24}">
-                  <p16:designElem xmlns:p16="http://schemas.microsoft.com/office/powerpoint/2015/main" xmlns="" val="1"/>
+                  <p16:designElem xmlns:p16="http://schemas.microsoft.com/office/powerpoint/2015/main" val="1"/>
                 </p:ext>
               </p:extLst>
             </p:nvPr>
@@ -8951,10 +8980,10 @@
             <p:cNvPr id="30" name="Freeform: Shape 29">
               <a:extLst>
                 <a:ext uri="{FF2B5EF4-FFF2-40B4-BE49-F238E27FC236}">
-                  <a16:creationId xmlns:a16="http://schemas.microsoft.com/office/drawing/2014/main" xmlns="" id="{75009BB2-8F7B-D699-BD61-2727F0F203A4}"/>
+                  <a16:creationId xmlns:a16="http://schemas.microsoft.com/office/drawing/2014/main" id="{75009BB2-8F7B-D699-BD61-2727F0F203A4}"/>
                 </a:ext>
                 <a:ext uri="{C183D7F6-B498-43B3-948B-1728B52AA6E4}">
-                  <adec:decorative xmlns:adec="http://schemas.microsoft.com/office/drawing/2017/decorative" xmlns="" val="1"/>
+                  <adec:decorative xmlns:adec="http://schemas.microsoft.com/office/drawing/2017/decorative" val="1"/>
                 </a:ext>
               </a:extLst>
             </p:cNvPr>
@@ -8962,7 +8991,7 @@
             <p:nvPr>
               <p:extLst>
                 <p:ext uri="{386F3935-93C4-4BCD-93E2-E3B085C9AB24}">
-                  <p16:designElem xmlns:p16="http://schemas.microsoft.com/office/powerpoint/2015/main" xmlns="" val="1"/>
+                  <p16:designElem xmlns:p16="http://schemas.microsoft.com/office/powerpoint/2015/main" val="1"/>
                 </p:ext>
               </p:extLst>
             </p:nvPr>
@@ -9144,7 +9173,7 @@
           <p:cNvPr id="6" name="Picture 5" descr="A hands holding a light bulb&#10;&#10;AI-generated content may be incorrect.">
             <a:extLst>
               <a:ext uri="{FF2B5EF4-FFF2-40B4-BE49-F238E27FC236}">
-                <a16:creationId xmlns:a16="http://schemas.microsoft.com/office/drawing/2014/main" xmlns="" id="{3156E695-F4ED-A550-9B6B-36EEB08483CF}"/>
+                <a16:creationId xmlns:a16="http://schemas.microsoft.com/office/drawing/2014/main" id="{3156E695-F4ED-A550-9B6B-36EEB08483CF}"/>
               </a:ext>
             </a:extLst>
           </p:cNvPr>
@@ -9180,7 +9209,7 @@
           <p:cNvPr id="5" name="TextBox 4">
             <a:extLst>
               <a:ext uri="{FF2B5EF4-FFF2-40B4-BE49-F238E27FC236}">
-                <a16:creationId xmlns:a16="http://schemas.microsoft.com/office/drawing/2014/main" xmlns="" id="{FEB0F3D4-715A-9B70-76F8-0B1A410BD936}"/>
+                <a16:creationId xmlns:a16="http://schemas.microsoft.com/office/drawing/2014/main" id="{FEB0F3D4-715A-9B70-76F8-0B1A410BD936}"/>
               </a:ext>
             </a:extLst>
           </p:cNvPr>
@@ -9190,7 +9219,7 @@
         <p:spPr>
           <a:xfrm>
             <a:off x="1381321" y="3680386"/>
-            <a:ext cx="6096000" cy="1200329"/>
+            <a:ext cx="6096000" cy="1938992"/>
           </a:xfrm>
           <a:prstGeom prst="rect">
             <a:avLst/>
@@ -9204,18 +9233,61 @@
           <a:lstStyle/>
           <a:p>
             <a:r>
+              <a:rPr sz="2000" dirty="0"/>
               <a:t>Team Members:</a:t>
             </a:r>
           </a:p>
           <a:p>
+            <a:pPr marL="342900" indent="-342900">
+              <a:buFont typeface="Arial" panose="020B0604020202020204" pitchFamily="34" charset="0"/>
+              <a:buChar char="•"/>
+            </a:pPr>
             <a:r>
-              <a:t>1.</a:t>
+              <a:rPr lang="en-IN" sz="2000" dirty="0"/>
+              <a:t>Shlok Abhishek</a:t>
+            </a:r>
+            <a:endParaRPr sz="2000" dirty="0"/>
+          </a:p>
+          <a:p>
+            <a:pPr marL="342900" indent="-342900">
+              <a:buFont typeface="Arial" panose="020B0604020202020204" pitchFamily="34" charset="0"/>
+              <a:buChar char="•"/>
+            </a:pPr>
+            <a:r>
+              <a:rPr lang="en-IN" sz="2000" dirty="0"/>
+              <a:t>Venna Phani Bhushan</a:t>
             </a:r>
           </a:p>
           <a:p>
+            <a:pPr marL="342900" indent="-342900">
+              <a:buFont typeface="Arial" panose="020B0604020202020204" pitchFamily="34" charset="0"/>
+              <a:buChar char="•"/>
+            </a:pPr>
             <a:r>
-              <a:t>2.</a:t>
+              <a:rPr lang="en-IN" sz="2000" dirty="0"/>
+              <a:t>Prachi Singh </a:t>
             </a:r>
+          </a:p>
+          <a:p>
+            <a:pPr marL="342900" indent="-342900">
+              <a:buFont typeface="Arial" panose="020B0604020202020204" pitchFamily="34" charset="0"/>
+              <a:buChar char="•"/>
+            </a:pPr>
+            <a:r>
+              <a:rPr lang="en-IN" sz="2000" dirty="0"/>
+              <a:t>Nandini Sharma</a:t>
+            </a:r>
+          </a:p>
+          <a:p>
+            <a:pPr marL="342900" indent="-342900">
+              <a:buFont typeface="Arial" panose="020B0604020202020204" pitchFamily="34" charset="0"/>
+              <a:buChar char="•"/>
+            </a:pPr>
+            <a:r>
+              <a:rPr lang="en-IN" sz="2000" dirty="0"/>
+              <a:t>Abhishek Pandey</a:t>
+            </a:r>
+            <a:endParaRPr sz="2000" dirty="0"/>
           </a:p>
         </p:txBody>
       </p:sp>
@@ -9254,7 +9326,7 @@
           <p:cNvPr id="2" name="Title 1">
             <a:extLst>
               <a:ext uri="{FF2B5EF4-FFF2-40B4-BE49-F238E27FC236}">
-                <a16:creationId xmlns:a16="http://schemas.microsoft.com/office/drawing/2014/main" xmlns="" id="{BC97C1B8-6662-5502-4089-9DEA9AE8D62B}"/>
+                <a16:creationId xmlns:a16="http://schemas.microsoft.com/office/drawing/2014/main" id="{BC97C1B8-6662-5502-4089-9DEA9AE8D62B}"/>
               </a:ext>
             </a:extLst>
           </p:cNvPr>
@@ -9283,7 +9355,7 @@
           <p:cNvPr id="4" name="Slide Number Placeholder 3">
             <a:extLst>
               <a:ext uri="{FF2B5EF4-FFF2-40B4-BE49-F238E27FC236}">
-                <a16:creationId xmlns:a16="http://schemas.microsoft.com/office/drawing/2014/main" xmlns="" id="{1B606C71-BB9E-D39E-2E01-6947D28695EC}"/>
+                <a16:creationId xmlns:a16="http://schemas.microsoft.com/office/drawing/2014/main" id="{1B606C71-BB9E-D39E-2E01-6947D28695EC}"/>
               </a:ext>
             </a:extLst>
           </p:cNvPr>
@@ -9315,7 +9387,7 @@
           <p:cNvPr id="5" name="Picture 2" descr="Sharda University Logo &amp; Brand Assets (SVG, PNG and vector ...">
             <a:extLst>
               <a:ext uri="{FF2B5EF4-FFF2-40B4-BE49-F238E27FC236}">
-                <a16:creationId xmlns:a16="http://schemas.microsoft.com/office/drawing/2014/main" xmlns="" id="{5F4F79DF-9767-E5A8-8AF3-F6335318A36D}"/>
+                <a16:creationId xmlns:a16="http://schemas.microsoft.com/office/drawing/2014/main" id="{5F4F79DF-9767-E5A8-8AF3-F6335318A36D}"/>
               </a:ext>
             </a:extLst>
           </p:cNvPr>
@@ -9362,10 +9434,10 @@
           <p:cNvPr id="3" name="Rectangle 2">
             <a:extLst>
               <a:ext uri="{FF2B5EF4-FFF2-40B4-BE49-F238E27FC236}">
-                <a16:creationId xmlns:a16="http://schemas.microsoft.com/office/drawing/2014/main" xmlns="" id="{57521C2D-0A12-0BE0-D27F-A64EC882E132}"/>
+                <a16:creationId xmlns:a16="http://schemas.microsoft.com/office/drawing/2014/main" id="{57521C2D-0A12-0BE0-D27F-A64EC882E132}"/>
               </a:ext>
               <a:ext uri="{C183D7F6-B498-43B3-948B-1728B52AA6E4}">
-                <adec:decorative xmlns:adec="http://schemas.microsoft.com/office/drawing/2017/decorative" xmlns="" val="1"/>
+                <adec:decorative xmlns:adec="http://schemas.microsoft.com/office/drawing/2017/decorative" val="1"/>
               </a:ext>
             </a:extLst>
           </p:cNvPr>
@@ -9373,7 +9445,7 @@
           <p:nvPr>
             <p:extLst>
               <p:ext uri="{386F3935-93C4-4BCD-93E2-E3B085C9AB24}">
-                <p16:designElem xmlns:p16="http://schemas.microsoft.com/office/powerpoint/2015/main" xmlns="" val="1"/>
+                <p16:designElem xmlns:p16="http://schemas.microsoft.com/office/powerpoint/2015/main" val="1"/>
               </p:ext>
             </p:extLst>
           </p:nvPr>
@@ -9420,10 +9492,10 @@
           <p:cNvPr id="6" name="Rectangle 5">
             <a:extLst>
               <a:ext uri="{FF2B5EF4-FFF2-40B4-BE49-F238E27FC236}">
-                <a16:creationId xmlns:a16="http://schemas.microsoft.com/office/drawing/2014/main" xmlns="" id="{1C633C47-0227-5277-1FFA-57C12A05F839}"/>
+                <a16:creationId xmlns:a16="http://schemas.microsoft.com/office/drawing/2014/main" id="{1C633C47-0227-5277-1FFA-57C12A05F839}"/>
               </a:ext>
               <a:ext uri="{C183D7F6-B498-43B3-948B-1728B52AA6E4}">
-                <adec:decorative xmlns:adec="http://schemas.microsoft.com/office/drawing/2017/decorative" xmlns="" val="1"/>
+                <adec:decorative xmlns:adec="http://schemas.microsoft.com/office/drawing/2017/decorative" val="1"/>
               </a:ext>
             </a:extLst>
           </p:cNvPr>
@@ -9431,7 +9503,7 @@
           <p:nvPr>
             <p:extLst>
               <p:ext uri="{386F3935-93C4-4BCD-93E2-E3B085C9AB24}">
-                <p16:designElem xmlns:p16="http://schemas.microsoft.com/office/powerpoint/2015/main" xmlns="" val="1"/>
+                <p16:designElem xmlns:p16="http://schemas.microsoft.com/office/powerpoint/2015/main" val="1"/>
               </p:ext>
             </p:extLst>
           </p:nvPr>
@@ -9481,7 +9553,7 @@
           <p:cNvPr id="7" name="TextBox 6">
             <a:extLst>
               <a:ext uri="{FF2B5EF4-FFF2-40B4-BE49-F238E27FC236}">
-                <a16:creationId xmlns:a16="http://schemas.microsoft.com/office/drawing/2014/main" xmlns="" id="{A99EBEFD-2238-7C2F-DF28-B09B2A460C30}"/>
+                <a16:creationId xmlns:a16="http://schemas.microsoft.com/office/drawing/2014/main" id="{A99EBEFD-2238-7C2F-DF28-B09B2A460C30}"/>
               </a:ext>
             </a:extLst>
           </p:cNvPr>
@@ -9530,10 +9602,10 @@
           <p:cNvPr id="8" name="Group 7">
             <a:extLst>
               <a:ext uri="{FF2B5EF4-FFF2-40B4-BE49-F238E27FC236}">
-                <a16:creationId xmlns:a16="http://schemas.microsoft.com/office/drawing/2014/main" xmlns="" id="{C11F4149-52B1-AB05-4DBF-9B5E32861670}"/>
+                <a16:creationId xmlns:a16="http://schemas.microsoft.com/office/drawing/2014/main" id="{C11F4149-52B1-AB05-4DBF-9B5E32861670}"/>
               </a:ext>
               <a:ext uri="{C183D7F6-B498-43B3-948B-1728B52AA6E4}">
-                <adec:decorative xmlns:adec="http://schemas.microsoft.com/office/drawing/2017/decorative" xmlns="" val="1"/>
+                <adec:decorative xmlns:adec="http://schemas.microsoft.com/office/drawing/2017/decorative" val="1"/>
               </a:ext>
             </a:extLst>
           </p:cNvPr>
@@ -9541,7 +9613,7 @@
           <p:nvPr>
             <p:extLst>
               <p:ext uri="{386F3935-93C4-4BCD-93E2-E3B085C9AB24}">
-                <p16:designElem xmlns:p16="http://schemas.microsoft.com/office/powerpoint/2015/main" xmlns="" val="1"/>
+                <p16:designElem xmlns:p16="http://schemas.microsoft.com/office/powerpoint/2015/main" val="1"/>
               </p:ext>
             </p:extLst>
           </p:nvPr>
@@ -9559,10 +9631,10 @@
             <p:cNvPr id="9" name="Freeform: Shape 20">
               <a:extLst>
                 <a:ext uri="{FF2B5EF4-FFF2-40B4-BE49-F238E27FC236}">
-                  <a16:creationId xmlns:a16="http://schemas.microsoft.com/office/drawing/2014/main" xmlns="" id="{C4F8C0D9-4C65-56AE-4144-C9CD551DE99B}"/>
+                  <a16:creationId xmlns:a16="http://schemas.microsoft.com/office/drawing/2014/main" id="{C4F8C0D9-4C65-56AE-4144-C9CD551DE99B}"/>
                 </a:ext>
                 <a:ext uri="{C183D7F6-B498-43B3-948B-1728B52AA6E4}">
-                  <adec:decorative xmlns:adec="http://schemas.microsoft.com/office/drawing/2017/decorative" xmlns="" val="1"/>
+                  <adec:decorative xmlns:adec="http://schemas.microsoft.com/office/drawing/2017/decorative" val="1"/>
                 </a:ext>
               </a:extLst>
             </p:cNvPr>
@@ -9570,7 +9642,7 @@
             <p:nvPr>
               <p:extLst>
                 <p:ext uri="{386F3935-93C4-4BCD-93E2-E3B085C9AB24}">
-                  <p16:designElem xmlns:p16="http://schemas.microsoft.com/office/powerpoint/2015/main" xmlns="" val="1"/>
+                  <p16:designElem xmlns:p16="http://schemas.microsoft.com/office/powerpoint/2015/main" val="1"/>
                 </p:ext>
               </p:extLst>
             </p:nvPr>
@@ -9771,10 +9843,10 @@
             <p:cNvPr id="10" name="Freeform: Shape 21">
               <a:extLst>
                 <a:ext uri="{FF2B5EF4-FFF2-40B4-BE49-F238E27FC236}">
-                  <a16:creationId xmlns:a16="http://schemas.microsoft.com/office/drawing/2014/main" xmlns="" id="{05478CF4-30DD-6522-6898-A1FBC9668F55}"/>
+                  <a16:creationId xmlns:a16="http://schemas.microsoft.com/office/drawing/2014/main" id="{05478CF4-30DD-6522-6898-A1FBC9668F55}"/>
                 </a:ext>
                 <a:ext uri="{C183D7F6-B498-43B3-948B-1728B52AA6E4}">
-                  <adec:decorative xmlns:adec="http://schemas.microsoft.com/office/drawing/2017/decorative" xmlns="" val="1"/>
+                  <adec:decorative xmlns:adec="http://schemas.microsoft.com/office/drawing/2017/decorative" val="1"/>
                 </a:ext>
               </a:extLst>
             </p:cNvPr>
@@ -9782,7 +9854,7 @@
             <p:nvPr>
               <p:extLst>
                 <p:ext uri="{386F3935-93C4-4BCD-93E2-E3B085C9AB24}">
-                  <p16:designElem xmlns:p16="http://schemas.microsoft.com/office/powerpoint/2015/main" xmlns="" val="1"/>
+                  <p16:designElem xmlns:p16="http://schemas.microsoft.com/office/powerpoint/2015/main" val="1"/>
                 </p:ext>
               </p:extLst>
             </p:nvPr>
@@ -9983,10 +10055,10 @@
             <p:cNvPr id="11" name="Freeform: Shape 22">
               <a:extLst>
                 <a:ext uri="{FF2B5EF4-FFF2-40B4-BE49-F238E27FC236}">
-                  <a16:creationId xmlns:a16="http://schemas.microsoft.com/office/drawing/2014/main" xmlns="" id="{EC383C5F-8D6C-0C91-7F35-C78C36895FC6}"/>
+                  <a16:creationId xmlns:a16="http://schemas.microsoft.com/office/drawing/2014/main" id="{EC383C5F-8D6C-0C91-7F35-C78C36895FC6}"/>
                 </a:ext>
                 <a:ext uri="{C183D7F6-B498-43B3-948B-1728B52AA6E4}">
-                  <adec:decorative xmlns:adec="http://schemas.microsoft.com/office/drawing/2017/decorative" xmlns="" val="1"/>
+                  <adec:decorative xmlns:adec="http://schemas.microsoft.com/office/drawing/2017/decorative" val="1"/>
                 </a:ext>
               </a:extLst>
             </p:cNvPr>
@@ -9994,7 +10066,7 @@
             <p:nvPr>
               <p:extLst>
                 <p:ext uri="{386F3935-93C4-4BCD-93E2-E3B085C9AB24}">
-                  <p16:designElem xmlns:p16="http://schemas.microsoft.com/office/powerpoint/2015/main" xmlns="" val="1"/>
+                  <p16:designElem xmlns:p16="http://schemas.microsoft.com/office/powerpoint/2015/main" val="1"/>
                 </p:ext>
               </p:extLst>
             </p:nvPr>
@@ -10305,10 +10377,10 @@
             <p:cNvPr id="12" name="Freeform: Shape 23">
               <a:extLst>
                 <a:ext uri="{FF2B5EF4-FFF2-40B4-BE49-F238E27FC236}">
-                  <a16:creationId xmlns:a16="http://schemas.microsoft.com/office/drawing/2014/main" xmlns="" id="{2AE493C0-FED7-A378-B4F2-739979AB13CA}"/>
+                  <a16:creationId xmlns:a16="http://schemas.microsoft.com/office/drawing/2014/main" id="{2AE493C0-FED7-A378-B4F2-739979AB13CA}"/>
                 </a:ext>
                 <a:ext uri="{C183D7F6-B498-43B3-948B-1728B52AA6E4}">
-                  <adec:decorative xmlns:adec="http://schemas.microsoft.com/office/drawing/2017/decorative" xmlns="" val="1"/>
+                  <adec:decorative xmlns:adec="http://schemas.microsoft.com/office/drawing/2017/decorative" val="1"/>
                 </a:ext>
               </a:extLst>
             </p:cNvPr>
@@ -10316,7 +10388,7 @@
             <p:nvPr>
               <p:extLst>
                 <p:ext uri="{386F3935-93C4-4BCD-93E2-E3B085C9AB24}">
-                  <p16:designElem xmlns:p16="http://schemas.microsoft.com/office/powerpoint/2015/main" xmlns="" val="1"/>
+                  <p16:designElem xmlns:p16="http://schemas.microsoft.com/office/powerpoint/2015/main" val="1"/>
                 </p:ext>
               </p:extLst>
             </p:nvPr>
@@ -10784,7 +10856,7 @@
           <p:cNvPr id="13" name="Picture 12" descr="A close-up of a logo&#10;&#10;AI-generated content may be incorrect.">
             <a:extLst>
               <a:ext uri="{FF2B5EF4-FFF2-40B4-BE49-F238E27FC236}">
-                <a16:creationId xmlns:a16="http://schemas.microsoft.com/office/drawing/2014/main" xmlns="" id="{17FA03F5-F4BF-E184-6040-856156AE1C78}"/>
+                <a16:creationId xmlns:a16="http://schemas.microsoft.com/office/drawing/2014/main" id="{17FA03F5-F4BF-E184-6040-856156AE1C78}"/>
               </a:ext>
             </a:extLst>
           </p:cNvPr>
@@ -10820,7 +10892,7 @@
           <p:cNvPr id="15" name="Slide Number Placeholder 3">
             <a:extLst>
               <a:ext uri="{FF2B5EF4-FFF2-40B4-BE49-F238E27FC236}">
-                <a16:creationId xmlns:a16="http://schemas.microsoft.com/office/drawing/2014/main" xmlns="" id="{8CA6072C-462B-7E98-EF93-005F337ED60C}"/>
+                <a16:creationId xmlns:a16="http://schemas.microsoft.com/office/drawing/2014/main" id="{8CA6072C-462B-7E98-EF93-005F337ED60C}"/>
               </a:ext>
             </a:extLst>
           </p:cNvPr>
@@ -10963,10 +11035,10 @@
           <p:cNvPr id="16" name="Group 15">
             <a:extLst>
               <a:ext uri="{FF2B5EF4-FFF2-40B4-BE49-F238E27FC236}">
-                <a16:creationId xmlns:a16="http://schemas.microsoft.com/office/drawing/2014/main" xmlns="" id="{845E4D8B-36E6-F1FE-5E67-E097BFFEC747}"/>
+                <a16:creationId xmlns:a16="http://schemas.microsoft.com/office/drawing/2014/main" id="{845E4D8B-36E6-F1FE-5E67-E097BFFEC747}"/>
               </a:ext>
               <a:ext uri="{C183D7F6-B498-43B3-948B-1728B52AA6E4}">
-                <adec:decorative xmlns:adec="http://schemas.microsoft.com/office/drawing/2017/decorative" xmlns="" val="1"/>
+                <adec:decorative xmlns:adec="http://schemas.microsoft.com/office/drawing/2017/decorative" val="1"/>
               </a:ext>
             </a:extLst>
           </p:cNvPr>
@@ -10974,7 +11046,7 @@
           <p:nvPr>
             <p:extLst>
               <p:ext uri="{386F3935-93C4-4BCD-93E2-E3B085C9AB24}">
-                <p16:designElem xmlns:p16="http://schemas.microsoft.com/office/powerpoint/2015/main" xmlns="" val="1"/>
+                <p16:designElem xmlns:p16="http://schemas.microsoft.com/office/powerpoint/2015/main" val="1"/>
               </p:ext>
             </p:extLst>
           </p:nvPr>
@@ -10992,10 +11064,10 @@
             <p:cNvPr id="17" name="Freeform: Shape 26">
               <a:extLst>
                 <a:ext uri="{FF2B5EF4-FFF2-40B4-BE49-F238E27FC236}">
-                  <a16:creationId xmlns:a16="http://schemas.microsoft.com/office/drawing/2014/main" xmlns="" id="{194A745E-CF17-8242-AAC1-CFD911AD49FA}"/>
+                  <a16:creationId xmlns:a16="http://schemas.microsoft.com/office/drawing/2014/main" id="{194A745E-CF17-8242-AAC1-CFD911AD49FA}"/>
                 </a:ext>
                 <a:ext uri="{C183D7F6-B498-43B3-948B-1728B52AA6E4}">
-                  <adec:decorative xmlns:adec="http://schemas.microsoft.com/office/drawing/2017/decorative" xmlns="" val="1"/>
+                  <adec:decorative xmlns:adec="http://schemas.microsoft.com/office/drawing/2017/decorative" val="1"/>
                 </a:ext>
               </a:extLst>
             </p:cNvPr>
@@ -11003,7 +11075,7 @@
             <p:nvPr>
               <p:extLst>
                 <p:ext uri="{386F3935-93C4-4BCD-93E2-E3B085C9AB24}">
-                  <p16:designElem xmlns:p16="http://schemas.microsoft.com/office/powerpoint/2015/main" xmlns="" val="1"/>
+                  <p16:designElem xmlns:p16="http://schemas.microsoft.com/office/powerpoint/2015/main" val="1"/>
                 </p:ext>
               </p:extLst>
             </p:nvPr>
@@ -11390,10 +11462,10 @@
             <p:cNvPr id="18" name="Freeform: Shape 27">
               <a:extLst>
                 <a:ext uri="{FF2B5EF4-FFF2-40B4-BE49-F238E27FC236}">
-                  <a16:creationId xmlns:a16="http://schemas.microsoft.com/office/drawing/2014/main" xmlns="" id="{0B68D38B-937C-ADE3-3B5F-1BBD3AD714E8}"/>
+                  <a16:creationId xmlns:a16="http://schemas.microsoft.com/office/drawing/2014/main" id="{0B68D38B-937C-ADE3-3B5F-1BBD3AD714E8}"/>
                 </a:ext>
                 <a:ext uri="{C183D7F6-B498-43B3-948B-1728B52AA6E4}">
-                  <adec:decorative xmlns:adec="http://schemas.microsoft.com/office/drawing/2017/decorative" xmlns="" val="1"/>
+                  <adec:decorative xmlns:adec="http://schemas.microsoft.com/office/drawing/2017/decorative" val="1"/>
                 </a:ext>
               </a:extLst>
             </p:cNvPr>
@@ -11401,7 +11473,7 @@
             <p:nvPr>
               <p:extLst>
                 <p:ext uri="{386F3935-93C4-4BCD-93E2-E3B085C9AB24}">
-                  <p16:designElem xmlns:p16="http://schemas.microsoft.com/office/powerpoint/2015/main" xmlns="" val="1"/>
+                  <p16:designElem xmlns:p16="http://schemas.microsoft.com/office/powerpoint/2015/main" val="1"/>
                 </p:ext>
               </p:extLst>
             </p:nvPr>
@@ -11582,10 +11654,10 @@
             <p:cNvPr id="19" name="Freeform: Shape 28">
               <a:extLst>
                 <a:ext uri="{FF2B5EF4-FFF2-40B4-BE49-F238E27FC236}">
-                  <a16:creationId xmlns:a16="http://schemas.microsoft.com/office/drawing/2014/main" xmlns="" id="{036A3A8D-E06A-449C-6C90-F84B9E8A20C8}"/>
+                  <a16:creationId xmlns:a16="http://schemas.microsoft.com/office/drawing/2014/main" id="{036A3A8D-E06A-449C-6C90-F84B9E8A20C8}"/>
                 </a:ext>
                 <a:ext uri="{C183D7F6-B498-43B3-948B-1728B52AA6E4}">
-                  <adec:decorative xmlns:adec="http://schemas.microsoft.com/office/drawing/2017/decorative" xmlns="" val="1"/>
+                  <adec:decorative xmlns:adec="http://schemas.microsoft.com/office/drawing/2017/decorative" val="1"/>
                 </a:ext>
               </a:extLst>
             </p:cNvPr>
@@ -11593,7 +11665,7 @@
             <p:nvPr>
               <p:extLst>
                 <p:ext uri="{386F3935-93C4-4BCD-93E2-E3B085C9AB24}">
-                  <p16:designElem xmlns:p16="http://schemas.microsoft.com/office/powerpoint/2015/main" xmlns="" val="1"/>
+                  <p16:designElem xmlns:p16="http://schemas.microsoft.com/office/powerpoint/2015/main" val="1"/>
                 </p:ext>
               </p:extLst>
             </p:nvPr>
@@ -11836,10 +11908,10 @@
             <p:cNvPr id="20" name="Freeform: Shape 29">
               <a:extLst>
                 <a:ext uri="{FF2B5EF4-FFF2-40B4-BE49-F238E27FC236}">
-                  <a16:creationId xmlns:a16="http://schemas.microsoft.com/office/drawing/2014/main" xmlns="" id="{38AF1577-067B-B497-7804-C17FA4C22FFD}"/>
+                  <a16:creationId xmlns:a16="http://schemas.microsoft.com/office/drawing/2014/main" id="{38AF1577-067B-B497-7804-C17FA4C22FFD}"/>
                 </a:ext>
                 <a:ext uri="{C183D7F6-B498-43B3-948B-1728B52AA6E4}">
-                  <adec:decorative xmlns:adec="http://schemas.microsoft.com/office/drawing/2017/decorative" xmlns="" val="1"/>
+                  <adec:decorative xmlns:adec="http://schemas.microsoft.com/office/drawing/2017/decorative" val="1"/>
                 </a:ext>
               </a:extLst>
             </p:cNvPr>
@@ -11847,7 +11919,7 @@
             <p:nvPr>
               <p:extLst>
                 <p:ext uri="{386F3935-93C4-4BCD-93E2-E3B085C9AB24}">
-                  <p16:designElem xmlns:p16="http://schemas.microsoft.com/office/powerpoint/2015/main" xmlns="" val="1"/>
+                  <p16:designElem xmlns:p16="http://schemas.microsoft.com/office/powerpoint/2015/main" val="1"/>
                 </p:ext>
               </p:extLst>
             </p:nvPr>
@@ -12029,7 +12101,7 @@
           <p:cNvPr id="21" name="Picture 20" descr="A hands holding a light bulb&#10;&#10;AI-generated content may be incorrect.">
             <a:extLst>
               <a:ext uri="{FF2B5EF4-FFF2-40B4-BE49-F238E27FC236}">
-                <a16:creationId xmlns:a16="http://schemas.microsoft.com/office/drawing/2014/main" xmlns="" id="{5C19E2A6-1141-C824-F2BF-D2BFCF09C3C0}"/>
+                <a16:creationId xmlns:a16="http://schemas.microsoft.com/office/drawing/2014/main" id="{5C19E2A6-1141-C824-F2BF-D2BFCF09C3C0}"/>
               </a:ext>
             </a:extLst>
           </p:cNvPr>
@@ -12068,8 +12140,8 @@
         </p:nvSpPr>
         <p:spPr>
           <a:xfrm>
-            <a:off x="1180000" y="1380000"/>
-            <a:ext cx="3500000" cy="350000"/>
+            <a:off x="1352212" y="1202124"/>
+            <a:ext cx="5045714" cy="523220"/>
           </a:xfrm>
           <a:prstGeom prst="rect">
             <a:avLst/>
@@ -12090,6 +12162,7 @@
               </a:defRPr>
             </a:pPr>
             <a:r>
+              <a:rPr sz="2800" dirty="0"/>
               <a:t>Current Hiring Problems</a:t>
             </a:r>
           </a:p>
@@ -12104,7 +12177,7 @@
         <p:spPr>
           <a:xfrm>
             <a:off x="1180000" y="1760000"/>
-            <a:ext cx="9000000" cy="2500000"/>
+            <a:ext cx="9000000" cy="2246769"/>
           </a:xfrm>
           <a:prstGeom prst="rect">
             <a:avLst/>
@@ -12125,26 +12198,31 @@
               </a:defRPr>
             </a:pPr>
             <a:r>
+              <a:rPr sz="2800" dirty="0"/>
               <a:t>- Manual interviews take too much recruiter time</a:t>
             </a:r>
           </a:p>
           <a:p>
             <a:r>
+              <a:rPr sz="2800" dirty="0"/>
               <a:t>- Different interviewers create inconsistent evaluation</a:t>
             </a:r>
           </a:p>
           <a:p>
             <a:r>
+              <a:rPr sz="2800" dirty="0"/>
               <a:t>- Scheduling slows the shortlist process</a:t>
             </a:r>
           </a:p>
           <a:p>
             <a:r>
+              <a:rPr sz="2800" dirty="0"/>
               <a:t>- High-volume recruitment is difficult to scale</a:t>
             </a:r>
           </a:p>
           <a:p>
             <a:r>
+              <a:rPr sz="2800" dirty="0"/>
               <a:t>- Feedback and ranking are delayed for decision makers</a:t>
             </a:r>
           </a:p>
@@ -12158,8 +12236,8 @@
         </p:nvSpPr>
         <p:spPr>
           <a:xfrm>
-            <a:off x="1180000" y="4400000"/>
-            <a:ext cx="9000000" cy="500000"/>
+            <a:off x="1328189" y="4225056"/>
+            <a:ext cx="9168951" cy="954107"/>
           </a:xfrm>
           <a:prstGeom prst="rect">
             <a:avLst/>
@@ -12180,6 +12258,7 @@
               </a:defRPr>
             </a:pPr>
             <a:r>
+              <a:rPr sz="2800" dirty="0"/>
               <a:t>Impact: slower hiring pipeline, higher screening effort, and uneven candidate assessment.</a:t>
             </a:r>
           </a:p>
@@ -12220,7 +12299,7 @@
           <p:cNvPr id="2" name="Title 1">
             <a:extLst>
               <a:ext uri="{FF2B5EF4-FFF2-40B4-BE49-F238E27FC236}">
-                <a16:creationId xmlns:a16="http://schemas.microsoft.com/office/drawing/2014/main" xmlns="" id="{1478E274-C627-E80A-CF40-A772916C0C2C}"/>
+                <a16:creationId xmlns:a16="http://schemas.microsoft.com/office/drawing/2014/main" id="{1478E274-C627-E80A-CF40-A772916C0C2C}"/>
               </a:ext>
             </a:extLst>
           </p:cNvPr>
@@ -12248,7 +12327,7 @@
           <p:cNvPr id="4" name="Slide Number Placeholder 3">
             <a:extLst>
               <a:ext uri="{FF2B5EF4-FFF2-40B4-BE49-F238E27FC236}">
-                <a16:creationId xmlns:a16="http://schemas.microsoft.com/office/drawing/2014/main" xmlns="" id="{1BFB5FD9-1F5F-5F84-88D9-A72F013CADA7}"/>
+                <a16:creationId xmlns:a16="http://schemas.microsoft.com/office/drawing/2014/main" id="{1BFB5FD9-1F5F-5F84-88D9-A72F013CADA7}"/>
               </a:ext>
             </a:extLst>
           </p:cNvPr>
@@ -12277,7 +12356,7 @@
           <p:cNvPr id="5" name="Picture 2" descr="Sharda University Logo &amp; Brand Assets (SVG, PNG and vector ...">
             <a:extLst>
               <a:ext uri="{FF2B5EF4-FFF2-40B4-BE49-F238E27FC236}">
-                <a16:creationId xmlns:a16="http://schemas.microsoft.com/office/drawing/2014/main" xmlns="" id="{1881C505-F0BD-25E8-FD3B-3295A5E318C2}"/>
+                <a16:creationId xmlns:a16="http://schemas.microsoft.com/office/drawing/2014/main" id="{1881C505-F0BD-25E8-FD3B-3295A5E318C2}"/>
               </a:ext>
             </a:extLst>
           </p:cNvPr>
@@ -12324,7 +12403,7 @@
           <p:cNvPr id="3" name="Title 1">
             <a:extLst>
               <a:ext uri="{FF2B5EF4-FFF2-40B4-BE49-F238E27FC236}">
-                <a16:creationId xmlns:a16="http://schemas.microsoft.com/office/drawing/2014/main" xmlns="" id="{2617EDC7-637D-2183-3E37-C6BECCCACC9E}"/>
+                <a16:creationId xmlns:a16="http://schemas.microsoft.com/office/drawing/2014/main" id="{2617EDC7-637D-2183-3E37-C6BECCCACC9E}"/>
               </a:ext>
             </a:extLst>
           </p:cNvPr>
@@ -12379,7 +12458,7 @@
           <p:cNvPr id="6" name="Slide Number Placeholder 3">
             <a:extLst>
               <a:ext uri="{FF2B5EF4-FFF2-40B4-BE49-F238E27FC236}">
-                <a16:creationId xmlns:a16="http://schemas.microsoft.com/office/drawing/2014/main" xmlns="" id="{7CE7E5F9-EB5C-2C3D-7B75-4D4DDE0494D3}"/>
+                <a16:creationId xmlns:a16="http://schemas.microsoft.com/office/drawing/2014/main" id="{7CE7E5F9-EB5C-2C3D-7B75-4D4DDE0494D3}"/>
               </a:ext>
             </a:extLst>
           </p:cNvPr>
@@ -12515,7 +12594,7 @@
           <p:cNvPr id="7" name="Picture 2" descr="Sharda University Logo &amp; Brand Assets (SVG, PNG and vector ...">
             <a:extLst>
               <a:ext uri="{FF2B5EF4-FFF2-40B4-BE49-F238E27FC236}">
-                <a16:creationId xmlns:a16="http://schemas.microsoft.com/office/drawing/2014/main" xmlns="" id="{B683A6EE-89A4-6714-8511-0ED76F47C4B6}"/>
+                <a16:creationId xmlns:a16="http://schemas.microsoft.com/office/drawing/2014/main" id="{B683A6EE-89A4-6714-8511-0ED76F47C4B6}"/>
               </a:ext>
             </a:extLst>
           </p:cNvPr>
@@ -12562,10 +12641,10 @@
           <p:cNvPr id="8" name="Rectangle 7">
             <a:extLst>
               <a:ext uri="{FF2B5EF4-FFF2-40B4-BE49-F238E27FC236}">
-                <a16:creationId xmlns:a16="http://schemas.microsoft.com/office/drawing/2014/main" xmlns="" id="{237A484D-D11F-0B17-F111-F76FB0BE0F1F}"/>
+                <a16:creationId xmlns:a16="http://schemas.microsoft.com/office/drawing/2014/main" id="{237A484D-D11F-0B17-F111-F76FB0BE0F1F}"/>
               </a:ext>
               <a:ext uri="{C183D7F6-B498-43B3-948B-1728B52AA6E4}">
-                <adec:decorative xmlns:adec="http://schemas.microsoft.com/office/drawing/2017/decorative" xmlns="" val="1"/>
+                <adec:decorative xmlns:adec="http://schemas.microsoft.com/office/drawing/2017/decorative" val="1"/>
               </a:ext>
             </a:extLst>
           </p:cNvPr>
@@ -12573,7 +12652,7 @@
           <p:nvPr>
             <p:extLst>
               <p:ext uri="{386F3935-93C4-4BCD-93E2-E3B085C9AB24}">
-                <p16:designElem xmlns:p16="http://schemas.microsoft.com/office/powerpoint/2015/main" xmlns="" val="1"/>
+                <p16:designElem xmlns:p16="http://schemas.microsoft.com/office/powerpoint/2015/main" val="1"/>
               </p:ext>
             </p:extLst>
           </p:nvPr>
@@ -12620,10 +12699,10 @@
           <p:cNvPr id="9" name="Rectangle 8">
             <a:extLst>
               <a:ext uri="{FF2B5EF4-FFF2-40B4-BE49-F238E27FC236}">
-                <a16:creationId xmlns:a16="http://schemas.microsoft.com/office/drawing/2014/main" xmlns="" id="{66A39220-2E5E-9225-03C7-7D31CE8FE275}"/>
+                <a16:creationId xmlns:a16="http://schemas.microsoft.com/office/drawing/2014/main" id="{66A39220-2E5E-9225-03C7-7D31CE8FE275}"/>
               </a:ext>
               <a:ext uri="{C183D7F6-B498-43B3-948B-1728B52AA6E4}">
-                <adec:decorative xmlns:adec="http://schemas.microsoft.com/office/drawing/2017/decorative" xmlns="" val="1"/>
+                <adec:decorative xmlns:adec="http://schemas.microsoft.com/office/drawing/2017/decorative" val="1"/>
               </a:ext>
             </a:extLst>
           </p:cNvPr>
@@ -12631,7 +12710,7 @@
           <p:nvPr>
             <p:extLst>
               <p:ext uri="{386F3935-93C4-4BCD-93E2-E3B085C9AB24}">
-                <p16:designElem xmlns:p16="http://schemas.microsoft.com/office/powerpoint/2015/main" xmlns="" val="1"/>
+                <p16:designElem xmlns:p16="http://schemas.microsoft.com/office/powerpoint/2015/main" val="1"/>
               </p:ext>
             </p:extLst>
           </p:nvPr>
@@ -12681,7 +12760,7 @@
           <p:cNvPr id="10" name="TextBox 9">
             <a:extLst>
               <a:ext uri="{FF2B5EF4-FFF2-40B4-BE49-F238E27FC236}">
-                <a16:creationId xmlns:a16="http://schemas.microsoft.com/office/drawing/2014/main" xmlns="" id="{F05091E1-2002-C3EF-AD14-30B2F7142842}"/>
+                <a16:creationId xmlns:a16="http://schemas.microsoft.com/office/drawing/2014/main" id="{F05091E1-2002-C3EF-AD14-30B2F7142842}"/>
               </a:ext>
             </a:extLst>
           </p:cNvPr>
@@ -12730,10 +12809,10 @@
           <p:cNvPr id="11" name="Group 10">
             <a:extLst>
               <a:ext uri="{FF2B5EF4-FFF2-40B4-BE49-F238E27FC236}">
-                <a16:creationId xmlns:a16="http://schemas.microsoft.com/office/drawing/2014/main" xmlns="" id="{A61F2F74-3A1F-1FC4-F4D1-EDAA57D68A27}"/>
+                <a16:creationId xmlns:a16="http://schemas.microsoft.com/office/drawing/2014/main" id="{A61F2F74-3A1F-1FC4-F4D1-EDAA57D68A27}"/>
               </a:ext>
               <a:ext uri="{C183D7F6-B498-43B3-948B-1728B52AA6E4}">
-                <adec:decorative xmlns:adec="http://schemas.microsoft.com/office/drawing/2017/decorative" xmlns="" val="1"/>
+                <adec:decorative xmlns:adec="http://schemas.microsoft.com/office/drawing/2017/decorative" val="1"/>
               </a:ext>
             </a:extLst>
           </p:cNvPr>
@@ -12741,7 +12820,7 @@
           <p:nvPr>
             <p:extLst>
               <p:ext uri="{386F3935-93C4-4BCD-93E2-E3B085C9AB24}">
-                <p16:designElem xmlns:p16="http://schemas.microsoft.com/office/powerpoint/2015/main" xmlns="" val="1"/>
+                <p16:designElem xmlns:p16="http://schemas.microsoft.com/office/powerpoint/2015/main" val="1"/>
               </p:ext>
             </p:extLst>
           </p:nvPr>
@@ -12759,10 +12838,10 @@
             <p:cNvPr id="12" name="Freeform: Shape 20">
               <a:extLst>
                 <a:ext uri="{FF2B5EF4-FFF2-40B4-BE49-F238E27FC236}">
-                  <a16:creationId xmlns:a16="http://schemas.microsoft.com/office/drawing/2014/main" xmlns="" id="{0F18D0D6-2A36-D31D-D9D1-5A6DF35D51D4}"/>
+                  <a16:creationId xmlns:a16="http://schemas.microsoft.com/office/drawing/2014/main" id="{0F18D0D6-2A36-D31D-D9D1-5A6DF35D51D4}"/>
                 </a:ext>
                 <a:ext uri="{C183D7F6-B498-43B3-948B-1728B52AA6E4}">
-                  <adec:decorative xmlns:adec="http://schemas.microsoft.com/office/drawing/2017/decorative" xmlns="" val="1"/>
+                  <adec:decorative xmlns:adec="http://schemas.microsoft.com/office/drawing/2017/decorative" val="1"/>
                 </a:ext>
               </a:extLst>
             </p:cNvPr>
@@ -12770,7 +12849,7 @@
             <p:nvPr>
               <p:extLst>
                 <p:ext uri="{386F3935-93C4-4BCD-93E2-E3B085C9AB24}">
-                  <p16:designElem xmlns:p16="http://schemas.microsoft.com/office/powerpoint/2015/main" xmlns="" val="1"/>
+                  <p16:designElem xmlns:p16="http://schemas.microsoft.com/office/powerpoint/2015/main" val="1"/>
                 </p:ext>
               </p:extLst>
             </p:nvPr>
@@ -12971,10 +13050,10 @@
             <p:cNvPr id="13" name="Freeform: Shape 21">
               <a:extLst>
                 <a:ext uri="{FF2B5EF4-FFF2-40B4-BE49-F238E27FC236}">
-                  <a16:creationId xmlns:a16="http://schemas.microsoft.com/office/drawing/2014/main" xmlns="" id="{DC2468D4-3664-2D33-9388-48C1EEA509C8}"/>
+                  <a16:creationId xmlns:a16="http://schemas.microsoft.com/office/drawing/2014/main" id="{DC2468D4-3664-2D33-9388-48C1EEA509C8}"/>
                 </a:ext>
                 <a:ext uri="{C183D7F6-B498-43B3-948B-1728B52AA6E4}">
-                  <adec:decorative xmlns:adec="http://schemas.microsoft.com/office/drawing/2017/decorative" xmlns="" val="1"/>
+                  <adec:decorative xmlns:adec="http://schemas.microsoft.com/office/drawing/2017/decorative" val="1"/>
                 </a:ext>
               </a:extLst>
             </p:cNvPr>
@@ -12982,7 +13061,7 @@
             <p:nvPr>
               <p:extLst>
                 <p:ext uri="{386F3935-93C4-4BCD-93E2-E3B085C9AB24}">
-                  <p16:designElem xmlns:p16="http://schemas.microsoft.com/office/powerpoint/2015/main" xmlns="" val="1"/>
+                  <p16:designElem xmlns:p16="http://schemas.microsoft.com/office/powerpoint/2015/main" val="1"/>
                 </p:ext>
               </p:extLst>
             </p:nvPr>
@@ -13183,10 +13262,10 @@
             <p:cNvPr id="14" name="Freeform: Shape 22">
               <a:extLst>
                 <a:ext uri="{FF2B5EF4-FFF2-40B4-BE49-F238E27FC236}">
-                  <a16:creationId xmlns:a16="http://schemas.microsoft.com/office/drawing/2014/main" xmlns="" id="{FD6F78CC-57EB-00F3-78A1-5BE0F030D69C}"/>
+                  <a16:creationId xmlns:a16="http://schemas.microsoft.com/office/drawing/2014/main" id="{FD6F78CC-57EB-00F3-78A1-5BE0F030D69C}"/>
                 </a:ext>
                 <a:ext uri="{C183D7F6-B498-43B3-948B-1728B52AA6E4}">
-                  <adec:decorative xmlns:adec="http://schemas.microsoft.com/office/drawing/2017/decorative" xmlns="" val="1"/>
+                  <adec:decorative xmlns:adec="http://schemas.microsoft.com/office/drawing/2017/decorative" val="1"/>
                 </a:ext>
               </a:extLst>
             </p:cNvPr>
@@ -13194,7 +13273,7 @@
             <p:nvPr>
               <p:extLst>
                 <p:ext uri="{386F3935-93C4-4BCD-93E2-E3B085C9AB24}">
-                  <p16:designElem xmlns:p16="http://schemas.microsoft.com/office/powerpoint/2015/main" xmlns="" val="1"/>
+                  <p16:designElem xmlns:p16="http://schemas.microsoft.com/office/powerpoint/2015/main" val="1"/>
                 </p:ext>
               </p:extLst>
             </p:nvPr>
@@ -13505,10 +13584,10 @@
             <p:cNvPr id="15" name="Freeform: Shape 23">
               <a:extLst>
                 <a:ext uri="{FF2B5EF4-FFF2-40B4-BE49-F238E27FC236}">
-                  <a16:creationId xmlns:a16="http://schemas.microsoft.com/office/drawing/2014/main" xmlns="" id="{24639984-D9DD-7D44-7846-ED71B4598025}"/>
+                  <a16:creationId xmlns:a16="http://schemas.microsoft.com/office/drawing/2014/main" id="{24639984-D9DD-7D44-7846-ED71B4598025}"/>
                 </a:ext>
                 <a:ext uri="{C183D7F6-B498-43B3-948B-1728B52AA6E4}">
-                  <adec:decorative xmlns:adec="http://schemas.microsoft.com/office/drawing/2017/decorative" xmlns="" val="1"/>
+                  <adec:decorative xmlns:adec="http://schemas.microsoft.com/office/drawing/2017/decorative" val="1"/>
                 </a:ext>
               </a:extLst>
             </p:cNvPr>
@@ -13516,7 +13595,7 @@
             <p:nvPr>
               <p:extLst>
                 <p:ext uri="{386F3935-93C4-4BCD-93E2-E3B085C9AB24}">
-                  <p16:designElem xmlns:p16="http://schemas.microsoft.com/office/powerpoint/2015/main" xmlns="" val="1"/>
+                  <p16:designElem xmlns:p16="http://schemas.microsoft.com/office/powerpoint/2015/main" val="1"/>
                 </p:ext>
               </p:extLst>
             </p:nvPr>
@@ -13984,7 +14063,7 @@
           <p:cNvPr id="16" name="Picture 15" descr="A close-up of a logo&#10;&#10;AI-generated content may be incorrect.">
             <a:extLst>
               <a:ext uri="{FF2B5EF4-FFF2-40B4-BE49-F238E27FC236}">
-                <a16:creationId xmlns:a16="http://schemas.microsoft.com/office/drawing/2014/main" xmlns="" id="{B6E4A9D6-5D70-4F8A-0423-C0154E804DC9}"/>
+                <a16:creationId xmlns:a16="http://schemas.microsoft.com/office/drawing/2014/main" id="{B6E4A9D6-5D70-4F8A-0423-C0154E804DC9}"/>
               </a:ext>
             </a:extLst>
           </p:cNvPr>
@@ -14020,7 +14099,7 @@
           <p:cNvPr id="17" name="Slide Number Placeholder 3">
             <a:extLst>
               <a:ext uri="{FF2B5EF4-FFF2-40B4-BE49-F238E27FC236}">
-                <a16:creationId xmlns:a16="http://schemas.microsoft.com/office/drawing/2014/main" xmlns="" id="{B48891F8-A067-286D-FFC5-F283B06FA60A}"/>
+                <a16:creationId xmlns:a16="http://schemas.microsoft.com/office/drawing/2014/main" id="{B48891F8-A067-286D-FFC5-F283B06FA60A}"/>
               </a:ext>
             </a:extLst>
           </p:cNvPr>
@@ -14163,10 +14242,10 @@
           <p:cNvPr id="18" name="Group 17">
             <a:extLst>
               <a:ext uri="{FF2B5EF4-FFF2-40B4-BE49-F238E27FC236}">
-                <a16:creationId xmlns:a16="http://schemas.microsoft.com/office/drawing/2014/main" xmlns="" id="{A87BD122-45D1-5D24-39BA-6BA0631D306F}"/>
+                <a16:creationId xmlns:a16="http://schemas.microsoft.com/office/drawing/2014/main" id="{A87BD122-45D1-5D24-39BA-6BA0631D306F}"/>
               </a:ext>
               <a:ext uri="{C183D7F6-B498-43B3-948B-1728B52AA6E4}">
-                <adec:decorative xmlns:adec="http://schemas.microsoft.com/office/drawing/2017/decorative" xmlns="" val="1"/>
+                <adec:decorative xmlns:adec="http://schemas.microsoft.com/office/drawing/2017/decorative" val="1"/>
               </a:ext>
             </a:extLst>
           </p:cNvPr>
@@ -14174,7 +14253,7 @@
           <p:nvPr>
             <p:extLst>
               <p:ext uri="{386F3935-93C4-4BCD-93E2-E3B085C9AB24}">
-                <p16:designElem xmlns:p16="http://schemas.microsoft.com/office/powerpoint/2015/main" xmlns="" val="1"/>
+                <p16:designElem xmlns:p16="http://schemas.microsoft.com/office/powerpoint/2015/main" val="1"/>
               </p:ext>
             </p:extLst>
           </p:nvPr>
@@ -14192,10 +14271,10 @@
             <p:cNvPr id="19" name="Freeform: Shape 26">
               <a:extLst>
                 <a:ext uri="{FF2B5EF4-FFF2-40B4-BE49-F238E27FC236}">
-                  <a16:creationId xmlns:a16="http://schemas.microsoft.com/office/drawing/2014/main" xmlns="" id="{A95D2445-22C7-5060-1017-16E390802BC2}"/>
+                  <a16:creationId xmlns:a16="http://schemas.microsoft.com/office/drawing/2014/main" id="{A95D2445-22C7-5060-1017-16E390802BC2}"/>
                 </a:ext>
                 <a:ext uri="{C183D7F6-B498-43B3-948B-1728B52AA6E4}">
-                  <adec:decorative xmlns:adec="http://schemas.microsoft.com/office/drawing/2017/decorative" xmlns="" val="1"/>
+                  <adec:decorative xmlns:adec="http://schemas.microsoft.com/office/drawing/2017/decorative" val="1"/>
                 </a:ext>
               </a:extLst>
             </p:cNvPr>
@@ -14203,7 +14282,7 @@
             <p:nvPr>
               <p:extLst>
                 <p:ext uri="{386F3935-93C4-4BCD-93E2-E3B085C9AB24}">
-                  <p16:designElem xmlns:p16="http://schemas.microsoft.com/office/powerpoint/2015/main" xmlns="" val="1"/>
+                  <p16:designElem xmlns:p16="http://schemas.microsoft.com/office/powerpoint/2015/main" val="1"/>
                 </p:ext>
               </p:extLst>
             </p:nvPr>
@@ -14590,10 +14669,10 @@
             <p:cNvPr id="20" name="Freeform: Shape 27">
               <a:extLst>
                 <a:ext uri="{FF2B5EF4-FFF2-40B4-BE49-F238E27FC236}">
-                  <a16:creationId xmlns:a16="http://schemas.microsoft.com/office/drawing/2014/main" xmlns="" id="{0492B89D-0873-485F-2316-F176A2096A11}"/>
+                  <a16:creationId xmlns:a16="http://schemas.microsoft.com/office/drawing/2014/main" id="{0492B89D-0873-485F-2316-F176A2096A11}"/>
                 </a:ext>
                 <a:ext uri="{C183D7F6-B498-43B3-948B-1728B52AA6E4}">
-                  <adec:decorative xmlns:adec="http://schemas.microsoft.com/office/drawing/2017/decorative" xmlns="" val="1"/>
+                  <adec:decorative xmlns:adec="http://schemas.microsoft.com/office/drawing/2017/decorative" val="1"/>
                 </a:ext>
               </a:extLst>
             </p:cNvPr>
@@ -14601,7 +14680,7 @@
             <p:nvPr>
               <p:extLst>
                 <p:ext uri="{386F3935-93C4-4BCD-93E2-E3B085C9AB24}">
-                  <p16:designElem xmlns:p16="http://schemas.microsoft.com/office/powerpoint/2015/main" xmlns="" val="1"/>
+                  <p16:designElem xmlns:p16="http://schemas.microsoft.com/office/powerpoint/2015/main" val="1"/>
                 </p:ext>
               </p:extLst>
             </p:nvPr>
@@ -14782,10 +14861,10 @@
             <p:cNvPr id="21" name="Freeform: Shape 28">
               <a:extLst>
                 <a:ext uri="{FF2B5EF4-FFF2-40B4-BE49-F238E27FC236}">
-                  <a16:creationId xmlns:a16="http://schemas.microsoft.com/office/drawing/2014/main" xmlns="" id="{229C523E-42B0-8B62-1C8A-756271BADC84}"/>
+                  <a16:creationId xmlns:a16="http://schemas.microsoft.com/office/drawing/2014/main" id="{229C523E-42B0-8B62-1C8A-756271BADC84}"/>
                 </a:ext>
                 <a:ext uri="{C183D7F6-B498-43B3-948B-1728B52AA6E4}">
-                  <adec:decorative xmlns:adec="http://schemas.microsoft.com/office/drawing/2017/decorative" xmlns="" val="1"/>
+                  <adec:decorative xmlns:adec="http://schemas.microsoft.com/office/drawing/2017/decorative" val="1"/>
                 </a:ext>
               </a:extLst>
             </p:cNvPr>
@@ -14793,7 +14872,7 @@
             <p:nvPr>
               <p:extLst>
                 <p:ext uri="{386F3935-93C4-4BCD-93E2-E3B085C9AB24}">
-                  <p16:designElem xmlns:p16="http://schemas.microsoft.com/office/powerpoint/2015/main" xmlns="" val="1"/>
+                  <p16:designElem xmlns:p16="http://schemas.microsoft.com/office/powerpoint/2015/main" val="1"/>
                 </p:ext>
               </p:extLst>
             </p:nvPr>
@@ -15036,10 +15115,10 @@
             <p:cNvPr id="22" name="Freeform: Shape 29">
               <a:extLst>
                 <a:ext uri="{FF2B5EF4-FFF2-40B4-BE49-F238E27FC236}">
-                  <a16:creationId xmlns:a16="http://schemas.microsoft.com/office/drawing/2014/main" xmlns="" id="{C36ADEC2-9229-4261-1704-0441B691B581}"/>
+                  <a16:creationId xmlns:a16="http://schemas.microsoft.com/office/drawing/2014/main" id="{C36ADEC2-9229-4261-1704-0441B691B581}"/>
                 </a:ext>
                 <a:ext uri="{C183D7F6-B498-43B3-948B-1728B52AA6E4}">
-                  <adec:decorative xmlns:adec="http://schemas.microsoft.com/office/drawing/2017/decorative" xmlns="" val="1"/>
+                  <adec:decorative xmlns:adec="http://schemas.microsoft.com/office/drawing/2017/decorative" val="1"/>
                 </a:ext>
               </a:extLst>
             </p:cNvPr>
@@ -15047,7 +15126,7 @@
             <p:nvPr>
               <p:extLst>
                 <p:ext uri="{386F3935-93C4-4BCD-93E2-E3B085C9AB24}">
-                  <p16:designElem xmlns:p16="http://schemas.microsoft.com/office/powerpoint/2015/main" xmlns="" val="1"/>
+                  <p16:designElem xmlns:p16="http://schemas.microsoft.com/office/powerpoint/2015/main" val="1"/>
                 </p:ext>
               </p:extLst>
             </p:nvPr>
@@ -15229,7 +15308,7 @@
           <p:cNvPr id="23" name="Picture 22" descr="A hands holding a light bulb&#10;&#10;AI-generated content may be incorrect.">
             <a:extLst>
               <a:ext uri="{FF2B5EF4-FFF2-40B4-BE49-F238E27FC236}">
-                <a16:creationId xmlns:a16="http://schemas.microsoft.com/office/drawing/2014/main" xmlns="" id="{2ADC4BFE-1AB8-DA1A-99B3-25B4C716E120}"/>
+                <a16:creationId xmlns:a16="http://schemas.microsoft.com/office/drawing/2014/main" id="{2ADC4BFE-1AB8-DA1A-99B3-25B4C716E120}"/>
               </a:ext>
             </a:extLst>
           </p:cNvPr>
@@ -15268,8 +15347,8 @@
         </p:nvSpPr>
         <p:spPr>
           <a:xfrm>
-            <a:off x="1200000" y="1250000"/>
-            <a:ext cx="2800000" cy="300000"/>
+            <a:off x="4259999" y="1173620"/>
+            <a:ext cx="4062867" cy="461665"/>
           </a:xfrm>
           <a:prstGeom prst="rect">
             <a:avLst/>
@@ -15290,6 +15369,7 @@
               </a:defRPr>
             </a:pPr>
             <a:r>
+              <a:rPr sz="2400" dirty="0"/>
               <a:t>Interview Flow Chart</a:t>
             </a:r>
           </a:p>
@@ -15303,8 +15383,8 @@
         </p:nvSpPr>
         <p:spPr>
           <a:xfrm>
-            <a:off x="1180000" y="3150000"/>
-            <a:ext cx="9300000" cy="1400000"/>
+            <a:off x="1225321" y="3530724"/>
+            <a:ext cx="9300000" cy="1200329"/>
           </a:xfrm>
           <a:prstGeom prst="rect">
             <a:avLst/>
@@ -15325,6 +15405,7 @@
               </a:defRPr>
             </a:pPr>
             <a:r>
+              <a:rPr sz="2400" dirty="0"/>
               <a:t>Solution Summary: The platform lets recruiters train an AI avatar, build question sets, send interview links, record candidate answers, and automatically generate evaluation-ready results.</a:t>
             </a:r>
           </a:p>
@@ -15424,6 +15505,7 @@
           <a:lstStyle/>
           <a:p>
             <a:pPr algn="ctr"/>
+            <a:endParaRPr/>
           </a:p>
         </p:txBody>
       </p:sp>
@@ -15521,6 +15603,7 @@
           <a:lstStyle/>
           <a:p>
             <a:pPr algn="ctr"/>
+            <a:endParaRPr/>
           </a:p>
         </p:txBody>
       </p:sp>
@@ -15618,6 +15701,7 @@
           <a:lstStyle/>
           <a:p>
             <a:pPr algn="ctr"/>
+            <a:endParaRPr/>
           </a:p>
         </p:txBody>
       </p:sp>
@@ -15715,6 +15799,7 @@
           <a:lstStyle/>
           <a:p>
             <a:pPr algn="ctr"/>
+            <a:endParaRPr/>
           </a:p>
         </p:txBody>
       </p:sp>
@@ -15812,6 +15897,7 @@
           <a:lstStyle/>
           <a:p>
             <a:pPr algn="ctr"/>
+            <a:endParaRPr/>
           </a:p>
         </p:txBody>
       </p:sp>
@@ -15909,6 +15995,7 @@
           <a:lstStyle/>
           <a:p>
             <a:pPr algn="ctr"/>
+            <a:endParaRPr/>
           </a:p>
         </p:txBody>
       </p:sp>
@@ -15985,7 +16072,7 @@
         <p:cNvPr id="1" name="">
           <a:extLst>
             <a:ext uri="{FF2B5EF4-FFF2-40B4-BE49-F238E27FC236}">
-              <a16:creationId xmlns:a16="http://schemas.microsoft.com/office/drawing/2014/main" xmlns="" id="{8EB6D30F-10BD-514E-7C2C-CABF8E09118D}"/>
+              <a16:creationId xmlns:a16="http://schemas.microsoft.com/office/drawing/2014/main" id="{8EB6D30F-10BD-514E-7C2C-CABF8E09118D}"/>
             </a:ext>
           </a:extLst>
         </p:cNvPr>
@@ -16005,7 +16092,7 @@
           <p:cNvPr id="2" name="Title 1">
             <a:extLst>
               <a:ext uri="{FF2B5EF4-FFF2-40B4-BE49-F238E27FC236}">
-                <a16:creationId xmlns:a16="http://schemas.microsoft.com/office/drawing/2014/main" xmlns="" id="{1C30D5E0-65C4-2D79-C240-6F35388CF881}"/>
+                <a16:creationId xmlns:a16="http://schemas.microsoft.com/office/drawing/2014/main" id="{1C30D5E0-65C4-2D79-C240-6F35388CF881}"/>
               </a:ext>
             </a:extLst>
           </p:cNvPr>
@@ -16033,7 +16120,7 @@
           <p:cNvPr id="4" name="Slide Number Placeholder 3">
             <a:extLst>
               <a:ext uri="{FF2B5EF4-FFF2-40B4-BE49-F238E27FC236}">
-                <a16:creationId xmlns:a16="http://schemas.microsoft.com/office/drawing/2014/main" xmlns="" id="{7294B8DF-4E89-6DB0-A717-08CB3CADCDB6}"/>
+                <a16:creationId xmlns:a16="http://schemas.microsoft.com/office/drawing/2014/main" id="{7294B8DF-4E89-6DB0-A717-08CB3CADCDB6}"/>
               </a:ext>
             </a:extLst>
           </p:cNvPr>
@@ -16062,7 +16149,7 @@
           <p:cNvPr id="5" name="Picture 2" descr="Sharda University Logo &amp; Brand Assets (SVG, PNG and vector ...">
             <a:extLst>
               <a:ext uri="{FF2B5EF4-FFF2-40B4-BE49-F238E27FC236}">
-                <a16:creationId xmlns:a16="http://schemas.microsoft.com/office/drawing/2014/main" xmlns="" id="{8B5C77F5-55DB-01EC-2CEB-E7D2570000E5}"/>
+                <a16:creationId xmlns:a16="http://schemas.microsoft.com/office/drawing/2014/main" id="{8B5C77F5-55DB-01EC-2CEB-E7D2570000E5}"/>
               </a:ext>
             </a:extLst>
           </p:cNvPr>
@@ -16109,7 +16196,7 @@
           <p:cNvPr id="3" name="Title 1">
             <a:extLst>
               <a:ext uri="{FF2B5EF4-FFF2-40B4-BE49-F238E27FC236}">
-                <a16:creationId xmlns:a16="http://schemas.microsoft.com/office/drawing/2014/main" xmlns="" id="{156B15E6-66C7-8C8F-55E9-2270E947AB34}"/>
+                <a16:creationId xmlns:a16="http://schemas.microsoft.com/office/drawing/2014/main" id="{156B15E6-66C7-8C8F-55E9-2270E947AB34}"/>
               </a:ext>
             </a:extLst>
           </p:cNvPr>
@@ -16164,7 +16251,7 @@
           <p:cNvPr id="6" name="Slide Number Placeholder 3">
             <a:extLst>
               <a:ext uri="{FF2B5EF4-FFF2-40B4-BE49-F238E27FC236}">
-                <a16:creationId xmlns:a16="http://schemas.microsoft.com/office/drawing/2014/main" xmlns="" id="{446C2E2F-CC94-B1E1-450B-FEC3325BA650}"/>
+                <a16:creationId xmlns:a16="http://schemas.microsoft.com/office/drawing/2014/main" id="{446C2E2F-CC94-B1E1-450B-FEC3325BA650}"/>
               </a:ext>
             </a:extLst>
           </p:cNvPr>
@@ -16300,7 +16387,7 @@
           <p:cNvPr id="7" name="Picture 2" descr="Sharda University Logo &amp; Brand Assets (SVG, PNG and vector ...">
             <a:extLst>
               <a:ext uri="{FF2B5EF4-FFF2-40B4-BE49-F238E27FC236}">
-                <a16:creationId xmlns:a16="http://schemas.microsoft.com/office/drawing/2014/main" xmlns="" id="{54B53E9A-85E5-FD12-E25C-7D74D0CCB73C}"/>
+                <a16:creationId xmlns:a16="http://schemas.microsoft.com/office/drawing/2014/main" id="{54B53E9A-85E5-FD12-E25C-7D74D0CCB73C}"/>
               </a:ext>
             </a:extLst>
           </p:cNvPr>
@@ -16347,10 +16434,10 @@
           <p:cNvPr id="8" name="Rectangle 7">
             <a:extLst>
               <a:ext uri="{FF2B5EF4-FFF2-40B4-BE49-F238E27FC236}">
-                <a16:creationId xmlns:a16="http://schemas.microsoft.com/office/drawing/2014/main" xmlns="" id="{847E2899-E97A-85D0-444F-D069DC5C0791}"/>
+                <a16:creationId xmlns:a16="http://schemas.microsoft.com/office/drawing/2014/main" id="{847E2899-E97A-85D0-444F-D069DC5C0791}"/>
               </a:ext>
               <a:ext uri="{C183D7F6-B498-43B3-948B-1728B52AA6E4}">
-                <adec:decorative xmlns:adec="http://schemas.microsoft.com/office/drawing/2017/decorative" xmlns="" val="1"/>
+                <adec:decorative xmlns:adec="http://schemas.microsoft.com/office/drawing/2017/decorative" val="1"/>
               </a:ext>
             </a:extLst>
           </p:cNvPr>
@@ -16358,7 +16445,7 @@
           <p:nvPr>
             <p:extLst>
               <p:ext uri="{386F3935-93C4-4BCD-93E2-E3B085C9AB24}">
-                <p16:designElem xmlns:p16="http://schemas.microsoft.com/office/powerpoint/2015/main" xmlns="" val="1"/>
+                <p16:designElem xmlns:p16="http://schemas.microsoft.com/office/powerpoint/2015/main" val="1"/>
               </p:ext>
             </p:extLst>
           </p:nvPr>
@@ -16405,10 +16492,10 @@
           <p:cNvPr id="9" name="Rectangle 8">
             <a:extLst>
               <a:ext uri="{FF2B5EF4-FFF2-40B4-BE49-F238E27FC236}">
-                <a16:creationId xmlns:a16="http://schemas.microsoft.com/office/drawing/2014/main" xmlns="" id="{8D98DAE5-57C9-1062-38D4-F5D8E259205E}"/>
+                <a16:creationId xmlns:a16="http://schemas.microsoft.com/office/drawing/2014/main" id="{8D98DAE5-57C9-1062-38D4-F5D8E259205E}"/>
               </a:ext>
               <a:ext uri="{C183D7F6-B498-43B3-948B-1728B52AA6E4}">
-                <adec:decorative xmlns:adec="http://schemas.microsoft.com/office/drawing/2017/decorative" xmlns="" val="1"/>
+                <adec:decorative xmlns:adec="http://schemas.microsoft.com/office/drawing/2017/decorative" val="1"/>
               </a:ext>
             </a:extLst>
           </p:cNvPr>
@@ -16416,7 +16503,7 @@
           <p:nvPr>
             <p:extLst>
               <p:ext uri="{386F3935-93C4-4BCD-93E2-E3B085C9AB24}">
-                <p16:designElem xmlns:p16="http://schemas.microsoft.com/office/powerpoint/2015/main" xmlns="" val="1"/>
+                <p16:designElem xmlns:p16="http://schemas.microsoft.com/office/powerpoint/2015/main" val="1"/>
               </p:ext>
             </p:extLst>
           </p:nvPr>
@@ -16466,7 +16553,7 @@
           <p:cNvPr id="10" name="TextBox 9">
             <a:extLst>
               <a:ext uri="{FF2B5EF4-FFF2-40B4-BE49-F238E27FC236}">
-                <a16:creationId xmlns:a16="http://schemas.microsoft.com/office/drawing/2014/main" xmlns="" id="{92604CEB-AD09-ADB6-0862-0ADFFB82A844}"/>
+                <a16:creationId xmlns:a16="http://schemas.microsoft.com/office/drawing/2014/main" id="{92604CEB-AD09-ADB6-0862-0ADFFB82A844}"/>
               </a:ext>
             </a:extLst>
           </p:cNvPr>
@@ -16519,10 +16606,10 @@
           <p:cNvPr id="11" name="Group 10">
             <a:extLst>
               <a:ext uri="{FF2B5EF4-FFF2-40B4-BE49-F238E27FC236}">
-                <a16:creationId xmlns:a16="http://schemas.microsoft.com/office/drawing/2014/main" xmlns="" id="{B7ADCBCC-8F45-37BD-DEE5-29084AD9D4DC}"/>
+                <a16:creationId xmlns:a16="http://schemas.microsoft.com/office/drawing/2014/main" id="{B7ADCBCC-8F45-37BD-DEE5-29084AD9D4DC}"/>
               </a:ext>
               <a:ext uri="{C183D7F6-B498-43B3-948B-1728B52AA6E4}">
-                <adec:decorative xmlns:adec="http://schemas.microsoft.com/office/drawing/2017/decorative" xmlns="" val="1"/>
+                <adec:decorative xmlns:adec="http://schemas.microsoft.com/office/drawing/2017/decorative" val="1"/>
               </a:ext>
             </a:extLst>
           </p:cNvPr>
@@ -16530,7 +16617,7 @@
           <p:nvPr>
             <p:extLst>
               <p:ext uri="{386F3935-93C4-4BCD-93E2-E3B085C9AB24}">
-                <p16:designElem xmlns:p16="http://schemas.microsoft.com/office/powerpoint/2015/main" xmlns="" val="1"/>
+                <p16:designElem xmlns:p16="http://schemas.microsoft.com/office/powerpoint/2015/main" val="1"/>
               </p:ext>
             </p:extLst>
           </p:nvPr>
@@ -16548,10 +16635,10 @@
             <p:cNvPr id="12" name="Freeform: Shape 20">
               <a:extLst>
                 <a:ext uri="{FF2B5EF4-FFF2-40B4-BE49-F238E27FC236}">
-                  <a16:creationId xmlns:a16="http://schemas.microsoft.com/office/drawing/2014/main" xmlns="" id="{AABF1DC9-A94A-61AB-5C74-C79B5CA9084A}"/>
+                  <a16:creationId xmlns:a16="http://schemas.microsoft.com/office/drawing/2014/main" id="{AABF1DC9-A94A-61AB-5C74-C79B5CA9084A}"/>
                 </a:ext>
                 <a:ext uri="{C183D7F6-B498-43B3-948B-1728B52AA6E4}">
-                  <adec:decorative xmlns:adec="http://schemas.microsoft.com/office/drawing/2017/decorative" xmlns="" val="1"/>
+                  <adec:decorative xmlns:adec="http://schemas.microsoft.com/office/drawing/2017/decorative" val="1"/>
                 </a:ext>
               </a:extLst>
             </p:cNvPr>
@@ -16559,7 +16646,7 @@
             <p:nvPr>
               <p:extLst>
                 <p:ext uri="{386F3935-93C4-4BCD-93E2-E3B085C9AB24}">
-                  <p16:designElem xmlns:p16="http://schemas.microsoft.com/office/powerpoint/2015/main" xmlns="" val="1"/>
+                  <p16:designElem xmlns:p16="http://schemas.microsoft.com/office/powerpoint/2015/main" val="1"/>
                 </p:ext>
               </p:extLst>
             </p:nvPr>
@@ -16760,10 +16847,10 @@
             <p:cNvPr id="13" name="Freeform: Shape 21">
               <a:extLst>
                 <a:ext uri="{FF2B5EF4-FFF2-40B4-BE49-F238E27FC236}">
-                  <a16:creationId xmlns:a16="http://schemas.microsoft.com/office/drawing/2014/main" xmlns="" id="{A03C9544-ED11-2412-FD24-285C67687ED2}"/>
+                  <a16:creationId xmlns:a16="http://schemas.microsoft.com/office/drawing/2014/main" id="{A03C9544-ED11-2412-FD24-285C67687ED2}"/>
                 </a:ext>
                 <a:ext uri="{C183D7F6-B498-43B3-948B-1728B52AA6E4}">
-                  <adec:decorative xmlns:adec="http://schemas.microsoft.com/office/drawing/2017/decorative" xmlns="" val="1"/>
+                  <adec:decorative xmlns:adec="http://schemas.microsoft.com/office/drawing/2017/decorative" val="1"/>
                 </a:ext>
               </a:extLst>
             </p:cNvPr>
@@ -16771,7 +16858,7 @@
             <p:nvPr>
               <p:extLst>
                 <p:ext uri="{386F3935-93C4-4BCD-93E2-E3B085C9AB24}">
-                  <p16:designElem xmlns:p16="http://schemas.microsoft.com/office/powerpoint/2015/main" xmlns="" val="1"/>
+                  <p16:designElem xmlns:p16="http://schemas.microsoft.com/office/powerpoint/2015/main" val="1"/>
                 </p:ext>
               </p:extLst>
             </p:nvPr>
@@ -16972,10 +17059,10 @@
             <p:cNvPr id="14" name="Freeform: Shape 22">
               <a:extLst>
                 <a:ext uri="{FF2B5EF4-FFF2-40B4-BE49-F238E27FC236}">
-                  <a16:creationId xmlns:a16="http://schemas.microsoft.com/office/drawing/2014/main" xmlns="" id="{5EDEE767-488B-1174-0772-46A5D123F4A0}"/>
+                  <a16:creationId xmlns:a16="http://schemas.microsoft.com/office/drawing/2014/main" id="{5EDEE767-488B-1174-0772-46A5D123F4A0}"/>
                 </a:ext>
                 <a:ext uri="{C183D7F6-B498-43B3-948B-1728B52AA6E4}">
-                  <adec:decorative xmlns:adec="http://schemas.microsoft.com/office/drawing/2017/decorative" xmlns="" val="1"/>
+                  <adec:decorative xmlns:adec="http://schemas.microsoft.com/office/drawing/2017/decorative" val="1"/>
                 </a:ext>
               </a:extLst>
             </p:cNvPr>
@@ -16983,7 +17070,7 @@
             <p:nvPr>
               <p:extLst>
                 <p:ext uri="{386F3935-93C4-4BCD-93E2-E3B085C9AB24}">
-                  <p16:designElem xmlns:p16="http://schemas.microsoft.com/office/powerpoint/2015/main" xmlns="" val="1"/>
+                  <p16:designElem xmlns:p16="http://schemas.microsoft.com/office/powerpoint/2015/main" val="1"/>
                 </p:ext>
               </p:extLst>
             </p:nvPr>
@@ -17294,10 +17381,10 @@
             <p:cNvPr id="15" name="Freeform: Shape 23">
               <a:extLst>
                 <a:ext uri="{FF2B5EF4-FFF2-40B4-BE49-F238E27FC236}">
-                  <a16:creationId xmlns:a16="http://schemas.microsoft.com/office/drawing/2014/main" xmlns="" id="{C4ECB3AC-B40D-3ED9-C7E7-76A4D0B6FCBB}"/>
+                  <a16:creationId xmlns:a16="http://schemas.microsoft.com/office/drawing/2014/main" id="{C4ECB3AC-B40D-3ED9-C7E7-76A4D0B6FCBB}"/>
                 </a:ext>
                 <a:ext uri="{C183D7F6-B498-43B3-948B-1728B52AA6E4}">
-                  <adec:decorative xmlns:adec="http://schemas.microsoft.com/office/drawing/2017/decorative" xmlns="" val="1"/>
+                  <adec:decorative xmlns:adec="http://schemas.microsoft.com/office/drawing/2017/decorative" val="1"/>
                 </a:ext>
               </a:extLst>
             </p:cNvPr>
@@ -17305,7 +17392,7 @@
             <p:nvPr>
               <p:extLst>
                 <p:ext uri="{386F3935-93C4-4BCD-93E2-E3B085C9AB24}">
-                  <p16:designElem xmlns:p16="http://schemas.microsoft.com/office/powerpoint/2015/main" xmlns="" val="1"/>
+                  <p16:designElem xmlns:p16="http://schemas.microsoft.com/office/powerpoint/2015/main" val="1"/>
                 </p:ext>
               </p:extLst>
             </p:nvPr>
@@ -17773,7 +17860,7 @@
           <p:cNvPr id="16" name="Picture 15" descr="A close-up of a logo&#10;&#10;AI-generated content may be incorrect.">
             <a:extLst>
               <a:ext uri="{FF2B5EF4-FFF2-40B4-BE49-F238E27FC236}">
-                <a16:creationId xmlns:a16="http://schemas.microsoft.com/office/drawing/2014/main" xmlns="" id="{A0DA2E88-67C5-2FCA-3DE1-4F730134BDBE}"/>
+                <a16:creationId xmlns:a16="http://schemas.microsoft.com/office/drawing/2014/main" id="{A0DA2E88-67C5-2FCA-3DE1-4F730134BDBE}"/>
               </a:ext>
             </a:extLst>
           </p:cNvPr>
@@ -17809,7 +17896,7 @@
           <p:cNvPr id="17" name="Slide Number Placeholder 3">
             <a:extLst>
               <a:ext uri="{FF2B5EF4-FFF2-40B4-BE49-F238E27FC236}">
-                <a16:creationId xmlns:a16="http://schemas.microsoft.com/office/drawing/2014/main" xmlns="" id="{37511144-1C96-849F-67EF-9F96E909845E}"/>
+                <a16:creationId xmlns:a16="http://schemas.microsoft.com/office/drawing/2014/main" id="{37511144-1C96-849F-67EF-9F96E909845E}"/>
               </a:ext>
             </a:extLst>
           </p:cNvPr>
@@ -17952,10 +18039,10 @@
           <p:cNvPr id="18" name="Group 17">
             <a:extLst>
               <a:ext uri="{FF2B5EF4-FFF2-40B4-BE49-F238E27FC236}">
-                <a16:creationId xmlns:a16="http://schemas.microsoft.com/office/drawing/2014/main" xmlns="" id="{F3FD04D1-E8CD-C58A-C032-845D9E8DC2B2}"/>
+                <a16:creationId xmlns:a16="http://schemas.microsoft.com/office/drawing/2014/main" id="{F3FD04D1-E8CD-C58A-C032-845D9E8DC2B2}"/>
               </a:ext>
               <a:ext uri="{C183D7F6-B498-43B3-948B-1728B52AA6E4}">
-                <adec:decorative xmlns:adec="http://schemas.microsoft.com/office/drawing/2017/decorative" xmlns="" val="1"/>
+                <adec:decorative xmlns:adec="http://schemas.microsoft.com/office/drawing/2017/decorative" val="1"/>
               </a:ext>
             </a:extLst>
           </p:cNvPr>
@@ -17963,7 +18050,7 @@
           <p:nvPr>
             <p:extLst>
               <p:ext uri="{386F3935-93C4-4BCD-93E2-E3B085C9AB24}">
-                <p16:designElem xmlns:p16="http://schemas.microsoft.com/office/powerpoint/2015/main" xmlns="" val="1"/>
+                <p16:designElem xmlns:p16="http://schemas.microsoft.com/office/powerpoint/2015/main" val="1"/>
               </p:ext>
             </p:extLst>
           </p:nvPr>
@@ -17981,10 +18068,10 @@
             <p:cNvPr id="19" name="Freeform: Shape 26">
               <a:extLst>
                 <a:ext uri="{FF2B5EF4-FFF2-40B4-BE49-F238E27FC236}">
-                  <a16:creationId xmlns:a16="http://schemas.microsoft.com/office/drawing/2014/main" xmlns="" id="{8F56B301-92D9-0147-A14C-E6A5F95B5639}"/>
+                  <a16:creationId xmlns:a16="http://schemas.microsoft.com/office/drawing/2014/main" id="{8F56B301-92D9-0147-A14C-E6A5F95B5639}"/>
                 </a:ext>
                 <a:ext uri="{C183D7F6-B498-43B3-948B-1728B52AA6E4}">
-                  <adec:decorative xmlns:adec="http://schemas.microsoft.com/office/drawing/2017/decorative" xmlns="" val="1"/>
+                  <adec:decorative xmlns:adec="http://schemas.microsoft.com/office/drawing/2017/decorative" val="1"/>
                 </a:ext>
               </a:extLst>
             </p:cNvPr>
@@ -17992,7 +18079,7 @@
             <p:nvPr>
               <p:extLst>
                 <p:ext uri="{386F3935-93C4-4BCD-93E2-E3B085C9AB24}">
-                  <p16:designElem xmlns:p16="http://schemas.microsoft.com/office/powerpoint/2015/main" xmlns="" val="1"/>
+                  <p16:designElem xmlns:p16="http://schemas.microsoft.com/office/powerpoint/2015/main" val="1"/>
                 </p:ext>
               </p:extLst>
             </p:nvPr>
@@ -18379,10 +18466,10 @@
             <p:cNvPr id="20" name="Freeform: Shape 27">
               <a:extLst>
                 <a:ext uri="{FF2B5EF4-FFF2-40B4-BE49-F238E27FC236}">
-                  <a16:creationId xmlns:a16="http://schemas.microsoft.com/office/drawing/2014/main" xmlns="" id="{F63F0C9E-F01D-E8A5-E3D2-6E57765F185C}"/>
+                  <a16:creationId xmlns:a16="http://schemas.microsoft.com/office/drawing/2014/main" id="{F63F0C9E-F01D-E8A5-E3D2-6E57765F185C}"/>
                 </a:ext>
                 <a:ext uri="{C183D7F6-B498-43B3-948B-1728B52AA6E4}">
-                  <adec:decorative xmlns:adec="http://schemas.microsoft.com/office/drawing/2017/decorative" xmlns="" val="1"/>
+                  <adec:decorative xmlns:adec="http://schemas.microsoft.com/office/drawing/2017/decorative" val="1"/>
                 </a:ext>
               </a:extLst>
             </p:cNvPr>
@@ -18390,7 +18477,7 @@
             <p:nvPr>
               <p:extLst>
                 <p:ext uri="{386F3935-93C4-4BCD-93E2-E3B085C9AB24}">
-                  <p16:designElem xmlns:p16="http://schemas.microsoft.com/office/powerpoint/2015/main" xmlns="" val="1"/>
+                  <p16:designElem xmlns:p16="http://schemas.microsoft.com/office/powerpoint/2015/main" val="1"/>
                 </p:ext>
               </p:extLst>
             </p:nvPr>
@@ -18571,10 +18658,10 @@
             <p:cNvPr id="21" name="Freeform: Shape 28">
               <a:extLst>
                 <a:ext uri="{FF2B5EF4-FFF2-40B4-BE49-F238E27FC236}">
-                  <a16:creationId xmlns:a16="http://schemas.microsoft.com/office/drawing/2014/main" xmlns="" id="{4A8062F2-6D93-3D81-617D-BAD884637368}"/>
+                  <a16:creationId xmlns:a16="http://schemas.microsoft.com/office/drawing/2014/main" id="{4A8062F2-6D93-3D81-617D-BAD884637368}"/>
                 </a:ext>
                 <a:ext uri="{C183D7F6-B498-43B3-948B-1728B52AA6E4}">
-                  <adec:decorative xmlns:adec="http://schemas.microsoft.com/office/drawing/2017/decorative" xmlns="" val="1"/>
+                  <adec:decorative xmlns:adec="http://schemas.microsoft.com/office/drawing/2017/decorative" val="1"/>
                 </a:ext>
               </a:extLst>
             </p:cNvPr>
@@ -18582,7 +18669,7 @@
             <p:nvPr>
               <p:extLst>
                 <p:ext uri="{386F3935-93C4-4BCD-93E2-E3B085C9AB24}">
-                  <p16:designElem xmlns:p16="http://schemas.microsoft.com/office/powerpoint/2015/main" xmlns="" val="1"/>
+                  <p16:designElem xmlns:p16="http://schemas.microsoft.com/office/powerpoint/2015/main" val="1"/>
                 </p:ext>
               </p:extLst>
             </p:nvPr>
@@ -18825,10 +18912,10 @@
             <p:cNvPr id="22" name="Freeform: Shape 29">
               <a:extLst>
                 <a:ext uri="{FF2B5EF4-FFF2-40B4-BE49-F238E27FC236}">
-                  <a16:creationId xmlns:a16="http://schemas.microsoft.com/office/drawing/2014/main" xmlns="" id="{A7400B5D-5F6F-9D51-3A29-BE50D9A103F2}"/>
+                  <a16:creationId xmlns:a16="http://schemas.microsoft.com/office/drawing/2014/main" id="{A7400B5D-5F6F-9D51-3A29-BE50D9A103F2}"/>
                 </a:ext>
                 <a:ext uri="{C183D7F6-B498-43B3-948B-1728B52AA6E4}">
-                  <adec:decorative xmlns:adec="http://schemas.microsoft.com/office/drawing/2017/decorative" xmlns="" val="1"/>
+                  <adec:decorative xmlns:adec="http://schemas.microsoft.com/office/drawing/2017/decorative" val="1"/>
                 </a:ext>
               </a:extLst>
             </p:cNvPr>
@@ -18836,7 +18923,7 @@
             <p:nvPr>
               <p:extLst>
                 <p:ext uri="{386F3935-93C4-4BCD-93E2-E3B085C9AB24}">
-                  <p16:designElem xmlns:p16="http://schemas.microsoft.com/office/powerpoint/2015/main" xmlns="" val="1"/>
+                  <p16:designElem xmlns:p16="http://schemas.microsoft.com/office/powerpoint/2015/main" val="1"/>
                 </p:ext>
               </p:extLst>
             </p:nvPr>
@@ -19018,7 +19105,7 @@
           <p:cNvPr id="23" name="Picture 22" descr="A hands holding a light bulb&#10;&#10;AI-generated content may be incorrect.">
             <a:extLst>
               <a:ext uri="{FF2B5EF4-FFF2-40B4-BE49-F238E27FC236}">
-                <a16:creationId xmlns:a16="http://schemas.microsoft.com/office/drawing/2014/main" xmlns="" id="{2EE08080-4909-1A84-D501-9A12BB0A0C58}"/>
+                <a16:creationId xmlns:a16="http://schemas.microsoft.com/office/drawing/2014/main" id="{2EE08080-4909-1A84-D501-9A12BB0A0C58}"/>
               </a:ext>
             </a:extLst>
           </p:cNvPr>
@@ -19057,8 +19144,8 @@
         </p:nvSpPr>
         <p:spPr>
           <a:xfrm>
-            <a:off x="1180000" y="1300000"/>
-            <a:ext cx="3400000" cy="320000"/>
+            <a:off x="4100052" y="1229023"/>
+            <a:ext cx="3165987" cy="461665"/>
           </a:xfrm>
           <a:prstGeom prst="rect">
             <a:avLst/>
@@ -19079,6 +19166,7 @@
               </a:defRPr>
             </a:pPr>
             <a:r>
+              <a:rPr sz="2400" dirty="0"/>
               <a:t>Core Algorithms Used</a:t>
             </a:r>
           </a:p>
@@ -19093,7 +19181,7 @@
         <p:spPr>
           <a:xfrm>
             <a:off x="1180000" y="1700000"/>
-            <a:ext cx="9300000" cy="2200000"/>
+            <a:ext cx="9300000" cy="3785652"/>
           </a:xfrm>
           <a:prstGeom prst="rect">
             <a:avLst/>
@@ -19114,26 +19202,31 @@
               </a:defRPr>
             </a:pPr>
             <a:r>
+              <a:rPr sz="2400" dirty="0"/>
               <a:t>1. Keyword Matching Algorithm: compares answer text with expected role keywords.</a:t>
             </a:r>
           </a:p>
           <a:p>
             <a:r>
+              <a:rPr sz="2400" dirty="0"/>
               <a:t>2. Relevance Scoring Algorithm: measures overlap between question terms and candidate response.</a:t>
             </a:r>
           </a:p>
           <a:p>
             <a:r>
+              <a:rPr sz="2400" dirty="0"/>
               <a:t>3. Confidence Scoring Algorithm: evaluates confidence phrases and response length.</a:t>
             </a:r>
           </a:p>
           <a:p>
             <a:r>
+              <a:rPr sz="2400" dirty="0"/>
               <a:t>4. Weighted Overall Score Algorithm: combines relevance, accuracy, confidence, and keyword score.</a:t>
             </a:r>
           </a:p>
           <a:p>
             <a:r>
+              <a:rPr sz="2400" dirty="0"/>
               <a:t>5. Candidate Ranking Algorithm: sorts candidates by overall score for recruiter review.</a:t>
             </a:r>
           </a:p>
@@ -19147,8 +19240,8 @@
         </p:nvSpPr>
         <p:spPr>
           <a:xfrm>
-            <a:off x="1180000" y="4250000"/>
-            <a:ext cx="9300000" cy="1000000"/>
+            <a:off x="1116220" y="5370572"/>
+            <a:ext cx="9300000" cy="1200329"/>
           </a:xfrm>
           <a:prstGeom prst="rect">
             <a:avLst/>
@@ -19169,6 +19262,7 @@
               </a:defRPr>
             </a:pPr>
             <a:r>
+              <a:rPr sz="2400" b="1" dirty="0"/>
               <a:t>Uniqueness: the system joins avatar-led interviewing, response recording, live transcription, and rule-based AI scoring in one workflow instead of separate HR tools.</a:t>
             </a:r>
           </a:p>
@@ -19195,7 +19289,7 @@
         <p:cNvPr id="1" name="">
           <a:extLst>
             <a:ext uri="{FF2B5EF4-FFF2-40B4-BE49-F238E27FC236}">
-              <a16:creationId xmlns:a16="http://schemas.microsoft.com/office/drawing/2014/main" xmlns="" id="{BF338FB9-46E2-C60C-92BF-22CDB5C9F462}"/>
+              <a16:creationId xmlns:a16="http://schemas.microsoft.com/office/drawing/2014/main" id="{BF338FB9-46E2-C60C-92BF-22CDB5C9F462}"/>
             </a:ext>
           </a:extLst>
         </p:cNvPr>
@@ -19215,7 +19309,7 @@
           <p:cNvPr id="2" name="Title 1">
             <a:extLst>
               <a:ext uri="{FF2B5EF4-FFF2-40B4-BE49-F238E27FC236}">
-                <a16:creationId xmlns:a16="http://schemas.microsoft.com/office/drawing/2014/main" xmlns="" id="{2D314F5E-09E4-89B4-39EB-7556D28E2D5E}"/>
+                <a16:creationId xmlns:a16="http://schemas.microsoft.com/office/drawing/2014/main" id="{2D314F5E-09E4-89B4-39EB-7556D28E2D5E}"/>
               </a:ext>
             </a:extLst>
           </p:cNvPr>
@@ -19243,7 +19337,7 @@
           <p:cNvPr id="4" name="Slide Number Placeholder 3">
             <a:extLst>
               <a:ext uri="{FF2B5EF4-FFF2-40B4-BE49-F238E27FC236}">
-                <a16:creationId xmlns:a16="http://schemas.microsoft.com/office/drawing/2014/main" xmlns="" id="{0857143B-C875-A4A1-E58E-319DCF092982}"/>
+                <a16:creationId xmlns:a16="http://schemas.microsoft.com/office/drawing/2014/main" id="{0857143B-C875-A4A1-E58E-319DCF092982}"/>
               </a:ext>
             </a:extLst>
           </p:cNvPr>
@@ -19272,7 +19366,7 @@
           <p:cNvPr id="5" name="Picture 2" descr="Sharda University Logo &amp; Brand Assets (SVG, PNG and vector ...">
             <a:extLst>
               <a:ext uri="{FF2B5EF4-FFF2-40B4-BE49-F238E27FC236}">
-                <a16:creationId xmlns:a16="http://schemas.microsoft.com/office/drawing/2014/main" xmlns="" id="{BBB029A8-98E0-4E57-80DD-6D36B04F49A2}"/>
+                <a16:creationId xmlns:a16="http://schemas.microsoft.com/office/drawing/2014/main" id="{BBB029A8-98E0-4E57-80DD-6D36B04F49A2}"/>
               </a:ext>
             </a:extLst>
           </p:cNvPr>
@@ -19319,7 +19413,7 @@
           <p:cNvPr id="3" name="Title 1">
             <a:extLst>
               <a:ext uri="{FF2B5EF4-FFF2-40B4-BE49-F238E27FC236}">
-                <a16:creationId xmlns:a16="http://schemas.microsoft.com/office/drawing/2014/main" xmlns="" id="{2970DF77-BE14-CE10-0B50-6191FB44B6A2}"/>
+                <a16:creationId xmlns:a16="http://schemas.microsoft.com/office/drawing/2014/main" id="{2970DF77-BE14-CE10-0B50-6191FB44B6A2}"/>
               </a:ext>
             </a:extLst>
           </p:cNvPr>
@@ -19374,7 +19468,7 @@
           <p:cNvPr id="6" name="Slide Number Placeholder 3">
             <a:extLst>
               <a:ext uri="{FF2B5EF4-FFF2-40B4-BE49-F238E27FC236}">
-                <a16:creationId xmlns:a16="http://schemas.microsoft.com/office/drawing/2014/main" xmlns="" id="{0ED8712E-6DF1-09B5-902D-9AF580CECD5F}"/>
+                <a16:creationId xmlns:a16="http://schemas.microsoft.com/office/drawing/2014/main" id="{0ED8712E-6DF1-09B5-902D-9AF580CECD5F}"/>
               </a:ext>
             </a:extLst>
           </p:cNvPr>
@@ -19510,7 +19604,7 @@
           <p:cNvPr id="7" name="Picture 2" descr="Sharda University Logo &amp; Brand Assets (SVG, PNG and vector ...">
             <a:extLst>
               <a:ext uri="{FF2B5EF4-FFF2-40B4-BE49-F238E27FC236}">
-                <a16:creationId xmlns:a16="http://schemas.microsoft.com/office/drawing/2014/main" xmlns="" id="{D9DEF76F-CBFB-1ABB-0620-66518FD34AF6}"/>
+                <a16:creationId xmlns:a16="http://schemas.microsoft.com/office/drawing/2014/main" id="{D9DEF76F-CBFB-1ABB-0620-66518FD34AF6}"/>
               </a:ext>
             </a:extLst>
           </p:cNvPr>
@@ -19557,10 +19651,10 @@
           <p:cNvPr id="8" name="Rectangle 7">
             <a:extLst>
               <a:ext uri="{FF2B5EF4-FFF2-40B4-BE49-F238E27FC236}">
-                <a16:creationId xmlns:a16="http://schemas.microsoft.com/office/drawing/2014/main" xmlns="" id="{319EC2AC-5B66-5A6F-B955-120E873F4C16}"/>
+                <a16:creationId xmlns:a16="http://schemas.microsoft.com/office/drawing/2014/main" id="{319EC2AC-5B66-5A6F-B955-120E873F4C16}"/>
               </a:ext>
               <a:ext uri="{C183D7F6-B498-43B3-948B-1728B52AA6E4}">
-                <adec:decorative xmlns:adec="http://schemas.microsoft.com/office/drawing/2017/decorative" xmlns="" val="1"/>
+                <adec:decorative xmlns:adec="http://schemas.microsoft.com/office/drawing/2017/decorative" val="1"/>
               </a:ext>
             </a:extLst>
           </p:cNvPr>
@@ -19568,7 +19662,7 @@
           <p:nvPr>
             <p:extLst>
               <p:ext uri="{386F3935-93C4-4BCD-93E2-E3B085C9AB24}">
-                <p16:designElem xmlns:p16="http://schemas.microsoft.com/office/powerpoint/2015/main" xmlns="" val="1"/>
+                <p16:designElem xmlns:p16="http://schemas.microsoft.com/office/powerpoint/2015/main" val="1"/>
               </p:ext>
             </p:extLst>
           </p:nvPr>
@@ -19615,10 +19709,10 @@
           <p:cNvPr id="9" name="Rectangle 8">
             <a:extLst>
               <a:ext uri="{FF2B5EF4-FFF2-40B4-BE49-F238E27FC236}">
-                <a16:creationId xmlns:a16="http://schemas.microsoft.com/office/drawing/2014/main" xmlns="" id="{B68774A5-3983-068B-F32E-8D20AF02CA2F}"/>
+                <a16:creationId xmlns:a16="http://schemas.microsoft.com/office/drawing/2014/main" id="{B68774A5-3983-068B-F32E-8D20AF02CA2F}"/>
               </a:ext>
               <a:ext uri="{C183D7F6-B498-43B3-948B-1728B52AA6E4}">
-                <adec:decorative xmlns:adec="http://schemas.microsoft.com/office/drawing/2017/decorative" xmlns="" val="1"/>
+                <adec:decorative xmlns:adec="http://schemas.microsoft.com/office/drawing/2017/decorative" val="1"/>
               </a:ext>
             </a:extLst>
           </p:cNvPr>
@@ -19626,7 +19720,7 @@
           <p:nvPr>
             <p:extLst>
               <p:ext uri="{386F3935-93C4-4BCD-93E2-E3B085C9AB24}">
-                <p16:designElem xmlns:p16="http://schemas.microsoft.com/office/powerpoint/2015/main" xmlns="" val="1"/>
+                <p16:designElem xmlns:p16="http://schemas.microsoft.com/office/powerpoint/2015/main" val="1"/>
               </p:ext>
             </p:extLst>
           </p:nvPr>
@@ -19676,7 +19770,7 @@
           <p:cNvPr id="10" name="TextBox 9">
             <a:extLst>
               <a:ext uri="{FF2B5EF4-FFF2-40B4-BE49-F238E27FC236}">
-                <a16:creationId xmlns:a16="http://schemas.microsoft.com/office/drawing/2014/main" xmlns="" id="{DD63535A-4715-6023-8F45-4697755BE93E}"/>
+                <a16:creationId xmlns:a16="http://schemas.microsoft.com/office/drawing/2014/main" id="{DD63535A-4715-6023-8F45-4697755BE93E}"/>
               </a:ext>
             </a:extLst>
           </p:cNvPr>
@@ -19729,10 +19823,10 @@
           <p:cNvPr id="11" name="Group 10">
             <a:extLst>
               <a:ext uri="{FF2B5EF4-FFF2-40B4-BE49-F238E27FC236}">
-                <a16:creationId xmlns:a16="http://schemas.microsoft.com/office/drawing/2014/main" xmlns="" id="{BE005E67-F019-51A5-34EF-25901F9E159A}"/>
+                <a16:creationId xmlns:a16="http://schemas.microsoft.com/office/drawing/2014/main" id="{BE005E67-F019-51A5-34EF-25901F9E159A}"/>
               </a:ext>
               <a:ext uri="{C183D7F6-B498-43B3-948B-1728B52AA6E4}">
-                <adec:decorative xmlns:adec="http://schemas.microsoft.com/office/drawing/2017/decorative" xmlns="" val="1"/>
+                <adec:decorative xmlns:adec="http://schemas.microsoft.com/office/drawing/2017/decorative" val="1"/>
               </a:ext>
             </a:extLst>
           </p:cNvPr>
@@ -19740,7 +19834,7 @@
           <p:nvPr>
             <p:extLst>
               <p:ext uri="{386F3935-93C4-4BCD-93E2-E3B085C9AB24}">
-                <p16:designElem xmlns:p16="http://schemas.microsoft.com/office/powerpoint/2015/main" xmlns="" val="1"/>
+                <p16:designElem xmlns:p16="http://schemas.microsoft.com/office/powerpoint/2015/main" val="1"/>
               </p:ext>
             </p:extLst>
           </p:nvPr>
@@ -19758,10 +19852,10 @@
             <p:cNvPr id="12" name="Freeform: Shape 20">
               <a:extLst>
                 <a:ext uri="{FF2B5EF4-FFF2-40B4-BE49-F238E27FC236}">
-                  <a16:creationId xmlns:a16="http://schemas.microsoft.com/office/drawing/2014/main" xmlns="" id="{DEF9EA64-B8A6-6D34-CDF3-C252EA242A08}"/>
+                  <a16:creationId xmlns:a16="http://schemas.microsoft.com/office/drawing/2014/main" id="{DEF9EA64-B8A6-6D34-CDF3-C252EA242A08}"/>
                 </a:ext>
                 <a:ext uri="{C183D7F6-B498-43B3-948B-1728B52AA6E4}">
-                  <adec:decorative xmlns:adec="http://schemas.microsoft.com/office/drawing/2017/decorative" xmlns="" val="1"/>
+                  <adec:decorative xmlns:adec="http://schemas.microsoft.com/office/drawing/2017/decorative" val="1"/>
                 </a:ext>
               </a:extLst>
             </p:cNvPr>
@@ -19769,7 +19863,7 @@
             <p:nvPr>
               <p:extLst>
                 <p:ext uri="{386F3935-93C4-4BCD-93E2-E3B085C9AB24}">
-                  <p16:designElem xmlns:p16="http://schemas.microsoft.com/office/powerpoint/2015/main" xmlns="" val="1"/>
+                  <p16:designElem xmlns:p16="http://schemas.microsoft.com/office/powerpoint/2015/main" val="1"/>
                 </p:ext>
               </p:extLst>
             </p:nvPr>
@@ -19970,10 +20064,10 @@
             <p:cNvPr id="13" name="Freeform: Shape 21">
               <a:extLst>
                 <a:ext uri="{FF2B5EF4-FFF2-40B4-BE49-F238E27FC236}">
-                  <a16:creationId xmlns:a16="http://schemas.microsoft.com/office/drawing/2014/main" xmlns="" id="{F5E976EA-8480-23C8-DDB2-E4E959D99F3B}"/>
+                  <a16:creationId xmlns:a16="http://schemas.microsoft.com/office/drawing/2014/main" id="{F5E976EA-8480-23C8-DDB2-E4E959D99F3B}"/>
                 </a:ext>
                 <a:ext uri="{C183D7F6-B498-43B3-948B-1728B52AA6E4}">
-                  <adec:decorative xmlns:adec="http://schemas.microsoft.com/office/drawing/2017/decorative" xmlns="" val="1"/>
+                  <adec:decorative xmlns:adec="http://schemas.microsoft.com/office/drawing/2017/decorative" val="1"/>
                 </a:ext>
               </a:extLst>
             </p:cNvPr>
@@ -19981,7 +20075,7 @@
             <p:nvPr>
               <p:extLst>
                 <p:ext uri="{386F3935-93C4-4BCD-93E2-E3B085C9AB24}">
-                  <p16:designElem xmlns:p16="http://schemas.microsoft.com/office/powerpoint/2015/main" xmlns="" val="1"/>
+                  <p16:designElem xmlns:p16="http://schemas.microsoft.com/office/powerpoint/2015/main" val="1"/>
                 </p:ext>
               </p:extLst>
             </p:nvPr>
@@ -20182,10 +20276,10 @@
             <p:cNvPr id="14" name="Freeform: Shape 22">
               <a:extLst>
                 <a:ext uri="{FF2B5EF4-FFF2-40B4-BE49-F238E27FC236}">
-                  <a16:creationId xmlns:a16="http://schemas.microsoft.com/office/drawing/2014/main" xmlns="" id="{09BC0516-0B22-65CF-2A7B-5B7B325E44D6}"/>
+                  <a16:creationId xmlns:a16="http://schemas.microsoft.com/office/drawing/2014/main" id="{09BC0516-0B22-65CF-2A7B-5B7B325E44D6}"/>
                 </a:ext>
                 <a:ext uri="{C183D7F6-B498-43B3-948B-1728B52AA6E4}">
-                  <adec:decorative xmlns:adec="http://schemas.microsoft.com/office/drawing/2017/decorative" xmlns="" val="1"/>
+                  <adec:decorative xmlns:adec="http://schemas.microsoft.com/office/drawing/2017/decorative" val="1"/>
                 </a:ext>
               </a:extLst>
             </p:cNvPr>
@@ -20193,7 +20287,7 @@
             <p:nvPr>
               <p:extLst>
                 <p:ext uri="{386F3935-93C4-4BCD-93E2-E3B085C9AB24}">
-                  <p16:designElem xmlns:p16="http://schemas.microsoft.com/office/powerpoint/2015/main" xmlns="" val="1"/>
+                  <p16:designElem xmlns:p16="http://schemas.microsoft.com/office/powerpoint/2015/main" val="1"/>
                 </p:ext>
               </p:extLst>
             </p:nvPr>
@@ -20504,10 +20598,10 @@
             <p:cNvPr id="15" name="Freeform: Shape 23">
               <a:extLst>
                 <a:ext uri="{FF2B5EF4-FFF2-40B4-BE49-F238E27FC236}">
-                  <a16:creationId xmlns:a16="http://schemas.microsoft.com/office/drawing/2014/main" xmlns="" id="{982F7E74-CC9C-4776-1C91-75D14D576BC9}"/>
+                  <a16:creationId xmlns:a16="http://schemas.microsoft.com/office/drawing/2014/main" id="{982F7E74-CC9C-4776-1C91-75D14D576BC9}"/>
                 </a:ext>
                 <a:ext uri="{C183D7F6-B498-43B3-948B-1728B52AA6E4}">
-                  <adec:decorative xmlns:adec="http://schemas.microsoft.com/office/drawing/2017/decorative" xmlns="" val="1"/>
+                  <adec:decorative xmlns:adec="http://schemas.microsoft.com/office/drawing/2017/decorative" val="1"/>
                 </a:ext>
               </a:extLst>
             </p:cNvPr>
@@ -20515,7 +20609,7 @@
             <p:nvPr>
               <p:extLst>
                 <p:ext uri="{386F3935-93C4-4BCD-93E2-E3B085C9AB24}">
-                  <p16:designElem xmlns:p16="http://schemas.microsoft.com/office/powerpoint/2015/main" xmlns="" val="1"/>
+                  <p16:designElem xmlns:p16="http://schemas.microsoft.com/office/powerpoint/2015/main" val="1"/>
                 </p:ext>
               </p:extLst>
             </p:nvPr>
@@ -20983,7 +21077,7 @@
           <p:cNvPr id="16" name="Picture 15" descr="A close-up of a logo&#10;&#10;AI-generated content may be incorrect.">
             <a:extLst>
               <a:ext uri="{FF2B5EF4-FFF2-40B4-BE49-F238E27FC236}">
-                <a16:creationId xmlns:a16="http://schemas.microsoft.com/office/drawing/2014/main" xmlns="" id="{A1F267AE-7039-7AAA-610C-B932FCC04D3F}"/>
+                <a16:creationId xmlns:a16="http://schemas.microsoft.com/office/drawing/2014/main" id="{A1F267AE-7039-7AAA-610C-B932FCC04D3F}"/>
               </a:ext>
             </a:extLst>
           </p:cNvPr>
@@ -21019,7 +21113,7 @@
           <p:cNvPr id="17" name="Slide Number Placeholder 3">
             <a:extLst>
               <a:ext uri="{FF2B5EF4-FFF2-40B4-BE49-F238E27FC236}">
-                <a16:creationId xmlns:a16="http://schemas.microsoft.com/office/drawing/2014/main" xmlns="" id="{67304840-A971-834E-F7D8-973EE146378F}"/>
+                <a16:creationId xmlns:a16="http://schemas.microsoft.com/office/drawing/2014/main" id="{67304840-A971-834E-F7D8-973EE146378F}"/>
               </a:ext>
             </a:extLst>
           </p:cNvPr>
@@ -21162,10 +21256,10 @@
           <p:cNvPr id="18" name="Group 17">
             <a:extLst>
               <a:ext uri="{FF2B5EF4-FFF2-40B4-BE49-F238E27FC236}">
-                <a16:creationId xmlns:a16="http://schemas.microsoft.com/office/drawing/2014/main" xmlns="" id="{A3CD3C47-FB45-34FD-67BB-14947EAE6487}"/>
+                <a16:creationId xmlns:a16="http://schemas.microsoft.com/office/drawing/2014/main" id="{A3CD3C47-FB45-34FD-67BB-14947EAE6487}"/>
               </a:ext>
               <a:ext uri="{C183D7F6-B498-43B3-948B-1728B52AA6E4}">
-                <adec:decorative xmlns:adec="http://schemas.microsoft.com/office/drawing/2017/decorative" xmlns="" val="1"/>
+                <adec:decorative xmlns:adec="http://schemas.microsoft.com/office/drawing/2017/decorative" val="1"/>
               </a:ext>
             </a:extLst>
           </p:cNvPr>
@@ -21173,7 +21267,7 @@
           <p:nvPr>
             <p:extLst>
               <p:ext uri="{386F3935-93C4-4BCD-93E2-E3B085C9AB24}">
-                <p16:designElem xmlns:p16="http://schemas.microsoft.com/office/powerpoint/2015/main" xmlns="" val="1"/>
+                <p16:designElem xmlns:p16="http://schemas.microsoft.com/office/powerpoint/2015/main" val="1"/>
               </p:ext>
             </p:extLst>
           </p:nvPr>
@@ -21191,10 +21285,10 @@
             <p:cNvPr id="19" name="Freeform: Shape 26">
               <a:extLst>
                 <a:ext uri="{FF2B5EF4-FFF2-40B4-BE49-F238E27FC236}">
-                  <a16:creationId xmlns:a16="http://schemas.microsoft.com/office/drawing/2014/main" xmlns="" id="{623FF4FB-E123-1FBD-1E9C-66CFCE3663F3}"/>
+                  <a16:creationId xmlns:a16="http://schemas.microsoft.com/office/drawing/2014/main" id="{623FF4FB-E123-1FBD-1E9C-66CFCE3663F3}"/>
                 </a:ext>
                 <a:ext uri="{C183D7F6-B498-43B3-948B-1728B52AA6E4}">
-                  <adec:decorative xmlns:adec="http://schemas.microsoft.com/office/drawing/2017/decorative" xmlns="" val="1"/>
+                  <adec:decorative xmlns:adec="http://schemas.microsoft.com/office/drawing/2017/decorative" val="1"/>
                 </a:ext>
               </a:extLst>
             </p:cNvPr>
@@ -21202,7 +21296,7 @@
             <p:nvPr>
               <p:extLst>
                 <p:ext uri="{386F3935-93C4-4BCD-93E2-E3B085C9AB24}">
-                  <p16:designElem xmlns:p16="http://schemas.microsoft.com/office/powerpoint/2015/main" xmlns="" val="1"/>
+                  <p16:designElem xmlns:p16="http://schemas.microsoft.com/office/powerpoint/2015/main" val="1"/>
                 </p:ext>
               </p:extLst>
             </p:nvPr>
@@ -21589,10 +21683,10 @@
             <p:cNvPr id="20" name="Freeform: Shape 27">
               <a:extLst>
                 <a:ext uri="{FF2B5EF4-FFF2-40B4-BE49-F238E27FC236}">
-                  <a16:creationId xmlns:a16="http://schemas.microsoft.com/office/drawing/2014/main" xmlns="" id="{579BD904-6C3E-E11F-7070-EEC4F04084E9}"/>
+                  <a16:creationId xmlns:a16="http://schemas.microsoft.com/office/drawing/2014/main" id="{579BD904-6C3E-E11F-7070-EEC4F04084E9}"/>
                 </a:ext>
                 <a:ext uri="{C183D7F6-B498-43B3-948B-1728B52AA6E4}">
-                  <adec:decorative xmlns:adec="http://schemas.microsoft.com/office/drawing/2017/decorative" xmlns="" val="1"/>
+                  <adec:decorative xmlns:adec="http://schemas.microsoft.com/office/drawing/2017/decorative" val="1"/>
                 </a:ext>
               </a:extLst>
             </p:cNvPr>
@@ -21600,7 +21694,7 @@
             <p:nvPr>
               <p:extLst>
                 <p:ext uri="{386F3935-93C4-4BCD-93E2-E3B085C9AB24}">
-                  <p16:designElem xmlns:p16="http://schemas.microsoft.com/office/powerpoint/2015/main" xmlns="" val="1"/>
+                  <p16:designElem xmlns:p16="http://schemas.microsoft.com/office/powerpoint/2015/main" val="1"/>
                 </p:ext>
               </p:extLst>
             </p:nvPr>
@@ -21781,10 +21875,10 @@
             <p:cNvPr id="21" name="Freeform: Shape 28">
               <a:extLst>
                 <a:ext uri="{FF2B5EF4-FFF2-40B4-BE49-F238E27FC236}">
-                  <a16:creationId xmlns:a16="http://schemas.microsoft.com/office/drawing/2014/main" xmlns="" id="{48D44DE1-C7FC-D524-9BC8-37489EF045FD}"/>
+                  <a16:creationId xmlns:a16="http://schemas.microsoft.com/office/drawing/2014/main" id="{48D44DE1-C7FC-D524-9BC8-37489EF045FD}"/>
                 </a:ext>
                 <a:ext uri="{C183D7F6-B498-43B3-948B-1728B52AA6E4}">
-                  <adec:decorative xmlns:adec="http://schemas.microsoft.com/office/drawing/2017/decorative" xmlns="" val="1"/>
+                  <adec:decorative xmlns:adec="http://schemas.microsoft.com/office/drawing/2017/decorative" val="1"/>
                 </a:ext>
               </a:extLst>
             </p:cNvPr>
@@ -21792,7 +21886,7 @@
             <p:nvPr>
               <p:extLst>
                 <p:ext uri="{386F3935-93C4-4BCD-93E2-E3B085C9AB24}">
-                  <p16:designElem xmlns:p16="http://schemas.microsoft.com/office/powerpoint/2015/main" xmlns="" val="1"/>
+                  <p16:designElem xmlns:p16="http://schemas.microsoft.com/office/powerpoint/2015/main" val="1"/>
                 </p:ext>
               </p:extLst>
             </p:nvPr>
@@ -22035,10 +22129,10 @@
             <p:cNvPr id="22" name="Freeform: Shape 29">
               <a:extLst>
                 <a:ext uri="{FF2B5EF4-FFF2-40B4-BE49-F238E27FC236}">
-                  <a16:creationId xmlns:a16="http://schemas.microsoft.com/office/drawing/2014/main" xmlns="" id="{939ECBD1-5700-7DF0-71AC-4187AAAA204A}"/>
+                  <a16:creationId xmlns:a16="http://schemas.microsoft.com/office/drawing/2014/main" id="{939ECBD1-5700-7DF0-71AC-4187AAAA204A}"/>
                 </a:ext>
                 <a:ext uri="{C183D7F6-B498-43B3-948B-1728B52AA6E4}">
-                  <adec:decorative xmlns:adec="http://schemas.microsoft.com/office/drawing/2017/decorative" xmlns="" val="1"/>
+                  <adec:decorative xmlns:adec="http://schemas.microsoft.com/office/drawing/2017/decorative" val="1"/>
                 </a:ext>
               </a:extLst>
             </p:cNvPr>
@@ -22046,7 +22140,7 @@
             <p:nvPr>
               <p:extLst>
                 <p:ext uri="{386F3935-93C4-4BCD-93E2-E3B085C9AB24}">
-                  <p16:designElem xmlns:p16="http://schemas.microsoft.com/office/powerpoint/2015/main" xmlns="" val="1"/>
+                  <p16:designElem xmlns:p16="http://schemas.microsoft.com/office/powerpoint/2015/main" val="1"/>
                 </p:ext>
               </p:extLst>
             </p:nvPr>
@@ -22228,7 +22322,7 @@
           <p:cNvPr id="23" name="Picture 22" descr="A hands holding a light bulb&#10;&#10;AI-generated content may be incorrect.">
             <a:extLst>
               <a:ext uri="{FF2B5EF4-FFF2-40B4-BE49-F238E27FC236}">
-                <a16:creationId xmlns:a16="http://schemas.microsoft.com/office/drawing/2014/main" xmlns="" id="{6CCD3785-85D3-171F-7854-C97494395DEB}"/>
+                <a16:creationId xmlns:a16="http://schemas.microsoft.com/office/drawing/2014/main" id="{6CCD3785-85D3-171F-7854-C97494395DEB}"/>
               </a:ext>
             </a:extLst>
           </p:cNvPr>
@@ -22267,8 +22361,8 @@
         </p:nvSpPr>
         <p:spPr>
           <a:xfrm>
-            <a:off x="1180000" y="1260000"/>
-            <a:ext cx="1800000" cy="300000"/>
+            <a:off x="4291558" y="1227503"/>
+            <a:ext cx="1800000" cy="461665"/>
           </a:xfrm>
           <a:prstGeom prst="rect">
             <a:avLst/>
@@ -22289,6 +22383,7 @@
               </a:defRPr>
             </a:pPr>
             <a:r>
+              <a:rPr sz="2400" dirty="0"/>
               <a:t>Tech Stack</a:t>
             </a:r>
           </a:p>
@@ -22302,8 +22397,8 @@
         </p:nvSpPr>
         <p:spPr>
           <a:xfrm>
-            <a:off x="1180000" y="1620000"/>
-            <a:ext cx="9300000" cy="900000"/>
+            <a:off x="1680997" y="1805152"/>
+            <a:ext cx="6269032" cy="1569660"/>
           </a:xfrm>
           <a:prstGeom prst="rect">
             <a:avLst/>
@@ -22324,12 +22419,30 @@
               </a:defRPr>
             </a:pPr>
             <a:r>
+              <a:rPr sz="2400" dirty="0"/>
               <a:t>React 18, Vite, Tailwind CSS, React Router DOM, Recharts, face-api.js,</a:t>
             </a:r>
           </a:p>
           <a:p>
             <a:r>
-              <a:t>Web Speech API, MediaRecorder API, Lucide React, Context API</a:t>
+              <a:rPr sz="2400" dirty="0"/>
+              <a:t>Web Speech API, </a:t>
+            </a:r>
+            <a:r>
+              <a:rPr sz="2400" dirty="0" err="1"/>
+              <a:t>MediaRecorder</a:t>
+            </a:r>
+            <a:r>
+              <a:rPr sz="2400" dirty="0"/>
+              <a:t> API, </a:t>
+            </a:r>
+            <a:r>
+              <a:rPr sz="2400" dirty="0" err="1"/>
+              <a:t>Lucide</a:t>
+            </a:r>
+            <a:r>
+              <a:rPr sz="2400" dirty="0"/>
+              <a:t> React, Context API</a:t>
             </a:r>
           </a:p>
         </p:txBody>
@@ -22342,8 +22455,8 @@
         </p:nvSpPr>
         <p:spPr>
           <a:xfrm>
-            <a:off x="1180000" y="2700000"/>
-            <a:ext cx="2800000" cy="300000"/>
+            <a:off x="3488730" y="3435859"/>
+            <a:ext cx="3405655" cy="461665"/>
           </a:xfrm>
           <a:prstGeom prst="rect">
             <a:avLst/>
@@ -22364,6 +22477,7 @@
               </a:defRPr>
             </a:pPr>
             <a:r>
+              <a:rPr sz="2400" dirty="0"/>
               <a:t>Project Modules Used</a:t>
             </a:r>
           </a:p>
@@ -22377,8 +22491,8 @@
         </p:nvSpPr>
         <p:spPr>
           <a:xfrm>
-            <a:off x="1180000" y="3070000"/>
-            <a:ext cx="9300000" cy="1700000"/>
+            <a:off x="1680997" y="4268018"/>
+            <a:ext cx="9300000" cy="1938992"/>
           </a:xfrm>
           <a:prstGeom prst="rect">
             <a:avLst/>
@@ -22399,16 +22513,79 @@
               </a:defRPr>
             </a:pPr>
             <a:r>
-              <a:t>Modules: AuthContext, InterviewContext, AIAvatar, VideoRecorder, SpeechToText, Timer,</a:t>
+              <a:rPr sz="2400" dirty="0"/>
+              <a:t>Modules: </a:t>
+            </a:r>
+            <a:r>
+              <a:rPr sz="2400" dirty="0" err="1"/>
+              <a:t>AuthContext</a:t>
+            </a:r>
+            <a:r>
+              <a:rPr sz="2400" dirty="0"/>
+              <a:t>, </a:t>
+            </a:r>
+            <a:r>
+              <a:rPr sz="2400" dirty="0" err="1"/>
+              <a:t>InterviewContext</a:t>
+            </a:r>
+            <a:r>
+              <a:rPr sz="2400" dirty="0"/>
+              <a:t>, </a:t>
+            </a:r>
+            <a:r>
+              <a:rPr sz="2400" dirty="0" err="1"/>
+              <a:t>AIAvatar</a:t>
+            </a:r>
+            <a:r>
+              <a:rPr sz="2400" dirty="0"/>
+              <a:t>, </a:t>
+            </a:r>
+            <a:r>
+              <a:rPr sz="2400" dirty="0" err="1"/>
+              <a:t>VideoRecorder</a:t>
+            </a:r>
+            <a:r>
+              <a:rPr sz="2400" dirty="0"/>
+              <a:t>, </a:t>
+            </a:r>
+            <a:r>
+              <a:rPr sz="2400" dirty="0" err="1"/>
+              <a:t>SpeechToText</a:t>
+            </a:r>
+            <a:r>
+              <a:rPr sz="2400" dirty="0"/>
+              <a:t>, Timer,</a:t>
             </a:r>
           </a:p>
           <a:p>
             <a:r>
-              <a:t>CandidateRegistration, InterviewRoom, Dashboard, Sessions, CreateSession, Candidates,</a:t>
+              <a:rPr sz="2400" dirty="0" err="1"/>
+              <a:t>CandidateRegistration</a:t>
+            </a:r>
+            <a:r>
+              <a:rPr sz="2400" dirty="0"/>
+              <a:t>, </a:t>
+            </a:r>
+            <a:r>
+              <a:rPr sz="2400" dirty="0" err="1"/>
+              <a:t>InterviewRoom</a:t>
+            </a:r>
+            <a:r>
+              <a:rPr sz="2400" dirty="0"/>
+              <a:t>, Dashboard, Sessions, </a:t>
+            </a:r>
+            <a:r>
+              <a:rPr sz="2400" dirty="0" err="1"/>
+              <a:t>CreateSession</a:t>
+            </a:r>
+            <a:r>
+              <a:rPr sz="2400" dirty="0"/>
+              <a:t>, Candidates,</a:t>
             </a:r>
           </a:p>
           <a:p>
             <a:r>
+              <a:rPr sz="2400" dirty="0"/>
               <a:t>aiAnalysis.js, mediaUtils.js, helpers.js</a:t>
             </a:r>
           </a:p>
@@ -22435,7 +22612,7 @@
         <p:cNvPr id="1" name="">
           <a:extLst>
             <a:ext uri="{FF2B5EF4-FFF2-40B4-BE49-F238E27FC236}">
-              <a16:creationId xmlns:a16="http://schemas.microsoft.com/office/drawing/2014/main" xmlns="" id="{5E8822F5-6D7D-4227-85D7-16B67B0556E2}"/>
+              <a16:creationId xmlns:a16="http://schemas.microsoft.com/office/drawing/2014/main" id="{5E8822F5-6D7D-4227-85D7-16B67B0556E2}"/>
             </a:ext>
           </a:extLst>
         </p:cNvPr>
@@ -22455,7 +22632,7 @@
           <p:cNvPr id="2" name="Title 1">
             <a:extLst>
               <a:ext uri="{FF2B5EF4-FFF2-40B4-BE49-F238E27FC236}">
-                <a16:creationId xmlns:a16="http://schemas.microsoft.com/office/drawing/2014/main" xmlns="" id="{224500E9-734C-CAA0-17FE-176893532FD5}"/>
+                <a16:creationId xmlns:a16="http://schemas.microsoft.com/office/drawing/2014/main" id="{224500E9-734C-CAA0-17FE-176893532FD5}"/>
               </a:ext>
             </a:extLst>
           </p:cNvPr>
@@ -22483,7 +22660,7 @@
           <p:cNvPr id="4" name="Slide Number Placeholder 3">
             <a:extLst>
               <a:ext uri="{FF2B5EF4-FFF2-40B4-BE49-F238E27FC236}">
-                <a16:creationId xmlns:a16="http://schemas.microsoft.com/office/drawing/2014/main" xmlns="" id="{77922EA4-B1F6-34D3-5626-416BFEC9A735}"/>
+                <a16:creationId xmlns:a16="http://schemas.microsoft.com/office/drawing/2014/main" id="{77922EA4-B1F6-34D3-5626-416BFEC9A735}"/>
               </a:ext>
             </a:extLst>
           </p:cNvPr>
@@ -22512,7 +22689,7 @@
           <p:cNvPr id="5" name="Picture 2" descr="Sharda University Logo &amp; Brand Assets (SVG, PNG and vector ...">
             <a:extLst>
               <a:ext uri="{FF2B5EF4-FFF2-40B4-BE49-F238E27FC236}">
-                <a16:creationId xmlns:a16="http://schemas.microsoft.com/office/drawing/2014/main" xmlns="" id="{3CC82AE6-9D2A-2D88-F491-8203880CCBDD}"/>
+                <a16:creationId xmlns:a16="http://schemas.microsoft.com/office/drawing/2014/main" id="{3CC82AE6-9D2A-2D88-F491-8203880CCBDD}"/>
               </a:ext>
             </a:extLst>
           </p:cNvPr>
@@ -22559,7 +22736,7 @@
           <p:cNvPr id="3" name="Title 1">
             <a:extLst>
               <a:ext uri="{FF2B5EF4-FFF2-40B4-BE49-F238E27FC236}">
-                <a16:creationId xmlns:a16="http://schemas.microsoft.com/office/drawing/2014/main" xmlns="" id="{A065C8CE-28F6-0C6B-338C-C3B5B298F969}"/>
+                <a16:creationId xmlns:a16="http://schemas.microsoft.com/office/drawing/2014/main" id="{A065C8CE-28F6-0C6B-338C-C3B5B298F969}"/>
               </a:ext>
             </a:extLst>
           </p:cNvPr>
@@ -22614,7 +22791,7 @@
           <p:cNvPr id="6" name="Slide Number Placeholder 3">
             <a:extLst>
               <a:ext uri="{FF2B5EF4-FFF2-40B4-BE49-F238E27FC236}">
-                <a16:creationId xmlns:a16="http://schemas.microsoft.com/office/drawing/2014/main" xmlns="" id="{649D56B7-D53C-011E-2F3F-D5AD326BEFEB}"/>
+                <a16:creationId xmlns:a16="http://schemas.microsoft.com/office/drawing/2014/main" id="{649D56B7-D53C-011E-2F3F-D5AD326BEFEB}"/>
               </a:ext>
             </a:extLst>
           </p:cNvPr>
@@ -22750,7 +22927,7 @@
           <p:cNvPr id="7" name="Picture 2" descr="Sharda University Logo &amp; Brand Assets (SVG, PNG and vector ...">
             <a:extLst>
               <a:ext uri="{FF2B5EF4-FFF2-40B4-BE49-F238E27FC236}">
-                <a16:creationId xmlns:a16="http://schemas.microsoft.com/office/drawing/2014/main" xmlns="" id="{E64D2BE9-CE4D-7481-3EE6-3ABA5F7F900D}"/>
+                <a16:creationId xmlns:a16="http://schemas.microsoft.com/office/drawing/2014/main" id="{E64D2BE9-CE4D-7481-3EE6-3ABA5F7F900D}"/>
               </a:ext>
             </a:extLst>
           </p:cNvPr>
@@ -22797,10 +22974,10 @@
           <p:cNvPr id="8" name="Rectangle 7">
             <a:extLst>
               <a:ext uri="{FF2B5EF4-FFF2-40B4-BE49-F238E27FC236}">
-                <a16:creationId xmlns:a16="http://schemas.microsoft.com/office/drawing/2014/main" xmlns="" id="{FED1D958-30C5-BFBB-4704-8AA5760A3849}"/>
+                <a16:creationId xmlns:a16="http://schemas.microsoft.com/office/drawing/2014/main" id="{FED1D958-30C5-BFBB-4704-8AA5760A3849}"/>
               </a:ext>
               <a:ext uri="{C183D7F6-B498-43B3-948B-1728B52AA6E4}">
-                <adec:decorative xmlns:adec="http://schemas.microsoft.com/office/drawing/2017/decorative" xmlns="" val="1"/>
+                <adec:decorative xmlns:adec="http://schemas.microsoft.com/office/drawing/2017/decorative" val="1"/>
               </a:ext>
             </a:extLst>
           </p:cNvPr>
@@ -22808,7 +22985,7 @@
           <p:nvPr>
             <p:extLst>
               <p:ext uri="{386F3935-93C4-4BCD-93E2-E3B085C9AB24}">
-                <p16:designElem xmlns:p16="http://schemas.microsoft.com/office/powerpoint/2015/main" xmlns="" val="1"/>
+                <p16:designElem xmlns:p16="http://schemas.microsoft.com/office/powerpoint/2015/main" val="1"/>
               </p:ext>
             </p:extLst>
           </p:nvPr>
@@ -22855,10 +23032,10 @@
           <p:cNvPr id="9" name="Rectangle 8">
             <a:extLst>
               <a:ext uri="{FF2B5EF4-FFF2-40B4-BE49-F238E27FC236}">
-                <a16:creationId xmlns:a16="http://schemas.microsoft.com/office/drawing/2014/main" xmlns="" id="{1F8B59F7-E15D-2790-BD01-92549C8BDE4A}"/>
+                <a16:creationId xmlns:a16="http://schemas.microsoft.com/office/drawing/2014/main" id="{1F8B59F7-E15D-2790-BD01-92549C8BDE4A}"/>
               </a:ext>
               <a:ext uri="{C183D7F6-B498-43B3-948B-1728B52AA6E4}">
-                <adec:decorative xmlns:adec="http://schemas.microsoft.com/office/drawing/2017/decorative" xmlns="" val="1"/>
+                <adec:decorative xmlns:adec="http://schemas.microsoft.com/office/drawing/2017/decorative" val="1"/>
               </a:ext>
             </a:extLst>
           </p:cNvPr>
@@ -22866,7 +23043,7 @@
           <p:nvPr>
             <p:extLst>
               <p:ext uri="{386F3935-93C4-4BCD-93E2-E3B085C9AB24}">
-                <p16:designElem xmlns:p16="http://schemas.microsoft.com/office/powerpoint/2015/main" xmlns="" val="1"/>
+                <p16:designElem xmlns:p16="http://schemas.microsoft.com/office/powerpoint/2015/main" val="1"/>
               </p:ext>
             </p:extLst>
           </p:nvPr>
@@ -22916,7 +23093,7 @@
           <p:cNvPr id="10" name="TextBox 9">
             <a:extLst>
               <a:ext uri="{FF2B5EF4-FFF2-40B4-BE49-F238E27FC236}">
-                <a16:creationId xmlns:a16="http://schemas.microsoft.com/office/drawing/2014/main" xmlns="" id="{F6DC28E2-5885-1FB9-C717-8250B26F451A}"/>
+                <a16:creationId xmlns:a16="http://schemas.microsoft.com/office/drawing/2014/main" id="{F6DC28E2-5885-1FB9-C717-8250B26F451A}"/>
               </a:ext>
             </a:extLst>
           </p:cNvPr>
@@ -22969,10 +23146,10 @@
           <p:cNvPr id="11" name="Group 10">
             <a:extLst>
               <a:ext uri="{FF2B5EF4-FFF2-40B4-BE49-F238E27FC236}">
-                <a16:creationId xmlns:a16="http://schemas.microsoft.com/office/drawing/2014/main" xmlns="" id="{CA18811A-4F8E-2836-EF90-7221277EF3A3}"/>
+                <a16:creationId xmlns:a16="http://schemas.microsoft.com/office/drawing/2014/main" id="{CA18811A-4F8E-2836-EF90-7221277EF3A3}"/>
               </a:ext>
               <a:ext uri="{C183D7F6-B498-43B3-948B-1728B52AA6E4}">
-                <adec:decorative xmlns:adec="http://schemas.microsoft.com/office/drawing/2017/decorative" xmlns="" val="1"/>
+                <adec:decorative xmlns:adec="http://schemas.microsoft.com/office/drawing/2017/decorative" val="1"/>
               </a:ext>
             </a:extLst>
           </p:cNvPr>
@@ -22980,7 +23157,7 @@
           <p:nvPr>
             <p:extLst>
               <p:ext uri="{386F3935-93C4-4BCD-93E2-E3B085C9AB24}">
-                <p16:designElem xmlns:p16="http://schemas.microsoft.com/office/powerpoint/2015/main" xmlns="" val="1"/>
+                <p16:designElem xmlns:p16="http://schemas.microsoft.com/office/powerpoint/2015/main" val="1"/>
               </p:ext>
             </p:extLst>
           </p:nvPr>
@@ -22998,10 +23175,10 @@
             <p:cNvPr id="12" name="Freeform: Shape 20">
               <a:extLst>
                 <a:ext uri="{FF2B5EF4-FFF2-40B4-BE49-F238E27FC236}">
-                  <a16:creationId xmlns:a16="http://schemas.microsoft.com/office/drawing/2014/main" xmlns="" id="{E2B4672F-F1C3-2CFE-B3D1-6509F2ED93F5}"/>
+                  <a16:creationId xmlns:a16="http://schemas.microsoft.com/office/drawing/2014/main" id="{E2B4672F-F1C3-2CFE-B3D1-6509F2ED93F5}"/>
                 </a:ext>
                 <a:ext uri="{C183D7F6-B498-43B3-948B-1728B52AA6E4}">
-                  <adec:decorative xmlns:adec="http://schemas.microsoft.com/office/drawing/2017/decorative" xmlns="" val="1"/>
+                  <adec:decorative xmlns:adec="http://schemas.microsoft.com/office/drawing/2017/decorative" val="1"/>
                 </a:ext>
               </a:extLst>
             </p:cNvPr>
@@ -23009,7 +23186,7 @@
             <p:nvPr>
               <p:extLst>
                 <p:ext uri="{386F3935-93C4-4BCD-93E2-E3B085C9AB24}">
-                  <p16:designElem xmlns:p16="http://schemas.microsoft.com/office/powerpoint/2015/main" xmlns="" val="1"/>
+                  <p16:designElem xmlns:p16="http://schemas.microsoft.com/office/powerpoint/2015/main" val="1"/>
                 </p:ext>
               </p:extLst>
             </p:nvPr>
@@ -23210,10 +23387,10 @@
             <p:cNvPr id="13" name="Freeform: Shape 21">
               <a:extLst>
                 <a:ext uri="{FF2B5EF4-FFF2-40B4-BE49-F238E27FC236}">
-                  <a16:creationId xmlns:a16="http://schemas.microsoft.com/office/drawing/2014/main" xmlns="" id="{CC37C06D-DFF9-BC83-B432-49605D4FF19F}"/>
+                  <a16:creationId xmlns:a16="http://schemas.microsoft.com/office/drawing/2014/main" id="{CC37C06D-DFF9-BC83-B432-49605D4FF19F}"/>
                 </a:ext>
                 <a:ext uri="{C183D7F6-B498-43B3-948B-1728B52AA6E4}">
-                  <adec:decorative xmlns:adec="http://schemas.microsoft.com/office/drawing/2017/decorative" xmlns="" val="1"/>
+                  <adec:decorative xmlns:adec="http://schemas.microsoft.com/office/drawing/2017/decorative" val="1"/>
                 </a:ext>
               </a:extLst>
             </p:cNvPr>
@@ -23221,7 +23398,7 @@
             <p:nvPr>
               <p:extLst>
                 <p:ext uri="{386F3935-93C4-4BCD-93E2-E3B085C9AB24}">
-                  <p16:designElem xmlns:p16="http://schemas.microsoft.com/office/powerpoint/2015/main" xmlns="" val="1"/>
+                  <p16:designElem xmlns:p16="http://schemas.microsoft.com/office/powerpoint/2015/main" val="1"/>
                 </p:ext>
               </p:extLst>
             </p:nvPr>
@@ -23422,10 +23599,10 @@
             <p:cNvPr id="14" name="Freeform: Shape 22">
               <a:extLst>
                 <a:ext uri="{FF2B5EF4-FFF2-40B4-BE49-F238E27FC236}">
-                  <a16:creationId xmlns:a16="http://schemas.microsoft.com/office/drawing/2014/main" xmlns="" id="{5CA88AC1-9155-569A-E5BF-6E8E1C824B43}"/>
+                  <a16:creationId xmlns:a16="http://schemas.microsoft.com/office/drawing/2014/main" id="{5CA88AC1-9155-569A-E5BF-6E8E1C824B43}"/>
                 </a:ext>
                 <a:ext uri="{C183D7F6-B498-43B3-948B-1728B52AA6E4}">
-                  <adec:decorative xmlns:adec="http://schemas.microsoft.com/office/drawing/2017/decorative" xmlns="" val="1"/>
+                  <adec:decorative xmlns:adec="http://schemas.microsoft.com/office/drawing/2017/decorative" val="1"/>
                 </a:ext>
               </a:extLst>
             </p:cNvPr>
@@ -23433,7 +23610,7 @@
             <p:nvPr>
               <p:extLst>
                 <p:ext uri="{386F3935-93C4-4BCD-93E2-E3B085C9AB24}">
-                  <p16:designElem xmlns:p16="http://schemas.microsoft.com/office/powerpoint/2015/main" xmlns="" val="1"/>
+                  <p16:designElem xmlns:p16="http://schemas.microsoft.com/office/powerpoint/2015/main" val="1"/>
                 </p:ext>
               </p:extLst>
             </p:nvPr>
@@ -23744,10 +23921,10 @@
             <p:cNvPr id="15" name="Freeform: Shape 23">
               <a:extLst>
                 <a:ext uri="{FF2B5EF4-FFF2-40B4-BE49-F238E27FC236}">
-                  <a16:creationId xmlns:a16="http://schemas.microsoft.com/office/drawing/2014/main" xmlns="" id="{7AA4055F-FF3F-644A-E624-DD0C525670F8}"/>
+                  <a16:creationId xmlns:a16="http://schemas.microsoft.com/office/drawing/2014/main" id="{7AA4055F-FF3F-644A-E624-DD0C525670F8}"/>
                 </a:ext>
                 <a:ext uri="{C183D7F6-B498-43B3-948B-1728B52AA6E4}">
-                  <adec:decorative xmlns:adec="http://schemas.microsoft.com/office/drawing/2017/decorative" xmlns="" val="1"/>
+                  <adec:decorative xmlns:adec="http://schemas.microsoft.com/office/drawing/2017/decorative" val="1"/>
                 </a:ext>
               </a:extLst>
             </p:cNvPr>
@@ -23755,7 +23932,7 @@
             <p:nvPr>
               <p:extLst>
                 <p:ext uri="{386F3935-93C4-4BCD-93E2-E3B085C9AB24}">
-                  <p16:designElem xmlns:p16="http://schemas.microsoft.com/office/powerpoint/2015/main" xmlns="" val="1"/>
+                  <p16:designElem xmlns:p16="http://schemas.microsoft.com/office/powerpoint/2015/main" val="1"/>
                 </p:ext>
               </p:extLst>
             </p:nvPr>
@@ -24223,7 +24400,7 @@
           <p:cNvPr id="16" name="Picture 15" descr="A close-up of a logo&#10;&#10;AI-generated content may be incorrect.">
             <a:extLst>
               <a:ext uri="{FF2B5EF4-FFF2-40B4-BE49-F238E27FC236}">
-                <a16:creationId xmlns:a16="http://schemas.microsoft.com/office/drawing/2014/main" xmlns="" id="{58A6E750-84CF-ABE6-EFC6-FB0465DF5B1C}"/>
+                <a16:creationId xmlns:a16="http://schemas.microsoft.com/office/drawing/2014/main" id="{58A6E750-84CF-ABE6-EFC6-FB0465DF5B1C}"/>
               </a:ext>
             </a:extLst>
           </p:cNvPr>
@@ -24259,7 +24436,7 @@
           <p:cNvPr id="17" name="Slide Number Placeholder 3">
             <a:extLst>
               <a:ext uri="{FF2B5EF4-FFF2-40B4-BE49-F238E27FC236}">
-                <a16:creationId xmlns:a16="http://schemas.microsoft.com/office/drawing/2014/main" xmlns="" id="{75C741BE-C4AB-E613-A2EB-9F3D7D425B81}"/>
+                <a16:creationId xmlns:a16="http://schemas.microsoft.com/office/drawing/2014/main" id="{75C741BE-C4AB-E613-A2EB-9F3D7D425B81}"/>
               </a:ext>
             </a:extLst>
           </p:cNvPr>
@@ -24402,10 +24579,10 @@
           <p:cNvPr id="18" name="Group 17">
             <a:extLst>
               <a:ext uri="{FF2B5EF4-FFF2-40B4-BE49-F238E27FC236}">
-                <a16:creationId xmlns:a16="http://schemas.microsoft.com/office/drawing/2014/main" xmlns="" id="{AEE57456-7DB2-D9E0-3DC1-538B620CB1E2}"/>
+                <a16:creationId xmlns:a16="http://schemas.microsoft.com/office/drawing/2014/main" id="{AEE57456-7DB2-D9E0-3DC1-538B620CB1E2}"/>
               </a:ext>
               <a:ext uri="{C183D7F6-B498-43B3-948B-1728B52AA6E4}">
-                <adec:decorative xmlns:adec="http://schemas.microsoft.com/office/drawing/2017/decorative" xmlns="" val="1"/>
+                <adec:decorative xmlns:adec="http://schemas.microsoft.com/office/drawing/2017/decorative" val="1"/>
               </a:ext>
             </a:extLst>
           </p:cNvPr>
@@ -24413,7 +24590,7 @@
           <p:nvPr>
             <p:extLst>
               <p:ext uri="{386F3935-93C4-4BCD-93E2-E3B085C9AB24}">
-                <p16:designElem xmlns:p16="http://schemas.microsoft.com/office/powerpoint/2015/main" xmlns="" val="1"/>
+                <p16:designElem xmlns:p16="http://schemas.microsoft.com/office/powerpoint/2015/main" val="1"/>
               </p:ext>
             </p:extLst>
           </p:nvPr>
@@ -24431,10 +24608,10 @@
             <p:cNvPr id="19" name="Freeform: Shape 26">
               <a:extLst>
                 <a:ext uri="{FF2B5EF4-FFF2-40B4-BE49-F238E27FC236}">
-                  <a16:creationId xmlns:a16="http://schemas.microsoft.com/office/drawing/2014/main" xmlns="" id="{6ADB1A64-E449-E424-9C0D-1AF876BDF396}"/>
+                  <a16:creationId xmlns:a16="http://schemas.microsoft.com/office/drawing/2014/main" id="{6ADB1A64-E449-E424-9C0D-1AF876BDF396}"/>
                 </a:ext>
                 <a:ext uri="{C183D7F6-B498-43B3-948B-1728B52AA6E4}">
-                  <adec:decorative xmlns:adec="http://schemas.microsoft.com/office/drawing/2017/decorative" xmlns="" val="1"/>
+                  <adec:decorative xmlns:adec="http://schemas.microsoft.com/office/drawing/2017/decorative" val="1"/>
                 </a:ext>
               </a:extLst>
             </p:cNvPr>
@@ -24442,7 +24619,7 @@
             <p:nvPr>
               <p:extLst>
                 <p:ext uri="{386F3935-93C4-4BCD-93E2-E3B085C9AB24}">
-                  <p16:designElem xmlns:p16="http://schemas.microsoft.com/office/powerpoint/2015/main" xmlns="" val="1"/>
+                  <p16:designElem xmlns:p16="http://schemas.microsoft.com/office/powerpoint/2015/main" val="1"/>
                 </p:ext>
               </p:extLst>
             </p:nvPr>
@@ -24829,10 +25006,10 @@
             <p:cNvPr id="20" name="Freeform: Shape 27">
               <a:extLst>
                 <a:ext uri="{FF2B5EF4-FFF2-40B4-BE49-F238E27FC236}">
-                  <a16:creationId xmlns:a16="http://schemas.microsoft.com/office/drawing/2014/main" xmlns="" id="{552BB634-DB1D-6842-4281-027496EA2BB3}"/>
+                  <a16:creationId xmlns:a16="http://schemas.microsoft.com/office/drawing/2014/main" id="{552BB634-DB1D-6842-4281-027496EA2BB3}"/>
                 </a:ext>
                 <a:ext uri="{C183D7F6-B498-43B3-948B-1728B52AA6E4}">
-                  <adec:decorative xmlns:adec="http://schemas.microsoft.com/office/drawing/2017/decorative" xmlns="" val="1"/>
+                  <adec:decorative xmlns:adec="http://schemas.microsoft.com/office/drawing/2017/decorative" val="1"/>
                 </a:ext>
               </a:extLst>
             </p:cNvPr>
@@ -24840,7 +25017,7 @@
             <p:nvPr>
               <p:extLst>
                 <p:ext uri="{386F3935-93C4-4BCD-93E2-E3B085C9AB24}">
-                  <p16:designElem xmlns:p16="http://schemas.microsoft.com/office/powerpoint/2015/main" xmlns="" val="1"/>
+                  <p16:designElem xmlns:p16="http://schemas.microsoft.com/office/powerpoint/2015/main" val="1"/>
                 </p:ext>
               </p:extLst>
             </p:nvPr>
@@ -25021,10 +25198,10 @@
             <p:cNvPr id="21" name="Freeform: Shape 28">
               <a:extLst>
                 <a:ext uri="{FF2B5EF4-FFF2-40B4-BE49-F238E27FC236}">
-                  <a16:creationId xmlns:a16="http://schemas.microsoft.com/office/drawing/2014/main" xmlns="" id="{BBD6908A-5E17-7977-6487-318FB3DA3C96}"/>
+                  <a16:creationId xmlns:a16="http://schemas.microsoft.com/office/drawing/2014/main" id="{BBD6908A-5E17-7977-6487-318FB3DA3C96}"/>
                 </a:ext>
                 <a:ext uri="{C183D7F6-B498-43B3-948B-1728B52AA6E4}">
-                  <adec:decorative xmlns:adec="http://schemas.microsoft.com/office/drawing/2017/decorative" xmlns="" val="1"/>
+                  <adec:decorative xmlns:adec="http://schemas.microsoft.com/office/drawing/2017/decorative" val="1"/>
                 </a:ext>
               </a:extLst>
             </p:cNvPr>
@@ -25032,7 +25209,7 @@
             <p:nvPr>
               <p:extLst>
                 <p:ext uri="{386F3935-93C4-4BCD-93E2-E3B085C9AB24}">
-                  <p16:designElem xmlns:p16="http://schemas.microsoft.com/office/powerpoint/2015/main" xmlns="" val="1"/>
+                  <p16:designElem xmlns:p16="http://schemas.microsoft.com/office/powerpoint/2015/main" val="1"/>
                 </p:ext>
               </p:extLst>
             </p:nvPr>
@@ -25275,10 +25452,10 @@
             <p:cNvPr id="22" name="Freeform: Shape 29">
               <a:extLst>
                 <a:ext uri="{FF2B5EF4-FFF2-40B4-BE49-F238E27FC236}">
-                  <a16:creationId xmlns:a16="http://schemas.microsoft.com/office/drawing/2014/main" xmlns="" id="{01A557D7-B7C4-85B2-1FB2-6EA251876B01}"/>
+                  <a16:creationId xmlns:a16="http://schemas.microsoft.com/office/drawing/2014/main" id="{01A557D7-B7C4-85B2-1FB2-6EA251876B01}"/>
                 </a:ext>
                 <a:ext uri="{C183D7F6-B498-43B3-948B-1728B52AA6E4}">
-                  <adec:decorative xmlns:adec="http://schemas.microsoft.com/office/drawing/2017/decorative" xmlns="" val="1"/>
+                  <adec:decorative xmlns:adec="http://schemas.microsoft.com/office/drawing/2017/decorative" val="1"/>
                 </a:ext>
               </a:extLst>
             </p:cNvPr>
@@ -25286,7 +25463,7 @@
             <p:nvPr>
               <p:extLst>
                 <p:ext uri="{386F3935-93C4-4BCD-93E2-E3B085C9AB24}">
-                  <p16:designElem xmlns:p16="http://schemas.microsoft.com/office/powerpoint/2015/main" xmlns="" val="1"/>
+                  <p16:designElem xmlns:p16="http://schemas.microsoft.com/office/powerpoint/2015/main" val="1"/>
                 </p:ext>
               </p:extLst>
             </p:nvPr>
@@ -25468,7 +25645,7 @@
           <p:cNvPr id="23" name="Picture 22" descr="A hands holding a light bulb&#10;&#10;AI-generated content may be incorrect.">
             <a:extLst>
               <a:ext uri="{FF2B5EF4-FFF2-40B4-BE49-F238E27FC236}">
-                <a16:creationId xmlns:a16="http://schemas.microsoft.com/office/drawing/2014/main" xmlns="" id="{6F93DC9F-B0C2-003C-927D-41C7D7DB01F3}"/>
+                <a16:creationId xmlns:a16="http://schemas.microsoft.com/office/drawing/2014/main" id="{6F93DC9F-B0C2-003C-927D-41C7D7DB01F3}"/>
               </a:ext>
             </a:extLst>
           </p:cNvPr>
@@ -25507,8 +25684,8 @@
         </p:nvSpPr>
         <p:spPr>
           <a:xfrm>
-            <a:off x="1180000" y="1280000"/>
-            <a:ext cx="2600000" cy="300000"/>
+            <a:off x="3952697" y="1235508"/>
+            <a:ext cx="3568980" cy="461665"/>
           </a:xfrm>
           <a:prstGeom prst="rect">
             <a:avLst/>
@@ -25529,6 +25706,7 @@
               </a:defRPr>
             </a:pPr>
             <a:r>
+              <a:rPr sz="2400" dirty="0"/>
               <a:t>Functional Modules</a:t>
             </a:r>
           </a:p>
@@ -25543,7 +25721,7 @@
         <p:spPr>
           <a:xfrm>
             <a:off x="1180000" y="1650000"/>
-            <a:ext cx="9300000" cy="2800000"/>
+            <a:ext cx="9300000" cy="3416320"/>
           </a:xfrm>
           <a:prstGeom prst="rect">
             <a:avLst/>
@@ -25556,7 +25734,9 @@
           </a:bodyPr>
           <a:lstStyle/>
           <a:p>
-            <a:pPr>
+            <a:pPr marL="342900" indent="-342900">
+              <a:buFont typeface="Arial" panose="020B0604020202020204" pitchFamily="34" charset="0"/>
+              <a:buChar char="•"/>
               <a:defRPr sz="1700" b="0">
                 <a:solidFill>
                   <a:srgbClr val="222222"/>
@@ -25564,37 +25744,73 @@
               </a:defRPr>
             </a:pPr>
             <a:r>
-              <a:t>- Authentication Module: user login and role handling</a:t>
+              <a:rPr sz="2400" dirty="0"/>
+              <a:t> Authentication Module: user login and role handling</a:t>
             </a:r>
           </a:p>
           <a:p>
+            <a:pPr marL="342900" indent="-342900">
+              <a:buFont typeface="Arial" panose="020B0604020202020204" pitchFamily="34" charset="0"/>
+              <a:buChar char="•"/>
+            </a:pPr>
             <a:r>
-              <a:t>- Session Management Module: create, update, publish, and close interviews</a:t>
+              <a:rPr sz="2400" dirty="0"/>
+              <a:t> Session Management Module: create, update, publish, and close interviews</a:t>
             </a:r>
           </a:p>
           <a:p>
+            <a:pPr marL="342900" indent="-342900">
+              <a:buFont typeface="Arial" panose="020B0604020202020204" pitchFamily="34" charset="0"/>
+              <a:buChar char="•"/>
+            </a:pPr>
             <a:r>
-              <a:t>- Candidate Module: registration, interview access, and completion tracking</a:t>
+              <a:rPr sz="2400" dirty="0"/>
+              <a:t> Candidate Module: registration, interview access, and completion tracking</a:t>
             </a:r>
           </a:p>
           <a:p>
+            <a:pPr marL="342900" indent="-342900">
+              <a:buFont typeface="Arial" panose="020B0604020202020204" pitchFamily="34" charset="0"/>
+              <a:buChar char="•"/>
+            </a:pPr>
             <a:r>
-              <a:t>- Recording Module: video and audio capture using MediaRecorder</a:t>
+              <a:rPr sz="2400" dirty="0"/>
+              <a:t>Recording Module: video and audio capture using </a:t>
+            </a:r>
+            <a:r>
+              <a:rPr sz="2400" dirty="0" err="1"/>
+              <a:t>MediaRecorder</a:t>
+            </a:r>
+            <a:endParaRPr sz="2400" dirty="0"/>
+          </a:p>
+          <a:p>
+            <a:pPr marL="342900" indent="-342900">
+              <a:buFont typeface="Arial" panose="020B0604020202020204" pitchFamily="34" charset="0"/>
+              <a:buChar char="•"/>
+            </a:pPr>
+            <a:r>
+              <a:rPr sz="2400" dirty="0"/>
+              <a:t>Transcription Module: speech recognition for answer text</a:t>
             </a:r>
           </a:p>
           <a:p>
+            <a:pPr marL="342900" indent="-342900">
+              <a:buFont typeface="Arial" panose="020B0604020202020204" pitchFamily="34" charset="0"/>
+              <a:buChar char="•"/>
+            </a:pPr>
             <a:r>
-              <a:t>- Transcription Module: speech recognition for answer text</a:t>
+              <a:rPr sz="2400" dirty="0"/>
+              <a:t>AI Analysis Module: keyword, relevance, confidence, and ranking logic</a:t>
             </a:r>
           </a:p>
           <a:p>
+            <a:pPr marL="342900" indent="-342900">
+              <a:buFont typeface="Arial" panose="020B0604020202020204" pitchFamily="34" charset="0"/>
+              <a:buChar char="•"/>
+            </a:pPr>
             <a:r>
-              <a:t>- AI Analysis Module: keyword, relevance, confidence, and ranking logic</a:t>
-            </a:r>
-          </a:p>
-          <a:p>
-            <a:r>
-              <a:t>- Dashboard Module: candidate list, scores, and recruiter insights</a:t>
+              <a:rPr sz="2400" dirty="0"/>
+              <a:t>Dashboard Module: candidate list, scores, and recruiter insights</a:t>
             </a:r>
           </a:p>
         </p:txBody>
@@ -25620,7 +25836,7 @@
         <p:cNvPr id="1" name="">
           <a:extLst>
             <a:ext uri="{FF2B5EF4-FFF2-40B4-BE49-F238E27FC236}">
-              <a16:creationId xmlns:a16="http://schemas.microsoft.com/office/drawing/2014/main" xmlns="" id="{128B8961-0E57-6CF4-6A2E-6E3844CE39AA}"/>
+              <a16:creationId xmlns:a16="http://schemas.microsoft.com/office/drawing/2014/main" id="{128B8961-0E57-6CF4-6A2E-6E3844CE39AA}"/>
             </a:ext>
           </a:extLst>
         </p:cNvPr>
@@ -25640,7 +25856,7 @@
           <p:cNvPr id="2" name="Title 1">
             <a:extLst>
               <a:ext uri="{FF2B5EF4-FFF2-40B4-BE49-F238E27FC236}">
-                <a16:creationId xmlns:a16="http://schemas.microsoft.com/office/drawing/2014/main" xmlns="" id="{593BF5FA-4F07-3415-25E3-C29F21EF6F96}"/>
+                <a16:creationId xmlns:a16="http://schemas.microsoft.com/office/drawing/2014/main" id="{593BF5FA-4F07-3415-25E3-C29F21EF6F96}"/>
               </a:ext>
             </a:extLst>
           </p:cNvPr>
@@ -25668,7 +25884,7 @@
           <p:cNvPr id="4" name="Slide Number Placeholder 3">
             <a:extLst>
               <a:ext uri="{FF2B5EF4-FFF2-40B4-BE49-F238E27FC236}">
-                <a16:creationId xmlns:a16="http://schemas.microsoft.com/office/drawing/2014/main" xmlns="" id="{C588901C-CFCA-5956-3989-DB48B37B9594}"/>
+                <a16:creationId xmlns:a16="http://schemas.microsoft.com/office/drawing/2014/main" id="{C588901C-CFCA-5956-3989-DB48B37B9594}"/>
               </a:ext>
             </a:extLst>
           </p:cNvPr>
@@ -25697,7 +25913,7 @@
           <p:cNvPr id="5" name="Picture 2" descr="Sharda University Logo &amp; Brand Assets (SVG, PNG and vector ...">
             <a:extLst>
               <a:ext uri="{FF2B5EF4-FFF2-40B4-BE49-F238E27FC236}">
-                <a16:creationId xmlns:a16="http://schemas.microsoft.com/office/drawing/2014/main" xmlns="" id="{808F960A-289C-591A-BEEA-F0564F0CC1C0}"/>
+                <a16:creationId xmlns:a16="http://schemas.microsoft.com/office/drawing/2014/main" id="{808F960A-289C-591A-BEEA-F0564F0CC1C0}"/>
               </a:ext>
             </a:extLst>
           </p:cNvPr>
@@ -25744,7 +25960,7 @@
           <p:cNvPr id="3" name="Title 1">
             <a:extLst>
               <a:ext uri="{FF2B5EF4-FFF2-40B4-BE49-F238E27FC236}">
-                <a16:creationId xmlns:a16="http://schemas.microsoft.com/office/drawing/2014/main" xmlns="" id="{CF7CB260-476E-D58E-6C85-22C5CE0DCD35}"/>
+                <a16:creationId xmlns:a16="http://schemas.microsoft.com/office/drawing/2014/main" id="{CF7CB260-476E-D58E-6C85-22C5CE0DCD35}"/>
               </a:ext>
             </a:extLst>
           </p:cNvPr>
@@ -25799,7 +26015,7 @@
           <p:cNvPr id="6" name="Slide Number Placeholder 3">
             <a:extLst>
               <a:ext uri="{FF2B5EF4-FFF2-40B4-BE49-F238E27FC236}">
-                <a16:creationId xmlns:a16="http://schemas.microsoft.com/office/drawing/2014/main" xmlns="" id="{6CA2909C-E433-498A-659E-70C518245CC7}"/>
+                <a16:creationId xmlns:a16="http://schemas.microsoft.com/office/drawing/2014/main" id="{6CA2909C-E433-498A-659E-70C518245CC7}"/>
               </a:ext>
             </a:extLst>
           </p:cNvPr>
@@ -25935,7 +26151,7 @@
           <p:cNvPr id="7" name="Picture 2" descr="Sharda University Logo &amp; Brand Assets (SVG, PNG and vector ...">
             <a:extLst>
               <a:ext uri="{FF2B5EF4-FFF2-40B4-BE49-F238E27FC236}">
-                <a16:creationId xmlns:a16="http://schemas.microsoft.com/office/drawing/2014/main" xmlns="" id="{42675280-1BA9-C78D-15BD-C603CC170392}"/>
+                <a16:creationId xmlns:a16="http://schemas.microsoft.com/office/drawing/2014/main" id="{42675280-1BA9-C78D-15BD-C603CC170392}"/>
               </a:ext>
             </a:extLst>
           </p:cNvPr>
@@ -25982,10 +26198,10 @@
           <p:cNvPr id="8" name="Rectangle 7">
             <a:extLst>
               <a:ext uri="{FF2B5EF4-FFF2-40B4-BE49-F238E27FC236}">
-                <a16:creationId xmlns:a16="http://schemas.microsoft.com/office/drawing/2014/main" xmlns="" id="{3E0B5CAE-859F-2E56-77C1-EEF4164DD087}"/>
+                <a16:creationId xmlns:a16="http://schemas.microsoft.com/office/drawing/2014/main" id="{3E0B5CAE-859F-2E56-77C1-EEF4164DD087}"/>
               </a:ext>
               <a:ext uri="{C183D7F6-B498-43B3-948B-1728B52AA6E4}">
-                <adec:decorative xmlns:adec="http://schemas.microsoft.com/office/drawing/2017/decorative" xmlns="" val="1"/>
+                <adec:decorative xmlns:adec="http://schemas.microsoft.com/office/drawing/2017/decorative" val="1"/>
               </a:ext>
             </a:extLst>
           </p:cNvPr>
@@ -25993,7 +26209,7 @@
           <p:nvPr>
             <p:extLst>
               <p:ext uri="{386F3935-93C4-4BCD-93E2-E3B085C9AB24}">
-                <p16:designElem xmlns:p16="http://schemas.microsoft.com/office/powerpoint/2015/main" xmlns="" val="1"/>
+                <p16:designElem xmlns:p16="http://schemas.microsoft.com/office/powerpoint/2015/main" val="1"/>
               </p:ext>
             </p:extLst>
           </p:nvPr>
@@ -26040,10 +26256,10 @@
           <p:cNvPr id="9" name="Rectangle 8">
             <a:extLst>
               <a:ext uri="{FF2B5EF4-FFF2-40B4-BE49-F238E27FC236}">
-                <a16:creationId xmlns:a16="http://schemas.microsoft.com/office/drawing/2014/main" xmlns="" id="{1C52D47E-A735-DAB0-DB53-2B7823EA2BFD}"/>
+                <a16:creationId xmlns:a16="http://schemas.microsoft.com/office/drawing/2014/main" id="{1C52D47E-A735-DAB0-DB53-2B7823EA2BFD}"/>
               </a:ext>
               <a:ext uri="{C183D7F6-B498-43B3-948B-1728B52AA6E4}">
-                <adec:decorative xmlns:adec="http://schemas.microsoft.com/office/drawing/2017/decorative" xmlns="" val="1"/>
+                <adec:decorative xmlns:adec="http://schemas.microsoft.com/office/drawing/2017/decorative" val="1"/>
               </a:ext>
             </a:extLst>
           </p:cNvPr>
@@ -26051,7 +26267,7 @@
           <p:nvPr>
             <p:extLst>
               <p:ext uri="{386F3935-93C4-4BCD-93E2-E3B085C9AB24}">
-                <p16:designElem xmlns:p16="http://schemas.microsoft.com/office/powerpoint/2015/main" xmlns="" val="1"/>
+                <p16:designElem xmlns:p16="http://schemas.microsoft.com/office/powerpoint/2015/main" val="1"/>
               </p:ext>
             </p:extLst>
           </p:nvPr>
@@ -26101,7 +26317,7 @@
           <p:cNvPr id="10" name="TextBox 9">
             <a:extLst>
               <a:ext uri="{FF2B5EF4-FFF2-40B4-BE49-F238E27FC236}">
-                <a16:creationId xmlns:a16="http://schemas.microsoft.com/office/drawing/2014/main" xmlns="" id="{A31126AD-F670-1E1A-0DD5-7E5F8DE779B0}"/>
+                <a16:creationId xmlns:a16="http://schemas.microsoft.com/office/drawing/2014/main" id="{A31126AD-F670-1E1A-0DD5-7E5F8DE779B0}"/>
               </a:ext>
             </a:extLst>
           </p:cNvPr>
@@ -26154,10 +26370,10 @@
           <p:cNvPr id="11" name="Group 10">
             <a:extLst>
               <a:ext uri="{FF2B5EF4-FFF2-40B4-BE49-F238E27FC236}">
-                <a16:creationId xmlns:a16="http://schemas.microsoft.com/office/drawing/2014/main" xmlns="" id="{4B08DE12-9223-0B45-7844-C8442188B03E}"/>
+                <a16:creationId xmlns:a16="http://schemas.microsoft.com/office/drawing/2014/main" id="{4B08DE12-9223-0B45-7844-C8442188B03E}"/>
               </a:ext>
               <a:ext uri="{C183D7F6-B498-43B3-948B-1728B52AA6E4}">
-                <adec:decorative xmlns:adec="http://schemas.microsoft.com/office/drawing/2017/decorative" xmlns="" val="1"/>
+                <adec:decorative xmlns:adec="http://schemas.microsoft.com/office/drawing/2017/decorative" val="1"/>
               </a:ext>
             </a:extLst>
           </p:cNvPr>
@@ -26165,7 +26381,7 @@
           <p:nvPr>
             <p:extLst>
               <p:ext uri="{386F3935-93C4-4BCD-93E2-E3B085C9AB24}">
-                <p16:designElem xmlns:p16="http://schemas.microsoft.com/office/powerpoint/2015/main" xmlns="" val="1"/>
+                <p16:designElem xmlns:p16="http://schemas.microsoft.com/office/powerpoint/2015/main" val="1"/>
               </p:ext>
             </p:extLst>
           </p:nvPr>
@@ -26183,10 +26399,10 @@
             <p:cNvPr id="12" name="Freeform: Shape 20">
               <a:extLst>
                 <a:ext uri="{FF2B5EF4-FFF2-40B4-BE49-F238E27FC236}">
-                  <a16:creationId xmlns:a16="http://schemas.microsoft.com/office/drawing/2014/main" xmlns="" id="{C6B389A5-57A1-5BDD-19D5-935489A75D70}"/>
+                  <a16:creationId xmlns:a16="http://schemas.microsoft.com/office/drawing/2014/main" id="{C6B389A5-57A1-5BDD-19D5-935489A75D70}"/>
                 </a:ext>
                 <a:ext uri="{C183D7F6-B498-43B3-948B-1728B52AA6E4}">
-                  <adec:decorative xmlns:adec="http://schemas.microsoft.com/office/drawing/2017/decorative" xmlns="" val="1"/>
+                  <adec:decorative xmlns:adec="http://schemas.microsoft.com/office/drawing/2017/decorative" val="1"/>
                 </a:ext>
               </a:extLst>
             </p:cNvPr>
@@ -26194,7 +26410,7 @@
             <p:nvPr>
               <p:extLst>
                 <p:ext uri="{386F3935-93C4-4BCD-93E2-E3B085C9AB24}">
-                  <p16:designElem xmlns:p16="http://schemas.microsoft.com/office/powerpoint/2015/main" xmlns="" val="1"/>
+                  <p16:designElem xmlns:p16="http://schemas.microsoft.com/office/powerpoint/2015/main" val="1"/>
                 </p:ext>
               </p:extLst>
             </p:nvPr>
@@ -26395,10 +26611,10 @@
             <p:cNvPr id="13" name="Freeform: Shape 21">
               <a:extLst>
                 <a:ext uri="{FF2B5EF4-FFF2-40B4-BE49-F238E27FC236}">
-                  <a16:creationId xmlns:a16="http://schemas.microsoft.com/office/drawing/2014/main" xmlns="" id="{D47C928B-E00F-1E52-C717-07A5AAF02563}"/>
+                  <a16:creationId xmlns:a16="http://schemas.microsoft.com/office/drawing/2014/main" id="{D47C928B-E00F-1E52-C717-07A5AAF02563}"/>
                 </a:ext>
                 <a:ext uri="{C183D7F6-B498-43B3-948B-1728B52AA6E4}">
-                  <adec:decorative xmlns:adec="http://schemas.microsoft.com/office/drawing/2017/decorative" xmlns="" val="1"/>
+                  <adec:decorative xmlns:adec="http://schemas.microsoft.com/office/drawing/2017/decorative" val="1"/>
                 </a:ext>
               </a:extLst>
             </p:cNvPr>
@@ -26406,7 +26622,7 @@
             <p:nvPr>
               <p:extLst>
                 <p:ext uri="{386F3935-93C4-4BCD-93E2-E3B085C9AB24}">
-                  <p16:designElem xmlns:p16="http://schemas.microsoft.com/office/powerpoint/2015/main" xmlns="" val="1"/>
+                  <p16:designElem xmlns:p16="http://schemas.microsoft.com/office/powerpoint/2015/main" val="1"/>
                 </p:ext>
               </p:extLst>
             </p:nvPr>
@@ -26607,10 +26823,10 @@
             <p:cNvPr id="14" name="Freeform: Shape 22">
               <a:extLst>
                 <a:ext uri="{FF2B5EF4-FFF2-40B4-BE49-F238E27FC236}">
-                  <a16:creationId xmlns:a16="http://schemas.microsoft.com/office/drawing/2014/main" xmlns="" id="{7CA94AD0-2C13-149F-27C4-C1BF48D92C66}"/>
+                  <a16:creationId xmlns:a16="http://schemas.microsoft.com/office/drawing/2014/main" id="{7CA94AD0-2C13-149F-27C4-C1BF48D92C66}"/>
                 </a:ext>
                 <a:ext uri="{C183D7F6-B498-43B3-948B-1728B52AA6E4}">
-                  <adec:decorative xmlns:adec="http://schemas.microsoft.com/office/drawing/2017/decorative" xmlns="" val="1"/>
+                  <adec:decorative xmlns:adec="http://schemas.microsoft.com/office/drawing/2017/decorative" val="1"/>
                 </a:ext>
               </a:extLst>
             </p:cNvPr>
@@ -26618,7 +26834,7 @@
             <p:nvPr>
               <p:extLst>
                 <p:ext uri="{386F3935-93C4-4BCD-93E2-E3B085C9AB24}">
-                  <p16:designElem xmlns:p16="http://schemas.microsoft.com/office/powerpoint/2015/main" xmlns="" val="1"/>
+                  <p16:designElem xmlns:p16="http://schemas.microsoft.com/office/powerpoint/2015/main" val="1"/>
                 </p:ext>
               </p:extLst>
             </p:nvPr>
@@ -26929,10 +27145,10 @@
             <p:cNvPr id="15" name="Freeform: Shape 23">
               <a:extLst>
                 <a:ext uri="{FF2B5EF4-FFF2-40B4-BE49-F238E27FC236}">
-                  <a16:creationId xmlns:a16="http://schemas.microsoft.com/office/drawing/2014/main" xmlns="" id="{81292ABA-6799-0521-BC93-F47A7A145697}"/>
+                  <a16:creationId xmlns:a16="http://schemas.microsoft.com/office/drawing/2014/main" id="{81292ABA-6799-0521-BC93-F47A7A145697}"/>
                 </a:ext>
                 <a:ext uri="{C183D7F6-B498-43B3-948B-1728B52AA6E4}">
-                  <adec:decorative xmlns:adec="http://schemas.microsoft.com/office/drawing/2017/decorative" xmlns="" val="1"/>
+                  <adec:decorative xmlns:adec="http://schemas.microsoft.com/office/drawing/2017/decorative" val="1"/>
                 </a:ext>
               </a:extLst>
             </p:cNvPr>
@@ -26940,7 +27156,7 @@
             <p:nvPr>
               <p:extLst>
                 <p:ext uri="{386F3935-93C4-4BCD-93E2-E3B085C9AB24}">
-                  <p16:designElem xmlns:p16="http://schemas.microsoft.com/office/powerpoint/2015/main" xmlns="" val="1"/>
+                  <p16:designElem xmlns:p16="http://schemas.microsoft.com/office/powerpoint/2015/main" val="1"/>
                 </p:ext>
               </p:extLst>
             </p:nvPr>
@@ -27408,7 +27624,7 @@
           <p:cNvPr id="16" name="Picture 15" descr="A close-up of a logo&#10;&#10;AI-generated content may be incorrect.">
             <a:extLst>
               <a:ext uri="{FF2B5EF4-FFF2-40B4-BE49-F238E27FC236}">
-                <a16:creationId xmlns:a16="http://schemas.microsoft.com/office/drawing/2014/main" xmlns="" id="{52C4D73F-1345-3CA9-C6C5-8928CA105ED5}"/>
+                <a16:creationId xmlns:a16="http://schemas.microsoft.com/office/drawing/2014/main" id="{52C4D73F-1345-3CA9-C6C5-8928CA105ED5}"/>
               </a:ext>
             </a:extLst>
           </p:cNvPr>
@@ -27444,7 +27660,7 @@
           <p:cNvPr id="17" name="Slide Number Placeholder 3">
             <a:extLst>
               <a:ext uri="{FF2B5EF4-FFF2-40B4-BE49-F238E27FC236}">
-                <a16:creationId xmlns:a16="http://schemas.microsoft.com/office/drawing/2014/main" xmlns="" id="{06788EA6-29B6-4A1B-6379-A0B958085489}"/>
+                <a16:creationId xmlns:a16="http://schemas.microsoft.com/office/drawing/2014/main" id="{06788EA6-29B6-4A1B-6379-A0B958085489}"/>
               </a:ext>
             </a:extLst>
           </p:cNvPr>
@@ -27587,10 +27803,10 @@
           <p:cNvPr id="18" name="Group 17">
             <a:extLst>
               <a:ext uri="{FF2B5EF4-FFF2-40B4-BE49-F238E27FC236}">
-                <a16:creationId xmlns:a16="http://schemas.microsoft.com/office/drawing/2014/main" xmlns="" id="{064AE98E-B324-7FD5-5724-C47113E82591}"/>
+                <a16:creationId xmlns:a16="http://schemas.microsoft.com/office/drawing/2014/main" id="{064AE98E-B324-7FD5-5724-C47113E82591}"/>
               </a:ext>
               <a:ext uri="{C183D7F6-B498-43B3-948B-1728B52AA6E4}">
-                <adec:decorative xmlns:adec="http://schemas.microsoft.com/office/drawing/2017/decorative" xmlns="" val="1"/>
+                <adec:decorative xmlns:adec="http://schemas.microsoft.com/office/drawing/2017/decorative" val="1"/>
               </a:ext>
             </a:extLst>
           </p:cNvPr>
@@ -27598,7 +27814,7 @@
           <p:nvPr>
             <p:extLst>
               <p:ext uri="{386F3935-93C4-4BCD-93E2-E3B085C9AB24}">
-                <p16:designElem xmlns:p16="http://schemas.microsoft.com/office/powerpoint/2015/main" xmlns="" val="1"/>
+                <p16:designElem xmlns:p16="http://schemas.microsoft.com/office/powerpoint/2015/main" val="1"/>
               </p:ext>
             </p:extLst>
           </p:nvPr>
@@ -27616,10 +27832,10 @@
             <p:cNvPr id="19" name="Freeform: Shape 26">
               <a:extLst>
                 <a:ext uri="{FF2B5EF4-FFF2-40B4-BE49-F238E27FC236}">
-                  <a16:creationId xmlns:a16="http://schemas.microsoft.com/office/drawing/2014/main" xmlns="" id="{93A260AE-0C5C-4CC3-70C4-9D528AE9D855}"/>
+                  <a16:creationId xmlns:a16="http://schemas.microsoft.com/office/drawing/2014/main" id="{93A260AE-0C5C-4CC3-70C4-9D528AE9D855}"/>
                 </a:ext>
                 <a:ext uri="{C183D7F6-B498-43B3-948B-1728B52AA6E4}">
-                  <adec:decorative xmlns:adec="http://schemas.microsoft.com/office/drawing/2017/decorative" xmlns="" val="1"/>
+                  <adec:decorative xmlns:adec="http://schemas.microsoft.com/office/drawing/2017/decorative" val="1"/>
                 </a:ext>
               </a:extLst>
             </p:cNvPr>
@@ -27627,7 +27843,7 @@
             <p:nvPr>
               <p:extLst>
                 <p:ext uri="{386F3935-93C4-4BCD-93E2-E3B085C9AB24}">
-                  <p16:designElem xmlns:p16="http://schemas.microsoft.com/office/powerpoint/2015/main" xmlns="" val="1"/>
+                  <p16:designElem xmlns:p16="http://schemas.microsoft.com/office/powerpoint/2015/main" val="1"/>
                 </p:ext>
               </p:extLst>
             </p:nvPr>
@@ -28014,10 +28230,10 @@
             <p:cNvPr id="20" name="Freeform: Shape 27">
               <a:extLst>
                 <a:ext uri="{FF2B5EF4-FFF2-40B4-BE49-F238E27FC236}">
-                  <a16:creationId xmlns:a16="http://schemas.microsoft.com/office/drawing/2014/main" xmlns="" id="{F824AC28-C4B1-F6B1-6402-A3E6B78AFF79}"/>
+                  <a16:creationId xmlns:a16="http://schemas.microsoft.com/office/drawing/2014/main" id="{F824AC28-C4B1-F6B1-6402-A3E6B78AFF79}"/>
                 </a:ext>
                 <a:ext uri="{C183D7F6-B498-43B3-948B-1728B52AA6E4}">
-                  <adec:decorative xmlns:adec="http://schemas.microsoft.com/office/drawing/2017/decorative" xmlns="" val="1"/>
+                  <adec:decorative xmlns:adec="http://schemas.microsoft.com/office/drawing/2017/decorative" val="1"/>
                 </a:ext>
               </a:extLst>
             </p:cNvPr>
@@ -28025,7 +28241,7 @@
             <p:nvPr>
               <p:extLst>
                 <p:ext uri="{386F3935-93C4-4BCD-93E2-E3B085C9AB24}">
-                  <p16:designElem xmlns:p16="http://schemas.microsoft.com/office/powerpoint/2015/main" xmlns="" val="1"/>
+                  <p16:designElem xmlns:p16="http://schemas.microsoft.com/office/powerpoint/2015/main" val="1"/>
                 </p:ext>
               </p:extLst>
             </p:nvPr>
@@ -28206,10 +28422,10 @@
             <p:cNvPr id="21" name="Freeform: Shape 28">
               <a:extLst>
                 <a:ext uri="{FF2B5EF4-FFF2-40B4-BE49-F238E27FC236}">
-                  <a16:creationId xmlns:a16="http://schemas.microsoft.com/office/drawing/2014/main" xmlns="" id="{1E9727E5-F04D-5242-381E-4D642EBCFF15}"/>
+                  <a16:creationId xmlns:a16="http://schemas.microsoft.com/office/drawing/2014/main" id="{1E9727E5-F04D-5242-381E-4D642EBCFF15}"/>
                 </a:ext>
                 <a:ext uri="{C183D7F6-B498-43B3-948B-1728B52AA6E4}">
-                  <adec:decorative xmlns:adec="http://schemas.microsoft.com/office/drawing/2017/decorative" xmlns="" val="1"/>
+                  <adec:decorative xmlns:adec="http://schemas.microsoft.com/office/drawing/2017/decorative" val="1"/>
                 </a:ext>
               </a:extLst>
             </p:cNvPr>
@@ -28217,7 +28433,7 @@
             <p:nvPr>
               <p:extLst>
                 <p:ext uri="{386F3935-93C4-4BCD-93E2-E3B085C9AB24}">
-                  <p16:designElem xmlns:p16="http://schemas.microsoft.com/office/powerpoint/2015/main" xmlns="" val="1"/>
+                  <p16:designElem xmlns:p16="http://schemas.microsoft.com/office/powerpoint/2015/main" val="1"/>
                 </p:ext>
               </p:extLst>
             </p:nvPr>
@@ -28460,10 +28676,10 @@
             <p:cNvPr id="22" name="Freeform: Shape 29">
               <a:extLst>
                 <a:ext uri="{FF2B5EF4-FFF2-40B4-BE49-F238E27FC236}">
-                  <a16:creationId xmlns:a16="http://schemas.microsoft.com/office/drawing/2014/main" xmlns="" id="{E7132A91-975B-8373-609C-1F7963E8D47D}"/>
+                  <a16:creationId xmlns:a16="http://schemas.microsoft.com/office/drawing/2014/main" id="{E7132A91-975B-8373-609C-1F7963E8D47D}"/>
                 </a:ext>
                 <a:ext uri="{C183D7F6-B498-43B3-948B-1728B52AA6E4}">
-                  <adec:decorative xmlns:adec="http://schemas.microsoft.com/office/drawing/2017/decorative" xmlns="" val="1"/>
+                  <adec:decorative xmlns:adec="http://schemas.microsoft.com/office/drawing/2017/decorative" val="1"/>
                 </a:ext>
               </a:extLst>
             </p:cNvPr>
@@ -28471,7 +28687,7 @@
             <p:nvPr>
               <p:extLst>
                 <p:ext uri="{386F3935-93C4-4BCD-93E2-E3B085C9AB24}">
-                  <p16:designElem xmlns:p16="http://schemas.microsoft.com/office/powerpoint/2015/main" xmlns="" val="1"/>
+                  <p16:designElem xmlns:p16="http://schemas.microsoft.com/office/powerpoint/2015/main" val="1"/>
                 </p:ext>
               </p:extLst>
             </p:nvPr>
@@ -28653,7 +28869,7 @@
           <p:cNvPr id="23" name="Picture 22" descr="A hands holding a light bulb&#10;&#10;AI-generated content may be incorrect.">
             <a:extLst>
               <a:ext uri="{FF2B5EF4-FFF2-40B4-BE49-F238E27FC236}">
-                <a16:creationId xmlns:a16="http://schemas.microsoft.com/office/drawing/2014/main" xmlns="" id="{62CCCF5C-DE08-D2D7-6A05-49C3680CB5AE}"/>
+                <a16:creationId xmlns:a16="http://schemas.microsoft.com/office/drawing/2014/main" id="{62CCCF5C-DE08-D2D7-6A05-49C3680CB5AE}"/>
               </a:ext>
             </a:extLst>
           </p:cNvPr>
@@ -28852,6 +29068,7 @@
           <a:lstStyle/>
           <a:p>
             <a:pPr algn="ctr"/>
+            <a:endParaRPr/>
           </a:p>
         </p:txBody>
       </p:sp>
@@ -28953,6 +29170,7 @@
           <a:lstStyle/>
           <a:p>
             <a:pPr algn="ctr"/>
+            <a:endParaRPr/>
           </a:p>
         </p:txBody>
       </p:sp>
@@ -29054,6 +29272,7 @@
           <a:lstStyle/>
           <a:p>
             <a:pPr algn="ctr"/>
+            <a:endParaRPr/>
           </a:p>
         </p:txBody>
       </p:sp>
@@ -29155,6 +29374,7 @@
           <a:lstStyle/>
           <a:p>
             <a:pPr algn="ctr"/>
+            <a:endParaRPr/>
           </a:p>
         </p:txBody>
       </p:sp>
@@ -29347,6 +29567,7 @@
           <a:lstStyle/>
           <a:p>
             <a:pPr algn="ctr"/>
+            <a:endParaRPr/>
           </a:p>
         </p:txBody>
       </p:sp>
@@ -29448,6 +29669,7 @@
           <a:lstStyle/>
           <a:p>
             <a:pPr algn="ctr"/>
+            <a:endParaRPr/>
           </a:p>
         </p:txBody>
       </p:sp>
@@ -29549,6 +29771,7 @@
           <a:lstStyle/>
           <a:p>
             <a:pPr algn="ctr"/>
+            <a:endParaRPr/>
           </a:p>
         </p:txBody>
       </p:sp>
@@ -29650,6 +29873,7 @@
           <a:lstStyle/>
           <a:p>
             <a:pPr algn="ctr"/>
+            <a:endParaRPr/>
           </a:p>
         </p:txBody>
       </p:sp>
@@ -29747,6 +29971,7 @@
           <a:lstStyle/>
           <a:p>
             <a:pPr algn="ctr"/>
+            <a:endParaRPr/>
           </a:p>
         </p:txBody>
       </p:sp>
@@ -29934,7 +30159,7 @@
           <p:cNvPr id="2" name="Title 1">
             <a:extLst>
               <a:ext uri="{FF2B5EF4-FFF2-40B4-BE49-F238E27FC236}">
-                <a16:creationId xmlns:a16="http://schemas.microsoft.com/office/drawing/2014/main" xmlns="" id="{3E58B3AE-D78E-2DFA-3544-ACC07E1F4CA9}"/>
+                <a16:creationId xmlns:a16="http://schemas.microsoft.com/office/drawing/2014/main" id="{3E58B3AE-D78E-2DFA-3544-ACC07E1F4CA9}"/>
               </a:ext>
             </a:extLst>
           </p:cNvPr>
@@ -29963,7 +30188,7 @@
           <p:cNvPr id="4" name="Slide Number Placeholder 3">
             <a:extLst>
               <a:ext uri="{FF2B5EF4-FFF2-40B4-BE49-F238E27FC236}">
-                <a16:creationId xmlns:a16="http://schemas.microsoft.com/office/drawing/2014/main" xmlns="" id="{7DD390EE-1A10-9044-4D2A-E79878422CD2}"/>
+                <a16:creationId xmlns:a16="http://schemas.microsoft.com/office/drawing/2014/main" id="{7DD390EE-1A10-9044-4D2A-E79878422CD2}"/>
               </a:ext>
             </a:extLst>
           </p:cNvPr>
@@ -29992,7 +30217,7 @@
           <p:cNvPr id="6" name="Rectangle 2">
             <a:extLst>
               <a:ext uri="{FF2B5EF4-FFF2-40B4-BE49-F238E27FC236}">
-                <a16:creationId xmlns:a16="http://schemas.microsoft.com/office/drawing/2014/main" xmlns="" id="{192C1A7F-F8E0-0AFD-7993-6C1FDECBCAB1}"/>
+                <a16:creationId xmlns:a16="http://schemas.microsoft.com/office/drawing/2014/main" id="{192C1A7F-F8E0-0AFD-7993-6C1FDECBCAB1}"/>
               </a:ext>
             </a:extLst>
           </p:cNvPr>
@@ -30808,7 +31033,7 @@
   <a:extraClrSchemeLst/>
   <a:extLst>
     <a:ext uri="{05A4C25C-085E-4340-85A3-A5531E510DB2}">
-      <thm15:themeFamily xmlns:thm15="http://schemas.microsoft.com/office/thememl/2012/main" xmlns="" name="Office Theme" id="{62F939B6-93AF-4DB8-9C6B-D6C7DFDC589F}" vid="{4A3C46E8-61CC-4603-A589-7422A47A8E4A}"/>
+      <thm15:themeFamily xmlns:thm15="http://schemas.microsoft.com/office/thememl/2012/main" name="Office Theme" id="{62F939B6-93AF-4DB8-9C6B-D6C7DFDC589F}" vid="{4A3C46E8-61CC-4603-A589-7422A47A8E4A}"/>
     </a:ext>
   </a:extLst>
 </a:theme>
@@ -31103,7 +31328,7 @@
   <a:extraClrSchemeLst/>
   <a:extLst>
     <a:ext uri="{05A4C25C-085E-4340-85A3-A5531E510DB2}">
-      <thm15:themeFamily xmlns:thm15="http://schemas.microsoft.com/office/thememl/2012/main" xmlns="" name="Office Theme" id="{62F939B6-93AF-4DB8-9C6B-D6C7DFDC589F}" vid="{4A3C46E8-61CC-4603-A589-7422A47A8E4A}"/>
+      <thm15:themeFamily xmlns:thm15="http://schemas.microsoft.com/office/thememl/2012/main" name="Office Theme" id="{62F939B6-93AF-4DB8-9C6B-D6C7DFDC589F}" vid="{4A3C46E8-61CC-4603-A589-7422A47A8E4A}"/>
     </a:ext>
   </a:extLst>
 </a:theme>
